--- a/pitch_deck/CleanAir_ClearStreets_PitchDeck.pptx
+++ b/pitch_deck/CleanAir_ClearStreets_PitchDeck.pptx
@@ -4,6 +4,9 @@
   <p:sldMasterIdLst>
     <p:sldMasterId id="2147483648" r:id="rId1"/>
   </p:sldMasterIdLst>
+  <p:notesMasterIdLst>
+    <p:notesMasterId r:id="rId14"/>
+  </p:notesMasterIdLst>
   <p:sldIdLst>
     <p:sldId id="256" r:id="rId2"/>
     <p:sldId id="257" r:id="rId3"/>
@@ -18,9 +21,6 @@
     <p:sldId id="266" r:id="rId12"/>
     <p:sldId id="267" r:id="rId13"/>
   </p:sldIdLst>
-  <p:notesMasterIdLst>
-    <p:notesMasterId r:id="rId14"/>
-  </p:notesMasterIdLst>
   <p:sldSz cx="12192000" cy="6858000"/>
   <p:notesSz cx="6858000" cy="12192000"/>
   <p:defaultTextStyle>
@@ -115,18 +115,26 @@
       </a:defRPr>
     </a:lvl9pPr>
   </p:defaultTextStyle>
+  <p:extLst>
+    <p:ext uri="{EFAFB233-063F-42B5-8137-9DF3F51BA10A}">
+      <p15:sldGuideLst xmlns:p15="http://schemas.microsoft.com/office/powerpoint/2012/main"/>
+    </p:ext>
+  </p:extLst>
 </p:presentation>
 </file>
 
 <file path=ppt/charts/chart1.xml><?xml version="1.0" encoding="utf-8"?>
-<c:chartSpace xmlns:c="http://schemas.openxmlformats.org/drawingml/2006/chart" xmlns:a="http://schemas.openxmlformats.org/drawingml/2006/main" xmlns:r="http://schemas.openxmlformats.org/officeDocument/2006/relationships">
+<c:chartSpace xmlns:c="http://schemas.openxmlformats.org/drawingml/2006/chart" xmlns:a="http://schemas.openxmlformats.org/drawingml/2006/main" xmlns:r="http://schemas.openxmlformats.org/officeDocument/2006/relationships" xmlns:c16r2="http://schemas.microsoft.com/office/drawing/2015/06/chart">
   <c:date1904 val="0"/>
+  <c:lang val="en-US"/>
   <c:roundedCorners val="1"/>
+  <c:style val="2"/>
   <c:chart>
     <c:autoTitleDeleted val="1"/>
     <c:plotArea>
       <c:layout/>
       <c:lineChart>
+        <c:grouping val="standard"/>
         <c:varyColors val="0"/>
         <c:ser>
           <c:idx val="0"/>
@@ -143,9 +151,6 @@
             </c:strRef>
           </c:tx>
           <c:spPr>
-            <a:solidFill>
-              <a:srgbClr val="D0342C"/>
-            </a:solidFill>
             <a:ln w="31750" cap="flat">
               <a:solidFill>
                 <a:srgbClr val="D0342C"/>
@@ -155,31 +160,6 @@
             </a:ln>
             <a:effectLst/>
           </c:spPr>
-          <c:invertIfNegative val="0"/>
-          <c:dLbls>
-            <c:numFmt formatCode="#,##0" sourceLinked="0"/>
-            <c:txPr>
-              <a:bodyPr/>
-              <a:lstStyle/>
-              <a:p>
-                <a:pPr>
-                  <a:defRPr b="0" i="0" strike="noStrike" sz="1200" u="none">
-                    <a:solidFill>
-                      <a:srgbClr val="000000"/>
-                    </a:solidFill>
-                    <a:latin typeface="Arial"/>
-                  </a:defRPr>
-                </a:pPr>
-              </a:p>
-            </c:txPr>
-            <c:showLegendKey val="0"/>
-            <c:showVal val="0"/>
-            <c:showCatName val="0"/>
-            <c:showSerName val="0"/>
-            <c:showPercent val="0"/>
-            <c:showBubbleSize val="0"/>
-            <c:showLeaderLines val="0"/>
-          </c:dLbls>
           <c:marker>
             <c:symbol val="circle"/>
             <c:size val="6"/>
@@ -198,104 +178,102 @@
             </c:spPr>
           </c:marker>
           <c:cat>
-            <c:multiLvlStrRef>
+            <c:strRef>
               <c:f>Sheet1!$A$2:$A$31</c:f>
-              <c:multiLvlStrCache>
+              <c:strCache>
                 <c:ptCount val="30"/>
-                <c:lvl>
-                  <c:pt idx="0">
-                    <c:v>D1</c:v>
-                  </c:pt>
-                  <c:pt idx="1">
-                    <c:v>D2</c:v>
-                  </c:pt>
-                  <c:pt idx="2">
-                    <c:v>D3</c:v>
-                  </c:pt>
-                  <c:pt idx="3">
-                    <c:v>D4</c:v>
-                  </c:pt>
-                  <c:pt idx="4">
-                    <c:v>D5</c:v>
-                  </c:pt>
-                  <c:pt idx="5">
-                    <c:v>D6</c:v>
-                  </c:pt>
-                  <c:pt idx="6">
-                    <c:v>D7</c:v>
-                  </c:pt>
-                  <c:pt idx="7">
-                    <c:v>D8</c:v>
-                  </c:pt>
-                  <c:pt idx="8">
-                    <c:v>D9</c:v>
-                  </c:pt>
-                  <c:pt idx="9">
-                    <c:v>D10</c:v>
-                  </c:pt>
-                  <c:pt idx="10">
-                    <c:v>D11</c:v>
-                  </c:pt>
-                  <c:pt idx="11">
-                    <c:v>D12</c:v>
-                  </c:pt>
-                  <c:pt idx="12">
-                    <c:v>D13</c:v>
-                  </c:pt>
-                  <c:pt idx="13">
-                    <c:v>D14</c:v>
-                  </c:pt>
-                  <c:pt idx="14">
-                    <c:v>D15</c:v>
-                  </c:pt>
-                  <c:pt idx="15">
-                    <c:v>D16</c:v>
-                  </c:pt>
-                  <c:pt idx="16">
-                    <c:v>D17</c:v>
-                  </c:pt>
-                  <c:pt idx="17">
-                    <c:v>D18</c:v>
-                  </c:pt>
-                  <c:pt idx="18">
-                    <c:v>D19</c:v>
-                  </c:pt>
-                  <c:pt idx="19">
-                    <c:v>D20</c:v>
-                  </c:pt>
-                  <c:pt idx="20">
-                    <c:v>D21</c:v>
-                  </c:pt>
-                  <c:pt idx="21">
-                    <c:v>D22</c:v>
-                  </c:pt>
-                  <c:pt idx="22">
-                    <c:v>D23</c:v>
-                  </c:pt>
-                  <c:pt idx="23">
-                    <c:v>D24</c:v>
-                  </c:pt>
-                  <c:pt idx="24">
-                    <c:v>D25</c:v>
-                  </c:pt>
-                  <c:pt idx="25">
-                    <c:v>D26</c:v>
-                  </c:pt>
-                  <c:pt idx="26">
-                    <c:v>D27</c:v>
-                  </c:pt>
-                  <c:pt idx="27">
-                    <c:v>D28</c:v>
-                  </c:pt>
-                  <c:pt idx="28">
-                    <c:v>D29</c:v>
-                  </c:pt>
-                  <c:pt idx="29">
-                    <c:v>D30</c:v>
-                  </c:pt>
-                </c:lvl>
-              </c:multiLvlStrCache>
-            </c:multiLvlStrRef>
+                <c:pt idx="0">
+                  <c:v>D1</c:v>
+                </c:pt>
+                <c:pt idx="1">
+                  <c:v>D2</c:v>
+                </c:pt>
+                <c:pt idx="2">
+                  <c:v>D3</c:v>
+                </c:pt>
+                <c:pt idx="3">
+                  <c:v>D4</c:v>
+                </c:pt>
+                <c:pt idx="4">
+                  <c:v>D5</c:v>
+                </c:pt>
+                <c:pt idx="5">
+                  <c:v>D6</c:v>
+                </c:pt>
+                <c:pt idx="6">
+                  <c:v>D7</c:v>
+                </c:pt>
+                <c:pt idx="7">
+                  <c:v>D8</c:v>
+                </c:pt>
+                <c:pt idx="8">
+                  <c:v>D9</c:v>
+                </c:pt>
+                <c:pt idx="9">
+                  <c:v>D10</c:v>
+                </c:pt>
+                <c:pt idx="10">
+                  <c:v>D11</c:v>
+                </c:pt>
+                <c:pt idx="11">
+                  <c:v>D12</c:v>
+                </c:pt>
+                <c:pt idx="12">
+                  <c:v>D13</c:v>
+                </c:pt>
+                <c:pt idx="13">
+                  <c:v>D14</c:v>
+                </c:pt>
+                <c:pt idx="14">
+                  <c:v>D15</c:v>
+                </c:pt>
+                <c:pt idx="15">
+                  <c:v>D16</c:v>
+                </c:pt>
+                <c:pt idx="16">
+                  <c:v>D17</c:v>
+                </c:pt>
+                <c:pt idx="17">
+                  <c:v>D18</c:v>
+                </c:pt>
+                <c:pt idx="18">
+                  <c:v>D19</c:v>
+                </c:pt>
+                <c:pt idx="19">
+                  <c:v>D20</c:v>
+                </c:pt>
+                <c:pt idx="20">
+                  <c:v>D21</c:v>
+                </c:pt>
+                <c:pt idx="21">
+                  <c:v>D22</c:v>
+                </c:pt>
+                <c:pt idx="22">
+                  <c:v>D23</c:v>
+                </c:pt>
+                <c:pt idx="23">
+                  <c:v>D24</c:v>
+                </c:pt>
+                <c:pt idx="24">
+                  <c:v>D25</c:v>
+                </c:pt>
+                <c:pt idx="25">
+                  <c:v>D26</c:v>
+                </c:pt>
+                <c:pt idx="26">
+                  <c:v>D27</c:v>
+                </c:pt>
+                <c:pt idx="27">
+                  <c:v>D28</c:v>
+                </c:pt>
+                <c:pt idx="28">
+                  <c:v>D29</c:v>
+                </c:pt>
+                <c:pt idx="29">
+                  <c:v>D30</c:v>
+                </c:pt>
+              </c:strCache>
+            </c:strRef>
           </c:cat>
           <c:val>
             <c:numRef>
@@ -337,7 +315,7 @@
                   <c:v>293.3</c:v>
                 </c:pt>
                 <c:pt idx="11">
-                  <c:v>293.4</c:v>
+                  <c:v>293.39999999999998</c:v>
                 </c:pt>
                 <c:pt idx="12">
                   <c:v>204.4</c:v>
@@ -370,7 +348,7 @@
                   <c:v>181.1</c:v>
                 </c:pt>
                 <c:pt idx="22">
-                  <c:v>148.7</c:v>
+                  <c:v>148.69999999999999</c:v>
                 </c:pt>
                 <c:pt idx="23">
                   <c:v>292.5</c:v>
@@ -379,16 +357,16 @@
                   <c:v>418.9</c:v>
                 </c:pt>
                 <c:pt idx="25">
-                  <c:v>132.8</c:v>
+                  <c:v>132.80000000000001</c:v>
                 </c:pt>
                 <c:pt idx="26">
-                  <c:v>80.6</c:v>
+                  <c:v>80.599999999999994</c:v>
                 </c:pt>
                 <c:pt idx="27">
                   <c:v>57.6</c:v>
                 </c:pt>
                 <c:pt idx="28">
-                  <c:v>143.2</c:v>
+                  <c:v>143.19999999999999</c:v>
                 </c:pt>
                 <c:pt idx="29">
                   <c:v>205.2</c:v>
@@ -397,37 +375,27 @@
             </c:numRef>
           </c:val>
           <c:smooth val="0"/>
+          <c:extLst>
+            <c:ext xmlns:c16="http://schemas.microsoft.com/office/drawing/2014/chart" uri="{C3380CC4-5D6E-409C-BE32-E72D297353CC}">
+              <c16:uniqueId val="{00000000-4DC3-409B-9073-3CF02733835B}"/>
+            </c:ext>
+          </c:extLst>
         </c:ser>
         <c:dLbls>
-          <c:numFmt formatCode="#,##0" sourceLinked="0"/>
-          <c:txPr>
-            <a:bodyPr/>
-            <a:lstStyle/>
-            <a:p>
-              <a:pPr>
-                <a:defRPr b="0" i="0" strike="noStrike" sz="1200" u="none">
-                  <a:solidFill>
-                    <a:srgbClr val="000000"/>
-                  </a:solidFill>
-                  <a:latin typeface="Arial"/>
-                </a:defRPr>
-              </a:pPr>
-            </a:p>
-          </c:txPr>
           <c:showLegendKey val="0"/>
           <c:showVal val="0"/>
           <c:showCatName val="0"/>
           <c:showSerName val="0"/>
           <c:showPercent val="0"/>
           <c:showBubbleSize val="0"/>
-          <c:showLeaderLines val="0"/>
         </c:dLbls>
         <c:marker val="1"/>
+        <c:smooth val="0"/>
         <c:axId val="2094734554"/>
         <c:axId val="2094734552"/>
-        <c:axId val="2094734556"/>
       </c:lineChart>
       <c:lineChart>
+        <c:grouping val="standard"/>
         <c:varyColors val="0"/>
         <c:ser>
           <c:idx val="1"/>
@@ -444,9 +412,6 @@
             </c:strRef>
           </c:tx>
           <c:spPr>
-            <a:solidFill>
-              <a:srgbClr val="667085"/>
-            </a:solidFill>
             <a:ln w="12700" cap="flat">
               <a:solidFill>
                 <a:srgbClr val="667085"/>
@@ -456,31 +421,6 @@
             </a:ln>
             <a:effectLst/>
           </c:spPr>
-          <c:invertIfNegative val="0"/>
-          <c:dLbls>
-            <c:numFmt formatCode="#,##0" sourceLinked="0"/>
-            <c:txPr>
-              <a:bodyPr/>
-              <a:lstStyle/>
-              <a:p>
-                <a:pPr>
-                  <a:defRPr b="0" i="0" strike="noStrike" sz="1200" u="none">
-                    <a:solidFill>
-                      <a:srgbClr val="000000"/>
-                    </a:solidFill>
-                    <a:latin typeface="Arial"/>
-                  </a:defRPr>
-                </a:pPr>
-              </a:p>
-            </c:txPr>
-            <c:showLegendKey val="0"/>
-            <c:showVal val="0"/>
-            <c:showCatName val="0"/>
-            <c:showSerName val="0"/>
-            <c:showPercent val="0"/>
-            <c:showBubbleSize val="0"/>
-            <c:showLeaderLines val="0"/>
-          </c:dLbls>
           <c:marker>
             <c:symbol val="circle"/>
             <c:size val="6"/>
@@ -499,104 +439,102 @@
             </c:spPr>
           </c:marker>
           <c:cat>
-            <c:multiLvlStrRef>
+            <c:strRef>
               <c:f>Sheet1!$A$2:$A$31</c:f>
-              <c:multiLvlStrCache>
+              <c:strCache>
                 <c:ptCount val="30"/>
-                <c:lvl>
-                  <c:pt idx="0">
-                    <c:v>D1</c:v>
-                  </c:pt>
-                  <c:pt idx="1">
-                    <c:v>D2</c:v>
-                  </c:pt>
-                  <c:pt idx="2">
-                    <c:v>D3</c:v>
-                  </c:pt>
-                  <c:pt idx="3">
-                    <c:v>D4</c:v>
-                  </c:pt>
-                  <c:pt idx="4">
-                    <c:v>D5</c:v>
-                  </c:pt>
-                  <c:pt idx="5">
-                    <c:v>D6</c:v>
-                  </c:pt>
-                  <c:pt idx="6">
-                    <c:v>D7</c:v>
-                  </c:pt>
-                  <c:pt idx="7">
-                    <c:v>D8</c:v>
-                  </c:pt>
-                  <c:pt idx="8">
-                    <c:v>D9</c:v>
-                  </c:pt>
-                  <c:pt idx="9">
-                    <c:v>D10</c:v>
-                  </c:pt>
-                  <c:pt idx="10">
-                    <c:v>D11</c:v>
-                  </c:pt>
-                  <c:pt idx="11">
-                    <c:v>D12</c:v>
-                  </c:pt>
-                  <c:pt idx="12">
-                    <c:v>D13</c:v>
-                  </c:pt>
-                  <c:pt idx="13">
-                    <c:v>D14</c:v>
-                  </c:pt>
-                  <c:pt idx="14">
-                    <c:v>D15</c:v>
-                  </c:pt>
-                  <c:pt idx="15">
-                    <c:v>D16</c:v>
-                  </c:pt>
-                  <c:pt idx="16">
-                    <c:v>D17</c:v>
-                  </c:pt>
-                  <c:pt idx="17">
-                    <c:v>D18</c:v>
-                  </c:pt>
-                  <c:pt idx="18">
-                    <c:v>D19</c:v>
-                  </c:pt>
-                  <c:pt idx="19">
-                    <c:v>D20</c:v>
-                  </c:pt>
-                  <c:pt idx="20">
-                    <c:v>D21</c:v>
-                  </c:pt>
-                  <c:pt idx="21">
-                    <c:v>D22</c:v>
-                  </c:pt>
-                  <c:pt idx="22">
-                    <c:v>D23</c:v>
-                  </c:pt>
-                  <c:pt idx="23">
-                    <c:v>D24</c:v>
-                  </c:pt>
-                  <c:pt idx="24">
-                    <c:v>D25</c:v>
-                  </c:pt>
-                  <c:pt idx="25">
-                    <c:v>D26</c:v>
-                  </c:pt>
-                  <c:pt idx="26">
-                    <c:v>D27</c:v>
-                  </c:pt>
-                  <c:pt idx="27">
-                    <c:v>D28</c:v>
-                  </c:pt>
-                  <c:pt idx="28">
-                    <c:v>D29</c:v>
-                  </c:pt>
-                  <c:pt idx="29">
-                    <c:v>D30</c:v>
-                  </c:pt>
-                </c:lvl>
-              </c:multiLvlStrCache>
-            </c:multiLvlStrRef>
+                <c:pt idx="0">
+                  <c:v>D1</c:v>
+                </c:pt>
+                <c:pt idx="1">
+                  <c:v>D2</c:v>
+                </c:pt>
+                <c:pt idx="2">
+                  <c:v>D3</c:v>
+                </c:pt>
+                <c:pt idx="3">
+                  <c:v>D4</c:v>
+                </c:pt>
+                <c:pt idx="4">
+                  <c:v>D5</c:v>
+                </c:pt>
+                <c:pt idx="5">
+                  <c:v>D6</c:v>
+                </c:pt>
+                <c:pt idx="6">
+                  <c:v>D7</c:v>
+                </c:pt>
+                <c:pt idx="7">
+                  <c:v>D8</c:v>
+                </c:pt>
+                <c:pt idx="8">
+                  <c:v>D9</c:v>
+                </c:pt>
+                <c:pt idx="9">
+                  <c:v>D10</c:v>
+                </c:pt>
+                <c:pt idx="10">
+                  <c:v>D11</c:v>
+                </c:pt>
+                <c:pt idx="11">
+                  <c:v>D12</c:v>
+                </c:pt>
+                <c:pt idx="12">
+                  <c:v>D13</c:v>
+                </c:pt>
+                <c:pt idx="13">
+                  <c:v>D14</c:v>
+                </c:pt>
+                <c:pt idx="14">
+                  <c:v>D15</c:v>
+                </c:pt>
+                <c:pt idx="15">
+                  <c:v>D16</c:v>
+                </c:pt>
+                <c:pt idx="16">
+                  <c:v>D17</c:v>
+                </c:pt>
+                <c:pt idx="17">
+                  <c:v>D18</c:v>
+                </c:pt>
+                <c:pt idx="18">
+                  <c:v>D19</c:v>
+                </c:pt>
+                <c:pt idx="19">
+                  <c:v>D20</c:v>
+                </c:pt>
+                <c:pt idx="20">
+                  <c:v>D21</c:v>
+                </c:pt>
+                <c:pt idx="21">
+                  <c:v>D22</c:v>
+                </c:pt>
+                <c:pt idx="22">
+                  <c:v>D23</c:v>
+                </c:pt>
+                <c:pt idx="23">
+                  <c:v>D24</c:v>
+                </c:pt>
+                <c:pt idx="24">
+                  <c:v>D25</c:v>
+                </c:pt>
+                <c:pt idx="25">
+                  <c:v>D26</c:v>
+                </c:pt>
+                <c:pt idx="26">
+                  <c:v>D27</c:v>
+                </c:pt>
+                <c:pt idx="27">
+                  <c:v>D28</c:v>
+                </c:pt>
+                <c:pt idx="28">
+                  <c:v>D29</c:v>
+                </c:pt>
+                <c:pt idx="29">
+                  <c:v>D30</c:v>
+                </c:pt>
+              </c:strCache>
+            </c:strRef>
           </c:cat>
           <c:val>
             <c:numRef>
@@ -698,35 +636,24 @@
             </c:numRef>
           </c:val>
           <c:smooth val="0"/>
+          <c:extLst>
+            <c:ext xmlns:c16="http://schemas.microsoft.com/office/drawing/2014/chart" uri="{C3380CC4-5D6E-409C-BE32-E72D297353CC}">
+              <c16:uniqueId val="{00000001-4DC3-409B-9073-3CF02733835B}"/>
+            </c:ext>
+          </c:extLst>
         </c:ser>
         <c:dLbls>
-          <c:numFmt formatCode="#,##0" sourceLinked="0"/>
-          <c:txPr>
-            <a:bodyPr/>
-            <a:lstStyle/>
-            <a:p>
-              <a:pPr>
-                <a:defRPr b="0" i="0" strike="noStrike" sz="1200" u="none">
-                  <a:solidFill>
-                    <a:srgbClr val="000000"/>
-                  </a:solidFill>
-                  <a:latin typeface="Arial"/>
-                </a:defRPr>
-              </a:pPr>
-            </a:p>
-          </c:txPr>
           <c:showLegendKey val="0"/>
           <c:showVal val="0"/>
           <c:showCatName val="0"/>
           <c:showSerName val="0"/>
           <c:showPercent val="0"/>
           <c:showBubbleSize val="0"/>
-          <c:showLeaderLines val="0"/>
         </c:dLbls>
         <c:marker val="1"/>
+        <c:smooth val="0"/>
         <c:axId val="2094734554"/>
         <c:axId val="2094734552"/>
-        <c:axId val="2094734556"/>
       </c:lineChart>
       <c:catAx>
         <c:axId val="2094734554"/>
@@ -767,6 +694,7 @@
         <c:crosses val="autoZero"/>
         <c:auto val="1"/>
         <c:lblAlgn val="ctr"/>
+        <c:lblOffset val="100"/>
         <c:noMultiLvlLbl val="1"/>
       </c:catAx>
       <c:valAx>
@@ -835,7 +763,7 @@
         <a:lstStyle/>
         <a:p>
           <a:pPr>
-            <a:defRPr sz="1000">      </a:defRPr>
+            <a:defRPr sz="1000"/>
           </a:pPr>
           <a:endParaRPr lang="en-US"/>
         </a:p>
@@ -843,6 +771,7 @@
     </c:legend>
     <c:plotVisOnly val="1"/>
     <c:dispBlanksAs val="span"/>
+    <c:showDLblsOverMax val="1"/>
   </c:chart>
   <c:spPr>
     <a:solidFill>
@@ -881,234 +810,10 @@
           <a:chExt cx="0" cy="0"/>
         </a:xfrm>
       </p:grpSpPr>
-      <p:sp>
-        <p:nvSpPr>
-          <p:cNvPr id="2" name="Header Placeholder 1"/>
-          <p:cNvSpPr>
-            <a:spLocks noGrp="1"/>
-          </p:cNvSpPr>
-          <p:nvPr>
-            <p:ph type="hdr" sz="quarter"/>
-          </p:nvPr>
-        </p:nvSpPr>
-        <p:spPr>
-          <a:xfrm>
-            <a:off x="0" y="0"/>
-            <a:ext cx="2971800" cy="458788"/>
-          </a:xfrm>
-          <a:prstGeom prst="rect">
-            <a:avLst/>
-          </a:prstGeom>
-        </p:spPr>
-        <p:txBody>
-          <a:bodyPr vert="horz" lIns="91440" tIns="45720" rIns="91440" bIns="45720" rtlCol="0"/>
-          <a:lstStyle>
-            <a:lvl1pPr algn="l">
-              <a:defRPr sz="1200"/>
-            </a:lvl1pPr>
-          </a:lstStyle>
-          <a:p>
-            <a:endParaRPr lang="en-US"/>
-          </a:p>
-        </p:txBody>
-      </p:sp>
-      <p:sp>
-        <p:nvSpPr>
-          <p:cNvPr id="3" name="Date Placeholder 2"/>
-          <p:cNvSpPr>
-            <a:spLocks noGrp="1"/>
-          </p:cNvSpPr>
-          <p:nvPr>
-            <p:ph type="dt" idx="1"/>
-          </p:nvPr>
-        </p:nvSpPr>
-        <p:spPr>
-          <a:xfrm>
-            <a:off x="3884613" y="0"/>
-            <a:ext cx="2971800" cy="458788"/>
-          </a:xfrm>
-          <a:prstGeom prst="rect">
-            <a:avLst/>
-          </a:prstGeom>
-        </p:spPr>
-        <p:txBody>
-          <a:bodyPr vert="horz" lIns="91440" tIns="45720" rIns="91440" bIns="45720" rtlCol="0"/>
-          <a:lstStyle>
-            <a:lvl1pPr algn="r">
-              <a:defRPr sz="1200"/>
-            </a:lvl1pPr>
-          </a:lstStyle>
-          <a:p>
-            <a:fld id="{5282F153-3F37-0F45-9E97-73ACFA13230C}" type="datetimeFigureOut">
-              <a:rPr lang="en-US"/>
-              <a:t>7/23/19</a:t>
-            </a:fld>
-            <a:endParaRPr lang="en-US"/>
-          </a:p>
-        </p:txBody>
-      </p:sp>
-      <p:sp>
-        <p:nvSpPr>
-          <p:cNvPr id="4" name="Slide Image Placeholder 3"/>
-          <p:cNvSpPr>
-            <a:spLocks noGrp="1" noRot="1" noChangeAspect="1"/>
-          </p:cNvSpPr>
-          <p:nvPr>
-            <p:ph type="sldImg" idx="2"/>
-          </p:nvPr>
-        </p:nvSpPr>
-        <p:spPr>
-          <a:xfrm>
-            <a:off x="685800" y="1143000"/>
-            <a:ext cx="5486400" cy="3086100"/>
-          </a:xfrm>
-          <a:prstGeom prst="rect">
-            <a:avLst/>
-          </a:prstGeom>
-          <a:noFill/>
-          <a:ln w="12700">
-            <a:solidFill>
-              <a:prstClr val="black"/>
-            </a:solidFill>
-          </a:ln>
-        </p:spPr>
-        <p:txBody>
-          <a:bodyPr vert="horz" lIns="91440" tIns="45720" rIns="91440" bIns="45720" rtlCol="0" anchor="ctr"/>
-          <a:lstStyle/>
-          <a:p>
-            <a:endParaRPr lang="en-US"/>
-          </a:p>
-        </p:txBody>
-      </p:sp>
-      <p:sp>
-        <p:nvSpPr>
-          <p:cNvPr id="5" name="Notes Placeholder 4"/>
-          <p:cNvSpPr>
-            <a:spLocks noGrp="1"/>
-          </p:cNvSpPr>
-          <p:nvPr>
-            <p:ph type="body" sz="quarter" idx="3"/>
-          </p:nvPr>
-        </p:nvSpPr>
-        <p:spPr>
-          <a:xfrm>
-            <a:off x="685800" y="4400550"/>
-            <a:ext cx="5486400" cy="3600450"/>
-          </a:xfrm>
-          <a:prstGeom prst="rect">
-            <a:avLst/>
-          </a:prstGeom>
-        </p:spPr>
-        <p:txBody>
-          <a:bodyPr vert="horz" lIns="91440" tIns="45720" rIns="91440" bIns="45720" rtlCol="0"/>
-          <a:lstStyle/>
-          <a:p>
-            <a:pPr lvl="0"/>
-            <a:r>
-              <a:rPr lang="en-US"/>
-              <a:t>Click to edit Master text styles</a:t>
-            </a:r>
-          </a:p>
-          <a:p>
-            <a:pPr lvl="1"/>
-            <a:r>
-              <a:rPr lang="en-US"/>
-              <a:t>Second level</a:t>
-            </a:r>
-          </a:p>
-          <a:p>
-            <a:pPr lvl="2"/>
-            <a:r>
-              <a:rPr lang="en-US"/>
-              <a:t>Third level</a:t>
-            </a:r>
-          </a:p>
-          <a:p>
-            <a:pPr lvl="3"/>
-            <a:r>
-              <a:rPr lang="en-US"/>
-              <a:t>Fourth level</a:t>
-            </a:r>
-          </a:p>
-          <a:p>
-            <a:pPr lvl="4"/>
-            <a:r>
-              <a:rPr lang="en-US"/>
-              <a:t>Fifth level</a:t>
-            </a:r>
-          </a:p>
-        </p:txBody>
-      </p:sp>
-      <p:sp>
-        <p:nvSpPr>
-          <p:cNvPr id="6" name="Footer Placeholder 5"/>
-          <p:cNvSpPr>
-            <a:spLocks noGrp="1"/>
-          </p:cNvSpPr>
-          <p:nvPr>
-            <p:ph type="ftr" sz="quarter" idx="4"/>
-          </p:nvPr>
-        </p:nvSpPr>
-        <p:spPr>
-          <a:xfrm>
-            <a:off x="0" y="8685213"/>
-            <a:ext cx="2971800" cy="458787"/>
-          </a:xfrm>
-          <a:prstGeom prst="rect">
-            <a:avLst/>
-          </a:prstGeom>
-        </p:spPr>
-        <p:txBody>
-          <a:bodyPr vert="horz" lIns="91440" tIns="45720" rIns="91440" bIns="45720" rtlCol="0" anchor="b"/>
-          <a:lstStyle>
-            <a:lvl1pPr algn="l">
-              <a:defRPr sz="1200"/>
-            </a:lvl1pPr>
-          </a:lstStyle>
-          <a:p>
-            <a:endParaRPr lang="en-US"/>
-          </a:p>
-        </p:txBody>
-      </p:sp>
-      <p:sp>
-        <p:nvSpPr>
-          <p:cNvPr id="7" name="Slide Number Placeholder 6"/>
-          <p:cNvSpPr>
-            <a:spLocks noGrp="1"/>
-          </p:cNvSpPr>
-          <p:nvPr>
-            <p:ph type="sldNum" sz="quarter" idx="5"/>
-          </p:nvPr>
-        </p:nvSpPr>
-        <p:spPr>
-          <a:xfrm>
-            <a:off x="3884613" y="8685213"/>
-            <a:ext cx="2971800" cy="458787"/>
-          </a:xfrm>
-          <a:prstGeom prst="rect">
-            <a:avLst/>
-          </a:prstGeom>
-        </p:spPr>
-        <p:txBody>
-          <a:bodyPr vert="horz" lIns="91440" tIns="45720" rIns="91440" bIns="45720" rtlCol="0" anchor="b"/>
-          <a:lstStyle>
-            <a:lvl1pPr algn="r">
-              <a:defRPr sz="1200"/>
-            </a:lvl1pPr>
-          </a:lstStyle>
-          <a:p>
-            <a:fld id="{CE5E9CC1-C706-0F49-92D6-E571CC5EEA8F}" type="slidenum">
-              <a:rPr lang="en-US"/>
-              <a:t>‹#›</a:t>
-            </a:fld>
-            <a:endParaRPr lang="en-US"/>
-          </a:p>
-        </p:txBody>
-      </p:sp>
     </p:spTree>
     <p:extLst>
       <p:ext uri="{BB962C8B-B14F-4D97-AF65-F5344CB8AC3E}">
-        <p14:creationId xmlns:p14="http://schemas.microsoft.com/office/powerpoint/2010/main" val="1024086991"/>
+        <p14:creationId xmlns:p14="http://schemas.microsoft.com/office/powerpoint/2010/main" val="630688167"/>
       </p:ext>
     </p:extLst>
   </p:cSld>
@@ -1252,10 +957,6 @@
           <a:bodyPr/>
           <a:lstStyle/>
           <a:p>
-            <a:r>
-              <a:rPr lang="en-US" dirty="0"/>
-              <a:t/>
-            </a:r>
             <a:endParaRPr lang="en-US" dirty="0"/>
           </a:p>
         </p:txBody>
@@ -1340,10 +1041,6 @@
           <a:bodyPr/>
           <a:lstStyle/>
           <a:p>
-            <a:r>
-              <a:rPr lang="en-US" dirty="0"/>
-              <a:t/>
-            </a:r>
             <a:endParaRPr lang="en-US" dirty="0"/>
           </a:p>
         </p:txBody>
@@ -1428,10 +1125,6 @@
           <a:bodyPr/>
           <a:lstStyle/>
           <a:p>
-            <a:r>
-              <a:rPr lang="en-US" dirty="0"/>
-              <a:t/>
-            </a:r>
             <a:endParaRPr lang="en-US" dirty="0"/>
           </a:p>
         </p:txBody>
@@ -1516,10 +1209,6 @@
           <a:bodyPr/>
           <a:lstStyle/>
           <a:p>
-            <a:r>
-              <a:rPr lang="en-US" dirty="0"/>
-              <a:t/>
-            </a:r>
             <a:endParaRPr lang="en-US" dirty="0"/>
           </a:p>
         </p:txBody>
@@ -1604,10 +1293,6 @@
           <a:bodyPr/>
           <a:lstStyle/>
           <a:p>
-            <a:r>
-              <a:rPr lang="en-US" dirty="0"/>
-              <a:t/>
-            </a:r>
             <a:endParaRPr lang="en-US" dirty="0"/>
           </a:p>
         </p:txBody>
@@ -1692,10 +1377,6 @@
           <a:bodyPr/>
           <a:lstStyle/>
           <a:p>
-            <a:r>
-              <a:rPr lang="en-US" dirty="0"/>
-              <a:t/>
-            </a:r>
             <a:endParaRPr lang="en-US" dirty="0"/>
           </a:p>
         </p:txBody>
@@ -1780,10 +1461,6 @@
           <a:bodyPr/>
           <a:lstStyle/>
           <a:p>
-            <a:r>
-              <a:rPr lang="en-US" dirty="0"/>
-              <a:t/>
-            </a:r>
             <a:endParaRPr lang="en-US" dirty="0"/>
           </a:p>
         </p:txBody>
@@ -1868,10 +1545,6 @@
           <a:bodyPr/>
           <a:lstStyle/>
           <a:p>
-            <a:r>
-              <a:rPr lang="en-US" dirty="0"/>
-              <a:t/>
-            </a:r>
             <a:endParaRPr lang="en-US" dirty="0"/>
           </a:p>
         </p:txBody>
@@ -1956,10 +1629,6 @@
           <a:bodyPr/>
           <a:lstStyle/>
           <a:p>
-            <a:r>
-              <a:rPr lang="en-US" dirty="0"/>
-              <a:t/>
-            </a:r>
             <a:endParaRPr lang="en-US" dirty="0"/>
           </a:p>
         </p:txBody>
@@ -2044,10 +1713,6 @@
           <a:bodyPr/>
           <a:lstStyle/>
           <a:p>
-            <a:r>
-              <a:rPr lang="en-US" dirty="0"/>
-              <a:t/>
-            </a:r>
             <a:endParaRPr lang="en-US" dirty="0"/>
           </a:p>
         </p:txBody>
@@ -2132,10 +1797,6 @@
           <a:bodyPr/>
           <a:lstStyle/>
           <a:p>
-            <a:r>
-              <a:rPr lang="en-US" dirty="0"/>
-              <a:t/>
-            </a:r>
             <a:endParaRPr lang="en-US" dirty="0"/>
           </a:p>
         </p:txBody>
@@ -2220,10 +1881,6 @@
           <a:bodyPr/>
           <a:lstStyle/>
           <a:p>
-            <a:r>
-              <a:rPr lang="en-US" dirty="0"/>
-              <a:t/>
-            </a:r>
             <a:endParaRPr lang="en-US" dirty="0"/>
           </a:p>
         </p:txBody>
@@ -2297,6 +1954,11 @@
 <file path=ppt/slideMasters/slideMaster1.xml><?xml version="1.0" encoding="utf-8"?>
 <p:sldMaster xmlns:a="http://schemas.openxmlformats.org/drawingml/2006/main" xmlns:r="http://schemas.openxmlformats.org/officeDocument/2006/relationships" xmlns:p="http://schemas.openxmlformats.org/presentationml/2006/main">
   <p:cSld>
+    <p:bg>
+      <p:bgRef idx="1001">
+        <a:schemeClr val="bg1"/>
+      </p:bgRef>
+    </p:bg>
     <p:spTree>
       <p:nvGrpSpPr>
         <p:cNvPr id="1" name=""/>
@@ -2579,6 +2241,7 @@
         <a:solidFill>
           <a:srgbClr val="1B1F23"/>
         </a:solidFill>
+        <a:effectLst/>
       </p:bgPr>
     </p:bg>
     <p:spTree>
@@ -2616,7 +2279,7 @@
           <a:bodyPr wrap="square" rtlCol="0" anchor="ctr"/>
           <a:lstStyle/>
           <a:p>
-            <a:pPr algn="l" indent="0" marL="0">
+            <a:pPr marL="0" indent="0" algn="l">
               <a:buNone/>
             </a:pPr>
             <a:r>
@@ -2655,7 +2318,7 @@
           <a:bodyPr wrap="square" rtlCol="0" anchor="ctr"/>
           <a:lstStyle/>
           <a:p>
-            <a:pPr algn="l" indent="0" marL="0">
+            <a:pPr marL="0" indent="0" algn="l">
               <a:buNone/>
             </a:pPr>
             <a:r>
@@ -2681,7 +2344,7 @@
         </p:nvSpPr>
         <p:spPr>
           <a:xfrm>
-            <a:off x="731520" y="4114800"/>
+            <a:off x="731520" y="4160520"/>
             <a:ext cx="4846320" cy="457200"/>
           </a:xfrm>
           <a:prstGeom prst="roundRect">
@@ -2694,6 +2357,13 @@
           </a:solidFill>
           <a:ln/>
         </p:spPr>
+        <p:txBody>
+          <a:bodyPr/>
+          <a:lstStyle/>
+          <a:p>
+            <a:endParaRPr lang="en-IN" dirty="0"/>
+          </a:p>
+        </p:txBody>
       </p:sp>
       <p:sp>
         <p:nvSpPr>
@@ -2703,7 +2373,7 @@
         </p:nvSpPr>
         <p:spPr>
           <a:xfrm>
-            <a:off x="731520" y="4114800"/>
+            <a:off x="635726" y="4160520"/>
             <a:ext cx="4846320" cy="457200"/>
           </a:xfrm>
           <a:prstGeom prst="rect">
@@ -2716,59 +2386,48 @@
           <a:bodyPr wrap="square" lIns="0" tIns="0" rIns="0" bIns="0" rtlCol="0" anchor="ctr"/>
           <a:lstStyle/>
           <a:p>
-            <a:pPr algn="ctr" indent="0" marL="0">
-              <a:buNone/>
-            </a:pPr>
-            <a:r>
-              <a:rPr lang="en-US" sz="1200" b="1" dirty="0">
-                <a:solidFill>
-                  <a:srgbClr val="FFFFFF"/>
+            <a:pPr marL="0" indent="0" algn="ctr">
+              <a:buNone/>
+            </a:pPr>
+            <a:endParaRPr lang="en-US" sz="1200" dirty="0"/>
+          </a:p>
+        </p:txBody>
+      </p:sp>
+      <p:sp>
+        <p:nvSpPr>
+          <p:cNvPr id="6" name="Text 4">
+            <a:hlinkClick r:id="rId3"/>
+          </p:cNvPr>
+          <p:cNvSpPr/>
+          <p:nvPr/>
+        </p:nvSpPr>
+        <p:spPr>
+          <a:xfrm>
+            <a:off x="731520" y="6035040"/>
+            <a:ext cx="7315200" cy="365760"/>
+          </a:xfrm>
+          <a:prstGeom prst="rect">
+            <a:avLst/>
+          </a:prstGeom>
+          <a:noFill/>
+          <a:ln/>
+        </p:spPr>
+        <p:txBody>
+          <a:bodyPr wrap="square" rtlCol="0" anchor="ctr"/>
+          <a:lstStyle/>
+          <a:p>
+            <a:pPr marL="0" indent="0" algn="l">
+              <a:buNone/>
+            </a:pPr>
+            <a:r>
+              <a:rPr lang="en-US" sz="1300" u="sng" dirty="0">
+                <a:solidFill>
+                  <a:srgbClr val="9FD3F5"/>
                 </a:solidFill>
                 <a:latin typeface="Calibri" pitchFamily="34" charset="0"/>
                 <a:ea typeface="Calibri" pitchFamily="34" charset="-122"/>
                 <a:cs typeface="Calibri" pitchFamily="34" charset="-120"/>
-              </a:rPr>
-              <a:t>Build with AI: Code for Communities — Track 2</a:t>
-            </a:r>
-            <a:endParaRPr lang="en-US" sz="1200" dirty="0"/>
-          </a:p>
-        </p:txBody>
-      </p:sp>
-      <p:sp>
-        <p:nvSpPr>
-          <p:cNvPr id="6" name="Text 4">
-            <a:hlinkClick r:id="rId1" tooltip=""/>
-          </p:cNvPr>
-          <p:cNvSpPr/>
-          <p:nvPr/>
-        </p:nvSpPr>
-        <p:spPr>
-          <a:xfrm>
-            <a:off x="731520" y="6035040"/>
-            <a:ext cx="7315200" cy="365760"/>
-          </a:xfrm>
-          <a:prstGeom prst="rect">
-            <a:avLst/>
-          </a:prstGeom>
-          <a:noFill/>
-          <a:ln/>
-        </p:spPr>
-        <p:txBody>
-          <a:bodyPr wrap="square" rtlCol="0" anchor="ctr"/>
-          <a:lstStyle/>
-          <a:p>
-            <a:pPr algn="l" indent="0" marL="0">
-              <a:buNone/>
-            </a:pPr>
-            <a:r>
-              <a:rPr lang="en-US" sz="1300" u="sng" dirty="0">
-                <a:solidFill>
-                  <a:srgbClr val="9FD3F5"/>
-                </a:solidFill>
-                <a:latin typeface="Calibri" pitchFamily="34" charset="0"/>
-                <a:ea typeface="Calibri" pitchFamily="34" charset="-122"/>
-                <a:cs typeface="Calibri" pitchFamily="34" charset="-120"/>
-                <a:hlinkClick r:id="rId1" invalidUrl="" action="" tgtFrame="" tooltip="" history="1" highlightClick="0" endSnd="0">
+                <a:hlinkClick r:id="rId3">
                   <a:extLst>
                     <a:ext uri="{A12FA001-AC4F-418D-AE19-62706E023703}">
                       <ahyp:hlinkClr xmlns:ahyp="http://schemas.microsoft.com/office/drawing/2018/hyperlinkcolor" val="tx"/>
@@ -2779,6 +2438,41 @@
               <a:t>Live at gen-lang-client-0882700239.web.app</a:t>
             </a:r>
             <a:endParaRPr lang="en-US" sz="1300" dirty="0"/>
+          </a:p>
+        </p:txBody>
+      </p:sp>
+      <p:sp>
+        <p:nvSpPr>
+          <p:cNvPr id="7" name="Text 1">
+            <a:extLst>
+              <a:ext uri="{FF2B5EF4-FFF2-40B4-BE49-F238E27FC236}">
+                <a16:creationId xmlns:a16="http://schemas.microsoft.com/office/drawing/2014/main" id="{A65179EA-16EA-8E9A-66C5-34C8376FF6F9}"/>
+              </a:ext>
+            </a:extLst>
+          </p:cNvPr>
+          <p:cNvSpPr/>
+          <p:nvPr/>
+        </p:nvSpPr>
+        <p:spPr>
+          <a:xfrm>
+            <a:off x="1547949" y="4119154"/>
+            <a:ext cx="3021874" cy="548640"/>
+          </a:xfrm>
+          <a:prstGeom prst="rect">
+            <a:avLst/>
+          </a:prstGeom>
+          <a:noFill/>
+          <a:ln/>
+        </p:spPr>
+        <p:txBody>
+          <a:bodyPr wrap="square" rtlCol="0" anchor="ctr"/>
+          <a:lstStyle/>
+          <a:p>
+            <a:pPr algn="ctr"/>
+            <a:r>
+              <a:rPr lang="en-US" sz="2000" dirty="0"/>
+              <a:t>Team – Code Smashers</a:t>
+            </a:r>
           </a:p>
         </p:txBody>
       </p:sp>
@@ -2798,6 +2492,7 @@
         <a:solidFill>
           <a:srgbClr val="FFFFFF"/>
         </a:solidFill>
+        <a:effectLst/>
       </p:bgPr>
     </p:bg>
     <p:spTree>
@@ -2836,14 +2531,14 @@
       </p:sp>
       <p:pic>
         <p:nvPicPr>
-          <p:cNvPr id="3" name="Image 0" descr="preencoded.png">    </p:cNvPr>
+          <p:cNvPr id="3" name="Image 0" descr="preencoded.png"/>
           <p:cNvPicPr>
             <a:picLocks noChangeAspect="1"/>
           </p:cNvPicPr>
           <p:nvPr/>
         </p:nvPicPr>
         <p:blipFill>
-          <a:blip r:embed="rId1"/>
+          <a:blip r:embed="rId3"/>
           <a:stretch>
             <a:fillRect/>
           </a:stretch>
@@ -2879,7 +2574,7 @@
           <a:bodyPr wrap="square" rtlCol="0" anchor="ctr"/>
           <a:lstStyle/>
           <a:p>
-            <a:pPr indent="0" marL="0">
+            <a:pPr marL="0" indent="0">
               <a:buNone/>
             </a:pPr>
             <a:r>
@@ -2918,7 +2613,7 @@
           <a:bodyPr wrap="square" rtlCol="0" anchor="ctr"/>
           <a:lstStyle/>
           <a:p>
-            <a:pPr indent="0" marL="0">
+            <a:pPr marL="0" indent="0">
               <a:buNone/>
             </a:pPr>
             <a:r>
@@ -2938,7 +2633,7 @@
       </p:sp>
       <p:graphicFrame>
         <p:nvGraphicFramePr>
-          <p:cNvPr id="6" name="Chart 0" descr=""/>
+          <p:cNvPr id="6" name="Chart 0"/>
           <p:cNvGraphicFramePr/>
           <p:nvPr/>
         </p:nvGraphicFramePr>
@@ -2946,9 +2641,9 @@
           <a:off x="731520" y="1691640"/>
           <a:ext cx="6949440" cy="3566160"/>
         </p:xfrm>
-        <a:graphic xmlns:a="http://schemas.openxmlformats.org/drawingml/2006/main">
+        <a:graphic>
           <a:graphicData uri="http://schemas.openxmlformats.org/drawingml/2006/chart">
-            <c:chart xmlns:c="http://schemas.openxmlformats.org/drawingml/2006/chart" r:id="rId2"/>
+            <c:chart xmlns:c="http://schemas.openxmlformats.org/drawingml/2006/chart" xmlns:r="http://schemas.openxmlformats.org/officeDocument/2006/relationships" r:id="rId4"/>
           </a:graphicData>
         </a:graphic>
       </p:graphicFrame>
@@ -2973,7 +2668,7 @@
           <a:bodyPr wrap="square" rtlCol="0" anchor="ctr"/>
           <a:lstStyle/>
           <a:p>
-            <a:pPr algn="ctr" indent="0" marL="0">
+            <a:pPr marL="0" indent="0" algn="ctr">
               <a:buNone/>
             </a:pPr>
             <a:r>
@@ -3012,7 +2707,7 @@
           <a:bodyPr wrap="square" rtlCol="0" anchor="ctr"/>
           <a:lstStyle/>
           <a:p>
-            <a:pPr algn="ctr" indent="0" marL="0">
+            <a:pPr marL="0" indent="0" algn="ctr">
               <a:buNone/>
             </a:pPr>
             <a:r>
@@ -3029,7 +2724,7 @@
             <a:endParaRPr lang="en-US" sz="1400" dirty="0"/>
           </a:p>
           <a:p>
-            <a:pPr algn="ctr" indent="0" marL="0">
+            <a:pPr marL="0" indent="0" algn="ctr">
               <a:buNone/>
             </a:pPr>
             <a:r>
@@ -3046,7 +2741,7 @@
             <a:endParaRPr lang="en-US" sz="1400" dirty="0"/>
           </a:p>
           <a:p>
-            <a:pPr algn="ctr" indent="0" marL="0">
+            <a:pPr marL="0" indent="0" algn="ctr">
               <a:buNone/>
             </a:pPr>
             <a:r>
@@ -3085,7 +2780,7 @@
           <a:bodyPr wrap="square" rtlCol="0" anchor="ctr"/>
           <a:lstStyle/>
           <a:p>
-            <a:pPr algn="ctr" indent="0" marL="0">
+            <a:pPr marL="0" indent="0" algn="ctr">
               <a:buNone/>
             </a:pPr>
             <a:r>
@@ -3119,6 +2814,7 @@
         <a:solidFill>
           <a:srgbClr val="FFFFFF"/>
         </a:solidFill>
+        <a:effectLst/>
       </p:bgPr>
     </p:bg>
     <p:spTree>
@@ -3157,319 +2853,7 @@
       </p:sp>
       <p:pic>
         <p:nvPicPr>
-          <p:cNvPr id="3" name="Image 0" descr="preencoded.png">    </p:cNvPr>
-          <p:cNvPicPr>
-            <a:picLocks noChangeAspect="1"/>
-          </p:cNvPicPr>
-          <p:nvPr/>
-        </p:nvPicPr>
-        <p:blipFill>
-          <a:blip r:embed="rId1"/>
-          <a:stretch>
-            <a:fillRect/>
-          </a:stretch>
-        </p:blipFill>
-        <p:spPr>
-          <a:xfrm>
-            <a:off x="875538" y="601218"/>
-            <a:ext cx="352044" cy="352044"/>
-          </a:xfrm>
-          <a:prstGeom prst="rect">
-            <a:avLst/>
-          </a:prstGeom>
-        </p:spPr>
-      </p:pic>
-      <p:sp>
-        <p:nvSpPr>
-          <p:cNvPr id="4" name="Text 1"/>
-          <p:cNvSpPr/>
-          <p:nvPr/>
-        </p:nvSpPr>
-        <p:spPr>
-          <a:xfrm>
-            <a:off x="1554480" y="457200"/>
-            <a:ext cx="8686800" cy="640080"/>
-          </a:xfrm>
-          <a:prstGeom prst="rect">
-            <a:avLst/>
-          </a:prstGeom>
-          <a:noFill/>
-          <a:ln/>
-        </p:spPr>
-        <p:txBody>
-          <a:bodyPr wrap="square" rtlCol="0" anchor="ctr"/>
-          <a:lstStyle/>
-          <a:p>
-            <a:pPr indent="0" marL="0">
-              <a:buNone/>
-            </a:pPr>
-            <a:r>
-              <a:rPr lang="en-US" sz="2800" b="1" dirty="0">
-                <a:solidFill>
-                  <a:srgbClr val="1B1F23"/>
-                </a:solidFill>
-                <a:latin typeface="Cambria" pitchFamily="34" charset="0"/>
-                <a:ea typeface="Cambria" pitchFamily="34" charset="-122"/>
-                <a:cs typeface="Cambria" pitchFamily="34" charset="-120"/>
-              </a:rPr>
-              <a:t>Scaling Beyond Delhi NCR</a:t>
-            </a:r>
-            <a:endParaRPr lang="en-US" sz="2800" dirty="0"/>
-          </a:p>
-        </p:txBody>
-      </p:sp>
-      <p:sp>
-        <p:nvSpPr>
-          <p:cNvPr id="5" name="Shape 2"/>
-          <p:cNvSpPr/>
-          <p:nvPr/>
-        </p:nvSpPr>
-        <p:spPr>
-          <a:xfrm>
-            <a:off x="731520" y="1371600"/>
-            <a:ext cx="10698480" cy="1051560"/>
-          </a:xfrm>
-          <a:prstGeom prst="roundRect">
-            <a:avLst>
-              <a:gd name="adj" fmla="val 6957"/>
-            </a:avLst>
-          </a:prstGeom>
-          <a:solidFill>
-            <a:srgbClr val="E8F0FE"/>
-          </a:solidFill>
-          <a:ln/>
-          <a:effectLst>
-            <a:outerShdw sx="100000" sy="100000" kx="0" ky="0" algn="bl" rotWithShape="0" blurRad="101600" dist="38100" dir="2700000">
-              <a:srgbClr val="000000">
-                <a:alpha val="12000"/>
-              </a:srgbClr>
-            </a:outerShdw>
-          </a:effectLst>
-        </p:spPr>
-      </p:sp>
-      <p:sp>
-        <p:nvSpPr>
-          <p:cNvPr id="6" name="Text 3"/>
-          <p:cNvSpPr/>
-          <p:nvPr/>
-        </p:nvSpPr>
-        <p:spPr>
-          <a:xfrm>
-            <a:off x="1005840" y="1371600"/>
-            <a:ext cx="10149840" cy="1051560"/>
-          </a:xfrm>
-          <a:prstGeom prst="rect">
-            <a:avLst/>
-          </a:prstGeom>
-          <a:noFill/>
-          <a:ln/>
-        </p:spPr>
-        <p:txBody>
-          <a:bodyPr wrap="square" rtlCol="0" anchor="ctr"/>
-          <a:lstStyle/>
-          <a:p>
-            <a:pPr indent="0" marL="0">
-              <a:buNone/>
-            </a:pPr>
-            <a:r>
-              <a:rPr lang="en-US" sz="1400" dirty="0">
-                <a:solidFill>
-                  <a:srgbClr val="1B1F23"/>
-                </a:solidFill>
-                <a:latin typeface="Calibri" pitchFamily="34" charset="0"/>
-                <a:ea typeface="Calibri" pitchFamily="34" charset="-122"/>
-                <a:cs typeface="Calibri" pitchFamily="34" charset="-120"/>
-              </a:rPr>
-              <a:t>Config-driven architecture: every zone is one entry in a single JSON file. Adding a new city means adding its monitoring stations to that file — no code changes to the fusion, prediction, or dashboard logic.</a:t>
-            </a:r>
-            <a:endParaRPr lang="en-US" sz="1400" dirty="0"/>
-          </a:p>
-        </p:txBody>
-      </p:sp>
-      <p:sp>
-        <p:nvSpPr>
-          <p:cNvPr id="7" name="Text 4"/>
-          <p:cNvSpPr/>
-          <p:nvPr/>
-        </p:nvSpPr>
-        <p:spPr>
-          <a:xfrm>
-            <a:off x="731520" y="2697480"/>
-            <a:ext cx="5486400" cy="365760"/>
-          </a:xfrm>
-          <a:prstGeom prst="rect">
-            <a:avLst/>
-          </a:prstGeom>
-          <a:noFill/>
-          <a:ln/>
-        </p:spPr>
-        <p:txBody>
-          <a:bodyPr wrap="square" rtlCol="0" anchor="ctr"/>
-          <a:lstStyle/>
-          <a:p>
-            <a:pPr indent="0" marL="0">
-              <a:buNone/>
-            </a:pPr>
-            <a:r>
-              <a:rPr lang="en-US" sz="1500" b="1" dirty="0">
-                <a:solidFill>
-                  <a:srgbClr val="1B1F23"/>
-                </a:solidFill>
-                <a:latin typeface="Calibri" pitchFamily="34" charset="0"/>
-                <a:ea typeface="Calibri" pitchFamily="34" charset="-122"/>
-                <a:cs typeface="Calibri" pitchFamily="34" charset="-120"/>
-              </a:rPr>
-              <a:t>Honest roadmap — what's next</a:t>
-            </a:r>
-            <a:endParaRPr lang="en-US" sz="1500" dirty="0"/>
-          </a:p>
-        </p:txBody>
-      </p:sp>
-      <p:sp>
-        <p:nvSpPr>
-          <p:cNvPr id="8" name="Shape 5"/>
-          <p:cNvSpPr/>
-          <p:nvPr/>
-        </p:nvSpPr>
-        <p:spPr>
-          <a:xfrm>
-            <a:off x="822960" y="3200400"/>
-            <a:ext cx="594360" cy="594360"/>
-          </a:xfrm>
-          <a:prstGeom prst="ellipse">
-            <a:avLst/>
-          </a:prstGeom>
-          <a:solidFill>
-            <a:srgbClr val="FDEDD3"/>
-          </a:solidFill>
-          <a:ln/>
-        </p:spPr>
-      </p:sp>
-      <p:pic>
-        <p:nvPicPr>
-          <p:cNvPr id="9" name="Image 1" descr="preencoded.png">    </p:cNvPr>
-          <p:cNvPicPr>
-            <a:picLocks noChangeAspect="1"/>
-          </p:cNvPicPr>
-          <p:nvPr/>
-        </p:nvPicPr>
-        <p:blipFill>
-          <a:blip r:embed="rId2"/>
-          <a:stretch>
-            <a:fillRect/>
-          </a:stretch>
-        </p:blipFill>
-        <p:spPr>
-          <a:xfrm>
-            <a:off x="956691" y="3334131"/>
-            <a:ext cx="326898" cy="326898"/>
-          </a:xfrm>
-          <a:prstGeom prst="rect">
-            <a:avLst/>
-          </a:prstGeom>
-        </p:spPr>
-      </p:pic>
-      <p:sp>
-        <p:nvSpPr>
-          <p:cNvPr id="10" name="Text 6"/>
-          <p:cNvSpPr/>
-          <p:nvPr/>
-        </p:nvSpPr>
-        <p:spPr>
-          <a:xfrm>
-            <a:off x="1600200" y="3154680"/>
-            <a:ext cx="3291840" cy="685800"/>
-          </a:xfrm>
-          <a:prstGeom prst="rect">
-            <a:avLst/>
-          </a:prstGeom>
-          <a:noFill/>
-          <a:ln/>
-        </p:spPr>
-        <p:txBody>
-          <a:bodyPr wrap="square" rtlCol="0" anchor="ctr"/>
-          <a:lstStyle/>
-          <a:p>
-            <a:pPr indent="0" marL="0">
-              <a:buNone/>
-            </a:pPr>
-            <a:r>
-              <a:rPr lang="en-US" sz="1350" b="1" dirty="0">
-                <a:solidFill>
-                  <a:srgbClr val="1B1F23"/>
-                </a:solidFill>
-                <a:latin typeface="Calibri" pitchFamily="34" charset="0"/>
-                <a:ea typeface="Calibri" pitchFamily="34" charset="-122"/>
-                <a:cs typeface="Calibri" pitchFamily="34" charset="-120"/>
-              </a:rPr>
-              <a:t>WhatsApp / SMS citizen intake</a:t>
-            </a:r>
-            <a:endParaRPr lang="en-US" sz="1350" dirty="0"/>
-          </a:p>
-        </p:txBody>
-      </p:sp>
-      <p:sp>
-        <p:nvSpPr>
-          <p:cNvPr id="11" name="Text 7"/>
-          <p:cNvSpPr/>
-          <p:nvPr/>
-        </p:nvSpPr>
-        <p:spPr>
-          <a:xfrm>
-            <a:off x="5029200" y="3154680"/>
-            <a:ext cx="6400800" cy="685800"/>
-          </a:xfrm>
-          <a:prstGeom prst="rect">
-            <a:avLst/>
-          </a:prstGeom>
-          <a:noFill/>
-          <a:ln/>
-        </p:spPr>
-        <p:txBody>
-          <a:bodyPr wrap="square" rtlCol="0" anchor="ctr"/>
-          <a:lstStyle/>
-          <a:p>
-            <a:pPr indent="0" marL="0">
-              <a:buNone/>
-            </a:pPr>
-            <a:r>
-              <a:rPr lang="en-US" sz="1200" dirty="0">
-                <a:solidFill>
-                  <a:srgbClr val="667085"/>
-                </a:solidFill>
-                <a:latin typeface="Calibri" pitchFamily="34" charset="0"/>
-                <a:ea typeface="Calibri" pitchFamily="34" charset="-122"/>
-                <a:cs typeface="Calibri" pitchFamily="34" charset="-120"/>
-              </a:rPr>
-              <a:t>For citizens without a smartphone or data connection</a:t>
-            </a:r>
-            <a:endParaRPr lang="en-US" sz="1200" dirty="0"/>
-          </a:p>
-        </p:txBody>
-      </p:sp>
-      <p:sp>
-        <p:nvSpPr>
-          <p:cNvPr id="12" name="Shape 8"/>
-          <p:cNvSpPr/>
-          <p:nvPr/>
-        </p:nvSpPr>
-        <p:spPr>
-          <a:xfrm>
-            <a:off x="822960" y="4160520"/>
-            <a:ext cx="594360" cy="594360"/>
-          </a:xfrm>
-          <a:prstGeom prst="ellipse">
-            <a:avLst/>
-          </a:prstGeom>
-          <a:solidFill>
-            <a:srgbClr val="FDEDD3"/>
-          </a:solidFill>
-          <a:ln/>
-        </p:spPr>
-      </p:sp>
-      <p:pic>
-        <p:nvPicPr>
-          <p:cNvPr id="13" name="Image 2" descr="preencoded.png">    </p:cNvPr>
+          <p:cNvPr id="3" name="Image 0" descr="preencoded.png"/>
           <p:cNvPicPr>
             <a:picLocks noChangeAspect="1"/>
           </p:cNvPicPr>
@@ -3483,8 +2867,8 @@
         </p:blipFill>
         <p:spPr>
           <a:xfrm>
-            <a:off x="956691" y="4294251"/>
-            <a:ext cx="326898" cy="326898"/>
+            <a:off x="875538" y="601218"/>
+            <a:ext cx="352044" cy="352044"/>
           </a:xfrm>
           <a:prstGeom prst="rect">
             <a:avLst/>
@@ -3493,14 +2877,14 @@
       </p:pic>
       <p:sp>
         <p:nvSpPr>
-          <p:cNvPr id="14" name="Text 9"/>
-          <p:cNvSpPr/>
-          <p:nvPr/>
-        </p:nvSpPr>
-        <p:spPr>
-          <a:xfrm>
-            <a:off x="1600200" y="4114800"/>
-            <a:ext cx="3291840" cy="685800"/>
+          <p:cNvPr id="4" name="Text 1"/>
+          <p:cNvSpPr/>
+          <p:nvPr/>
+        </p:nvSpPr>
+        <p:spPr>
+          <a:xfrm>
+            <a:off x="1554480" y="457200"/>
+            <a:ext cx="8686800" cy="640080"/>
           </a:xfrm>
           <a:prstGeom prst="rect">
             <a:avLst/>
@@ -3512,11 +2896,79 @@
           <a:bodyPr wrap="square" rtlCol="0" anchor="ctr"/>
           <a:lstStyle/>
           <a:p>
-            <a:pPr indent="0" marL="0">
-              <a:buNone/>
-            </a:pPr>
-            <a:r>
-              <a:rPr lang="en-US" sz="1350" b="1" dirty="0">
+            <a:pPr marL="0" indent="0">
+              <a:buNone/>
+            </a:pPr>
+            <a:r>
+              <a:rPr lang="en-US" sz="2800" b="1" dirty="0">
+                <a:solidFill>
+                  <a:srgbClr val="1B1F23"/>
+                </a:solidFill>
+                <a:latin typeface="Cambria" pitchFamily="34" charset="0"/>
+                <a:ea typeface="Cambria" pitchFamily="34" charset="-122"/>
+                <a:cs typeface="Cambria" pitchFamily="34" charset="-120"/>
+              </a:rPr>
+              <a:t>Scaling Beyond Delhi NCR</a:t>
+            </a:r>
+            <a:endParaRPr lang="en-US" sz="2800" dirty="0"/>
+          </a:p>
+        </p:txBody>
+      </p:sp>
+      <p:sp>
+        <p:nvSpPr>
+          <p:cNvPr id="5" name="Shape 2"/>
+          <p:cNvSpPr/>
+          <p:nvPr/>
+        </p:nvSpPr>
+        <p:spPr>
+          <a:xfrm>
+            <a:off x="731520" y="1371600"/>
+            <a:ext cx="10698480" cy="1051560"/>
+          </a:xfrm>
+          <a:prstGeom prst="roundRect">
+            <a:avLst>
+              <a:gd name="adj" fmla="val 6957"/>
+            </a:avLst>
+          </a:prstGeom>
+          <a:solidFill>
+            <a:srgbClr val="E8F0FE"/>
+          </a:solidFill>
+          <a:ln/>
+          <a:effectLst>
+            <a:outerShdw blurRad="101600" dist="38100" dir="2700000" algn="bl" rotWithShape="0">
+              <a:srgbClr val="000000">
+                <a:alpha val="12000"/>
+              </a:srgbClr>
+            </a:outerShdw>
+          </a:effectLst>
+        </p:spPr>
+      </p:sp>
+      <p:sp>
+        <p:nvSpPr>
+          <p:cNvPr id="6" name="Text 3"/>
+          <p:cNvSpPr/>
+          <p:nvPr/>
+        </p:nvSpPr>
+        <p:spPr>
+          <a:xfrm>
+            <a:off x="1005840" y="1371600"/>
+            <a:ext cx="10149840" cy="1051560"/>
+          </a:xfrm>
+          <a:prstGeom prst="rect">
+            <a:avLst/>
+          </a:prstGeom>
+          <a:noFill/>
+          <a:ln/>
+        </p:spPr>
+        <p:txBody>
+          <a:bodyPr wrap="square" rtlCol="0" anchor="ctr"/>
+          <a:lstStyle/>
+          <a:p>
+            <a:pPr marL="0" indent="0">
+              <a:buNone/>
+            </a:pPr>
+            <a:r>
+              <a:rPr lang="en-US" sz="1400" dirty="0">
                 <a:solidFill>
                   <a:srgbClr val="1B1F23"/>
                 </a:solidFill>
@@ -3524,22 +2976,22 @@
                 <a:ea typeface="Calibri" pitchFamily="34" charset="-122"/>
                 <a:cs typeface="Calibri" pitchFamily="34" charset="-120"/>
               </a:rPr>
-              <a:t>Proactive municipal alerts</a:t>
-            </a:r>
-            <a:endParaRPr lang="en-US" sz="1350" dirty="0"/>
-          </a:p>
-        </p:txBody>
-      </p:sp>
-      <p:sp>
-        <p:nvSpPr>
-          <p:cNvPr id="15" name="Text 10"/>
-          <p:cNvSpPr/>
-          <p:nvPr/>
-        </p:nvSpPr>
-        <p:spPr>
-          <a:xfrm>
-            <a:off x="5029200" y="4114800"/>
-            <a:ext cx="6400800" cy="685800"/>
+              <a:t>Config-driven architecture: every zone is one entry in a single JSON file. Adding a new city means adding its monitoring stations to that file — no code changes to the fusion, prediction, or dashboard logic.</a:t>
+            </a:r>
+            <a:endParaRPr lang="en-US" sz="1400" dirty="0"/>
+          </a:p>
+        </p:txBody>
+      </p:sp>
+      <p:sp>
+        <p:nvSpPr>
+          <p:cNvPr id="7" name="Text 4"/>
+          <p:cNvSpPr/>
+          <p:nvPr/>
+        </p:nvSpPr>
+        <p:spPr>
+          <a:xfrm>
+            <a:off x="731520" y="2697480"/>
+            <a:ext cx="5486400" cy="365760"/>
           </a:xfrm>
           <a:prstGeom prst="rect">
             <a:avLst/>
@@ -3551,33 +3003,33 @@
           <a:bodyPr wrap="square" rtlCol="0" anchor="ctr"/>
           <a:lstStyle/>
           <a:p>
-            <a:pPr indent="0" marL="0">
-              <a:buNone/>
-            </a:pPr>
-            <a:r>
-              <a:rPr lang="en-US" sz="1200" dirty="0">
-                <a:solidFill>
-                  <a:srgbClr val="667085"/>
+            <a:pPr marL="0" indent="0">
+              <a:buNone/>
+            </a:pPr>
+            <a:r>
+              <a:rPr lang="en-US" sz="1500" b="1" dirty="0">
+                <a:solidFill>
+                  <a:srgbClr val="1B1F23"/>
                 </a:solidFill>
                 <a:latin typeface="Calibri" pitchFamily="34" charset="0"/>
                 <a:ea typeface="Calibri" pitchFamily="34" charset="-122"/>
                 <a:cs typeface="Calibri" pitchFamily="34" charset="-120"/>
               </a:rPr>
-              <a:t>Push a notification the moment a zone newly crosses severe, instead of requiring a dashboard check</a:t>
-            </a:r>
-            <a:endParaRPr lang="en-US" sz="1200" dirty="0"/>
-          </a:p>
-        </p:txBody>
-      </p:sp>
-      <p:sp>
-        <p:nvSpPr>
-          <p:cNvPr id="16" name="Shape 11"/>
-          <p:cNvSpPr/>
-          <p:nvPr/>
-        </p:nvSpPr>
-        <p:spPr>
-          <a:xfrm>
-            <a:off x="822960" y="5120640"/>
+              <a:t>Honest roadmap — what's next</a:t>
+            </a:r>
+            <a:endParaRPr lang="en-US" sz="1500" dirty="0"/>
+          </a:p>
+        </p:txBody>
+      </p:sp>
+      <p:sp>
+        <p:nvSpPr>
+          <p:cNvPr id="8" name="Shape 5"/>
+          <p:cNvSpPr/>
+          <p:nvPr/>
+        </p:nvSpPr>
+        <p:spPr>
+          <a:xfrm>
+            <a:off x="822960" y="3200400"/>
             <a:ext cx="594360" cy="594360"/>
           </a:xfrm>
           <a:prstGeom prst="ellipse">
@@ -3591,7 +3043,7 @@
       </p:sp>
       <p:pic>
         <p:nvPicPr>
-          <p:cNvPr id="17" name="Image 3" descr="preencoded.png">    </p:cNvPr>
+          <p:cNvPr id="9" name="Image 1" descr="preencoded.png"/>
           <p:cNvPicPr>
             <a:picLocks noChangeAspect="1"/>
           </p:cNvPicPr>
@@ -3605,7 +3057,7 @@
         </p:blipFill>
         <p:spPr>
           <a:xfrm>
-            <a:off x="956691" y="5254371"/>
+            <a:off x="956691" y="3334131"/>
             <a:ext cx="326898" cy="326898"/>
           </a:xfrm>
           <a:prstGeom prst="rect">
@@ -3615,13 +3067,13 @@
       </p:pic>
       <p:sp>
         <p:nvSpPr>
-          <p:cNvPr id="18" name="Text 12"/>
-          <p:cNvSpPr/>
-          <p:nvPr/>
-        </p:nvSpPr>
-        <p:spPr>
-          <a:xfrm>
-            <a:off x="1600200" y="5074920"/>
+          <p:cNvPr id="10" name="Text 6"/>
+          <p:cNvSpPr/>
+          <p:nvPr/>
+        </p:nvSpPr>
+        <p:spPr>
+          <a:xfrm>
+            <a:off x="1600200" y="3154680"/>
             <a:ext cx="3291840" cy="685800"/>
           </a:xfrm>
           <a:prstGeom prst="rect">
@@ -3634,7 +3086,7 @@
           <a:bodyPr wrap="square" rtlCol="0" anchor="ctr"/>
           <a:lstStyle/>
           <a:p>
-            <a:pPr indent="0" marL="0">
+            <a:pPr marL="0" indent="0">
               <a:buNone/>
             </a:pPr>
             <a:r>
@@ -3646,6 +3098,250 @@
                 <a:ea typeface="Calibri" pitchFamily="34" charset="-122"/>
                 <a:cs typeface="Calibri" pitchFamily="34" charset="-120"/>
               </a:rPr>
+              <a:t>WhatsApp / SMS citizen intake</a:t>
+            </a:r>
+            <a:endParaRPr lang="en-US" sz="1350" dirty="0"/>
+          </a:p>
+        </p:txBody>
+      </p:sp>
+      <p:sp>
+        <p:nvSpPr>
+          <p:cNvPr id="11" name="Text 7"/>
+          <p:cNvSpPr/>
+          <p:nvPr/>
+        </p:nvSpPr>
+        <p:spPr>
+          <a:xfrm>
+            <a:off x="5029200" y="3154680"/>
+            <a:ext cx="6400800" cy="685800"/>
+          </a:xfrm>
+          <a:prstGeom prst="rect">
+            <a:avLst/>
+          </a:prstGeom>
+          <a:noFill/>
+          <a:ln/>
+        </p:spPr>
+        <p:txBody>
+          <a:bodyPr wrap="square" rtlCol="0" anchor="ctr"/>
+          <a:lstStyle/>
+          <a:p>
+            <a:pPr marL="0" indent="0">
+              <a:buNone/>
+            </a:pPr>
+            <a:r>
+              <a:rPr lang="en-US" sz="1200" dirty="0">
+                <a:solidFill>
+                  <a:srgbClr val="667085"/>
+                </a:solidFill>
+                <a:latin typeface="Calibri" pitchFamily="34" charset="0"/>
+                <a:ea typeface="Calibri" pitchFamily="34" charset="-122"/>
+                <a:cs typeface="Calibri" pitchFamily="34" charset="-120"/>
+              </a:rPr>
+              <a:t>For citizens without a smartphone or data connection</a:t>
+            </a:r>
+            <a:endParaRPr lang="en-US" sz="1200" dirty="0"/>
+          </a:p>
+        </p:txBody>
+      </p:sp>
+      <p:sp>
+        <p:nvSpPr>
+          <p:cNvPr id="12" name="Shape 8"/>
+          <p:cNvSpPr/>
+          <p:nvPr/>
+        </p:nvSpPr>
+        <p:spPr>
+          <a:xfrm>
+            <a:off x="822960" y="4160520"/>
+            <a:ext cx="594360" cy="594360"/>
+          </a:xfrm>
+          <a:prstGeom prst="ellipse">
+            <a:avLst/>
+          </a:prstGeom>
+          <a:solidFill>
+            <a:srgbClr val="FDEDD3"/>
+          </a:solidFill>
+          <a:ln/>
+        </p:spPr>
+      </p:sp>
+      <p:pic>
+        <p:nvPicPr>
+          <p:cNvPr id="13" name="Image 2" descr="preencoded.png"/>
+          <p:cNvPicPr>
+            <a:picLocks noChangeAspect="1"/>
+          </p:cNvPicPr>
+          <p:nvPr/>
+        </p:nvPicPr>
+        <p:blipFill>
+          <a:blip r:embed="rId5"/>
+          <a:stretch>
+            <a:fillRect/>
+          </a:stretch>
+        </p:blipFill>
+        <p:spPr>
+          <a:xfrm>
+            <a:off x="956691" y="4294251"/>
+            <a:ext cx="326898" cy="326898"/>
+          </a:xfrm>
+          <a:prstGeom prst="rect">
+            <a:avLst/>
+          </a:prstGeom>
+        </p:spPr>
+      </p:pic>
+      <p:sp>
+        <p:nvSpPr>
+          <p:cNvPr id="14" name="Text 9"/>
+          <p:cNvSpPr/>
+          <p:nvPr/>
+        </p:nvSpPr>
+        <p:spPr>
+          <a:xfrm>
+            <a:off x="1600200" y="4114800"/>
+            <a:ext cx="3291840" cy="685800"/>
+          </a:xfrm>
+          <a:prstGeom prst="rect">
+            <a:avLst/>
+          </a:prstGeom>
+          <a:noFill/>
+          <a:ln/>
+        </p:spPr>
+        <p:txBody>
+          <a:bodyPr wrap="square" rtlCol="0" anchor="ctr"/>
+          <a:lstStyle/>
+          <a:p>
+            <a:pPr marL="0" indent="0">
+              <a:buNone/>
+            </a:pPr>
+            <a:r>
+              <a:rPr lang="en-US" sz="1350" b="1" dirty="0">
+                <a:solidFill>
+                  <a:srgbClr val="1B1F23"/>
+                </a:solidFill>
+                <a:latin typeface="Calibri" pitchFamily="34" charset="0"/>
+                <a:ea typeface="Calibri" pitchFamily="34" charset="-122"/>
+                <a:cs typeface="Calibri" pitchFamily="34" charset="-120"/>
+              </a:rPr>
+              <a:t>Proactive municipal alerts</a:t>
+            </a:r>
+            <a:endParaRPr lang="en-US" sz="1350" dirty="0"/>
+          </a:p>
+        </p:txBody>
+      </p:sp>
+      <p:sp>
+        <p:nvSpPr>
+          <p:cNvPr id="15" name="Text 10"/>
+          <p:cNvSpPr/>
+          <p:nvPr/>
+        </p:nvSpPr>
+        <p:spPr>
+          <a:xfrm>
+            <a:off x="5029200" y="4114800"/>
+            <a:ext cx="6400800" cy="685800"/>
+          </a:xfrm>
+          <a:prstGeom prst="rect">
+            <a:avLst/>
+          </a:prstGeom>
+          <a:noFill/>
+          <a:ln/>
+        </p:spPr>
+        <p:txBody>
+          <a:bodyPr wrap="square" rtlCol="0" anchor="ctr"/>
+          <a:lstStyle/>
+          <a:p>
+            <a:pPr marL="0" indent="0">
+              <a:buNone/>
+            </a:pPr>
+            <a:r>
+              <a:rPr lang="en-US" sz="1200" dirty="0">
+                <a:solidFill>
+                  <a:srgbClr val="667085"/>
+                </a:solidFill>
+                <a:latin typeface="Calibri" pitchFamily="34" charset="0"/>
+                <a:ea typeface="Calibri" pitchFamily="34" charset="-122"/>
+                <a:cs typeface="Calibri" pitchFamily="34" charset="-120"/>
+              </a:rPr>
+              <a:t>Push a notification the moment a zone newly crosses severe, instead of requiring a dashboard check</a:t>
+            </a:r>
+            <a:endParaRPr lang="en-US" sz="1200" dirty="0"/>
+          </a:p>
+        </p:txBody>
+      </p:sp>
+      <p:sp>
+        <p:nvSpPr>
+          <p:cNvPr id="16" name="Shape 11"/>
+          <p:cNvSpPr/>
+          <p:nvPr/>
+        </p:nvSpPr>
+        <p:spPr>
+          <a:xfrm>
+            <a:off x="822960" y="5120640"/>
+            <a:ext cx="594360" cy="594360"/>
+          </a:xfrm>
+          <a:prstGeom prst="ellipse">
+            <a:avLst/>
+          </a:prstGeom>
+          <a:solidFill>
+            <a:srgbClr val="FDEDD3"/>
+          </a:solidFill>
+          <a:ln/>
+        </p:spPr>
+      </p:sp>
+      <p:pic>
+        <p:nvPicPr>
+          <p:cNvPr id="17" name="Image 3" descr="preencoded.png"/>
+          <p:cNvPicPr>
+            <a:picLocks noChangeAspect="1"/>
+          </p:cNvPicPr>
+          <p:nvPr/>
+        </p:nvPicPr>
+        <p:blipFill>
+          <a:blip r:embed="rId6"/>
+          <a:stretch>
+            <a:fillRect/>
+          </a:stretch>
+        </p:blipFill>
+        <p:spPr>
+          <a:xfrm>
+            <a:off x="956691" y="5254371"/>
+            <a:ext cx="326898" cy="326898"/>
+          </a:xfrm>
+          <a:prstGeom prst="rect">
+            <a:avLst/>
+          </a:prstGeom>
+        </p:spPr>
+      </p:pic>
+      <p:sp>
+        <p:nvSpPr>
+          <p:cNvPr id="18" name="Text 12"/>
+          <p:cNvSpPr/>
+          <p:nvPr/>
+        </p:nvSpPr>
+        <p:spPr>
+          <a:xfrm>
+            <a:off x="1600200" y="5074920"/>
+            <a:ext cx="3291840" cy="685800"/>
+          </a:xfrm>
+          <a:prstGeom prst="rect">
+            <a:avLst/>
+          </a:prstGeom>
+          <a:noFill/>
+          <a:ln/>
+        </p:spPr>
+        <p:txBody>
+          <a:bodyPr wrap="square" rtlCol="0" anchor="ctr"/>
+          <a:lstStyle/>
+          <a:p>
+            <a:pPr marL="0" indent="0">
+              <a:buNone/>
+            </a:pPr>
+            <a:r>
+              <a:rPr lang="en-US" sz="1350" b="1" dirty="0">
+                <a:solidFill>
+                  <a:srgbClr val="1B1F23"/>
+                </a:solidFill>
+                <a:latin typeface="Calibri" pitchFamily="34" charset="0"/>
+                <a:ea typeface="Calibri" pitchFamily="34" charset="-122"/>
+                <a:cs typeface="Calibri" pitchFamily="34" charset="-120"/>
+              </a:rPr>
               <a:t>Earth Engine satellite imagery</a:t>
             </a:r>
             <a:endParaRPr lang="en-US" sz="1350" dirty="0"/>
@@ -3673,7 +3369,7 @@
           <a:bodyPr wrap="square" rtlCol="0" anchor="ctr"/>
           <a:lstStyle/>
           <a:p>
-            <a:pPr indent="0" marL="0">
+            <a:pPr marL="0" indent="0">
               <a:buNone/>
             </a:pPr>
             <a:r>
@@ -3707,6 +3403,7 @@
         <a:solidFill>
           <a:srgbClr val="1B1F23"/>
         </a:solidFill>
+        <a:effectLst/>
       </p:bgPr>
     </p:bg>
     <p:spTree>
@@ -3744,7 +3441,7 @@
           <a:bodyPr wrap="square" rtlCol="0" anchor="ctr"/>
           <a:lstStyle/>
           <a:p>
-            <a:pPr algn="ctr" indent="0" marL="0">
+            <a:pPr marL="0" indent="0" algn="ctr">
               <a:buNone/>
             </a:pPr>
             <a:r>
@@ -3765,7 +3462,7 @@
       <p:sp>
         <p:nvSpPr>
           <p:cNvPr id="3" name="Text 1">
-            <a:hlinkClick r:id="rId1" tooltip=""/>
+            <a:hlinkClick r:id="rId3"/>
           </p:cNvPr>
           <p:cNvSpPr/>
           <p:nvPr/>
@@ -3785,7 +3482,7 @@
           <a:bodyPr wrap="square" rtlCol="0" anchor="ctr"/>
           <a:lstStyle/>
           <a:p>
-            <a:pPr algn="ctr" indent="0" marL="0">
+            <a:pPr marL="0" indent="0" algn="ctr">
               <a:buNone/>
             </a:pPr>
             <a:r>
@@ -3796,7 +3493,7 @@
                 <a:latin typeface="Calibri" pitchFamily="34" charset="0"/>
                 <a:ea typeface="Calibri" pitchFamily="34" charset="-122"/>
                 <a:cs typeface="Calibri" pitchFamily="34" charset="-120"/>
-                <a:hlinkClick r:id="rId1" invalidUrl="" action="" tgtFrame="" tooltip="" history="1" highlightClick="0" endSnd="0">
+                <a:hlinkClick r:id="rId3">
                   <a:extLst>
                     <a:ext uri="{A12FA001-AC4F-418D-AE19-62706E023703}">
                       <ahyp:hlinkClr xmlns:ahyp="http://schemas.microsoft.com/office/drawing/2018/hyperlinkcolor" val="tx"/>
@@ -3813,7 +3510,7 @@
       <p:sp>
         <p:nvSpPr>
           <p:cNvPr id="4" name="Text 2">
-            <a:hlinkClick r:id="rId2" tooltip=""/>
+            <a:hlinkClick r:id="rId4"/>
           </p:cNvPr>
           <p:cNvSpPr/>
           <p:nvPr/>
@@ -3833,7 +3530,7 @@
           <a:bodyPr wrap="square" rtlCol="0" anchor="ctr"/>
           <a:lstStyle/>
           <a:p>
-            <a:pPr algn="ctr" indent="0" marL="0">
+            <a:pPr marL="0" indent="0" algn="ctr">
               <a:buNone/>
             </a:pPr>
             <a:r>
@@ -3844,7 +3541,7 @@
                 <a:latin typeface="Calibri" pitchFamily="34" charset="0"/>
                 <a:ea typeface="Calibri" pitchFamily="34" charset="-122"/>
                 <a:cs typeface="Calibri" pitchFamily="34" charset="-120"/>
-                <a:hlinkClick r:id="rId2" invalidUrl="" action="" tgtFrame="" tooltip="" history="1" highlightClick="0" endSnd="0">
+                <a:hlinkClick r:id="rId4">
                   <a:extLst>
                     <a:ext uri="{A12FA001-AC4F-418D-AE19-62706E023703}">
                       <ahyp:hlinkClr xmlns:ahyp="http://schemas.microsoft.com/office/drawing/2018/hyperlinkcolor" val="tx"/>
@@ -3879,7 +3576,7 @@
           <a:bodyPr wrap="square" rtlCol="0" anchor="ctr"/>
           <a:lstStyle/>
           <a:p>
-            <a:pPr algn="ctr" indent="0" marL="0">
+            <a:pPr marL="0" indent="0" algn="ctr">
               <a:buNone/>
             </a:pPr>
             <a:r>
@@ -3913,6 +3610,7 @@
         <a:solidFill>
           <a:srgbClr val="FFFFFF"/>
         </a:solidFill>
+        <a:effectLst/>
       </p:bgPr>
     </p:bg>
     <p:spTree>
@@ -3949,30 +3647,6 @@
           <a:ln/>
         </p:spPr>
       </p:sp>
-      <p:pic>
-        <p:nvPicPr>
-          <p:cNvPr id="3" name="Image 0" descr="preencoded.png">    </p:cNvPr>
-          <p:cNvPicPr>
-            <a:picLocks noChangeAspect="1"/>
-          </p:cNvPicPr>
-          <p:nvPr/>
-        </p:nvPicPr>
-        <p:blipFill>
-          <a:blip r:embed="rId1"/>
-          <a:stretch>
-            <a:fillRect/>
-          </a:stretch>
-        </p:blipFill>
-        <p:spPr>
-          <a:xfrm>
-            <a:off x="875538" y="692658"/>
-            <a:ext cx="352044" cy="352044"/>
-          </a:xfrm>
-          <a:prstGeom prst="rect">
-            <a:avLst/>
-          </a:prstGeom>
-        </p:spPr>
-      </p:pic>
       <p:sp>
         <p:nvSpPr>
           <p:cNvPr id="4" name="Text 1"/>
@@ -3994,7 +3668,7 @@
           <a:bodyPr wrap="square" rtlCol="0" anchor="ctr"/>
           <a:lstStyle/>
           <a:p>
-            <a:pPr indent="0" marL="0">
+            <a:pPr marL="0" indent="0">
               <a:buNone/>
             </a:pPr>
             <a:r>
@@ -4033,7 +3707,7 @@
           <a:bodyPr wrap="square" rtlCol="0" anchor="ctr"/>
           <a:lstStyle/>
           <a:p>
-            <a:pPr algn="l" indent="0" marL="0">
+            <a:pPr marL="0" indent="0" algn="l">
               <a:buNone/>
             </a:pPr>
             <a:r>
@@ -4072,7 +3746,7 @@
           </a:solidFill>
           <a:ln/>
           <a:effectLst>
-            <a:outerShdw sx="100000" sy="100000" kx="0" ky="0" algn="bl" rotWithShape="0" blurRad="101600" dist="38100" dir="2700000">
+            <a:outerShdw blurRad="101600" dist="38100" dir="2700000" algn="bl" rotWithShape="0">
               <a:srgbClr val="000000">
                 <a:alpha val="12000"/>
               </a:srgbClr>
@@ -4102,158 +3776,7 @@
       </p:sp>
       <p:pic>
         <p:nvPicPr>
-          <p:cNvPr id="8" name="Image 1" descr="preencoded.png">    </p:cNvPr>
-          <p:cNvPicPr>
-            <a:picLocks noChangeAspect="1"/>
-          </p:cNvPicPr>
-          <p:nvPr/>
-        </p:nvPicPr>
-        <p:blipFill>
-          <a:blip r:embed="rId2"/>
-          <a:stretch>
-            <a:fillRect/>
-          </a:stretch>
-        </p:blipFill>
-        <p:spPr>
-          <a:xfrm>
-            <a:off x="2196846" y="3248406"/>
-            <a:ext cx="452628" cy="452628"/>
-          </a:xfrm>
-          <a:prstGeom prst="rect">
-            <a:avLst/>
-          </a:prstGeom>
-        </p:spPr>
-      </p:pic>
-      <p:sp>
-        <p:nvSpPr>
-          <p:cNvPr id="9" name="Text 5"/>
-          <p:cNvSpPr/>
-          <p:nvPr/>
-        </p:nvSpPr>
-        <p:spPr>
-          <a:xfrm>
-            <a:off x="914400" y="4069080"/>
-            <a:ext cx="3017520" cy="548640"/>
-          </a:xfrm>
-          <a:prstGeom prst="rect">
-            <a:avLst/>
-          </a:prstGeom>
-          <a:noFill/>
-          <a:ln/>
-        </p:spPr>
-        <p:txBody>
-          <a:bodyPr wrap="square" rtlCol="0" anchor="ctr"/>
-          <a:lstStyle/>
-          <a:p>
-            <a:pPr algn="ctr" indent="0" marL="0">
-              <a:buNone/>
-            </a:pPr>
-            <a:r>
-              <a:rPr lang="en-US" sz="1600" b="1" dirty="0">
-                <a:solidFill>
-                  <a:srgbClr val="1B1F23"/>
-                </a:solidFill>
-                <a:latin typeface="Calibri" pitchFamily="34" charset="0"/>
-                <a:ea typeface="Calibri" pitchFamily="34" charset="-122"/>
-                <a:cs typeface="Calibri" pitchFamily="34" charset="-120"/>
-              </a:rPr>
-              <a:t>Garbage dump fires</a:t>
-            </a:r>
-            <a:endParaRPr lang="en-US" sz="1600" dirty="0"/>
-          </a:p>
-        </p:txBody>
-      </p:sp>
-      <p:sp>
-        <p:nvSpPr>
-          <p:cNvPr id="10" name="Text 6"/>
-          <p:cNvSpPr/>
-          <p:nvPr/>
-        </p:nvSpPr>
-        <p:spPr>
-          <a:xfrm>
-            <a:off x="1005840" y="4617720"/>
-            <a:ext cx="2834640" cy="914400"/>
-          </a:xfrm>
-          <a:prstGeom prst="rect">
-            <a:avLst/>
-          </a:prstGeom>
-          <a:noFill/>
-          <a:ln/>
-        </p:spPr>
-        <p:txBody>
-          <a:bodyPr wrap="square" rtlCol="0" anchor="ctr"/>
-          <a:lstStyle/>
-          <a:p>
-            <a:pPr algn="ctr" indent="0" marL="0">
-              <a:buNone/>
-            </a:pPr>
-            <a:r>
-              <a:rPr lang="en-US" sz="1250" dirty="0">
-                <a:solidFill>
-                  <a:srgbClr val="667085"/>
-                </a:solidFill>
-                <a:latin typeface="Calibri" pitchFamily="34" charset="0"/>
-                <a:ea typeface="Calibri" pitchFamily="34" charset="-122"/>
-                <a:cs typeface="Calibri" pitchFamily="34" charset="-120"/>
-              </a:rPr>
-              <a:t>Localized, short-lived, invisible to city sensors</a:t>
-            </a:r>
-            <a:endParaRPr lang="en-US" sz="1250" dirty="0"/>
-          </a:p>
-        </p:txBody>
-      </p:sp>
-      <p:sp>
-        <p:nvSpPr>
-          <p:cNvPr id="11" name="Shape 7"/>
-          <p:cNvSpPr/>
-          <p:nvPr/>
-        </p:nvSpPr>
-        <p:spPr>
-          <a:xfrm>
-            <a:off x="4434840" y="2743200"/>
-            <a:ext cx="3383280" cy="2926080"/>
-          </a:xfrm>
-          <a:prstGeom prst="roundRect">
-            <a:avLst>
-              <a:gd name="adj" fmla="val 3125"/>
-            </a:avLst>
-          </a:prstGeom>
-          <a:solidFill>
-            <a:srgbClr val="F7F7F8"/>
-          </a:solidFill>
-          <a:ln/>
-          <a:effectLst>
-            <a:outerShdw sx="100000" sy="100000" kx="0" ky="0" algn="bl" rotWithShape="0" blurRad="101600" dist="38100" dir="2700000">
-              <a:srgbClr val="000000">
-                <a:alpha val="12000"/>
-              </a:srgbClr>
-            </a:outerShdw>
-          </a:effectLst>
-        </p:spPr>
-      </p:sp>
-      <p:sp>
-        <p:nvSpPr>
-          <p:cNvPr id="12" name="Shape 8"/>
-          <p:cNvSpPr/>
-          <p:nvPr/>
-        </p:nvSpPr>
-        <p:spPr>
-          <a:xfrm>
-            <a:off x="5715000" y="3063240"/>
-            <a:ext cx="822960" cy="822960"/>
-          </a:xfrm>
-          <a:prstGeom prst="ellipse">
-            <a:avLst/>
-          </a:prstGeom>
-          <a:solidFill>
-            <a:srgbClr val="FDEDD3"/>
-          </a:solidFill>
-          <a:ln/>
-        </p:spPr>
-      </p:sp>
-      <p:pic>
-        <p:nvPicPr>
-          <p:cNvPr id="13" name="Image 2" descr="preencoded.png">    </p:cNvPr>
+          <p:cNvPr id="8" name="Image 1" descr="preencoded.png"/>
           <p:cNvPicPr>
             <a:picLocks noChangeAspect="1"/>
           </p:cNvPicPr>
@@ -4267,7 +3790,7 @@
         </p:blipFill>
         <p:spPr>
           <a:xfrm>
-            <a:off x="5900166" y="3248406"/>
+            <a:off x="2196846" y="3248406"/>
             <a:ext cx="452628" cy="452628"/>
           </a:xfrm>
           <a:prstGeom prst="rect">
@@ -4277,13 +3800,13 @@
       </p:pic>
       <p:sp>
         <p:nvSpPr>
-          <p:cNvPr id="14" name="Text 9"/>
-          <p:cNvSpPr/>
-          <p:nvPr/>
-        </p:nvSpPr>
-        <p:spPr>
-          <a:xfrm>
-            <a:off x="4617720" y="4069080"/>
+          <p:cNvPr id="9" name="Text 5"/>
+          <p:cNvSpPr/>
+          <p:nvPr/>
+        </p:nvSpPr>
+        <p:spPr>
+          <a:xfrm>
+            <a:off x="914400" y="4069080"/>
             <a:ext cx="3017520" cy="548640"/>
           </a:xfrm>
           <a:prstGeom prst="rect">
@@ -4296,7 +3819,7 @@
           <a:bodyPr wrap="square" rtlCol="0" anchor="ctr"/>
           <a:lstStyle/>
           <a:p>
-            <a:pPr algn="ctr" indent="0" marL="0">
+            <a:pPr marL="0" indent="0" algn="ctr">
               <a:buNone/>
             </a:pPr>
             <a:r>
@@ -4308,7 +3831,7 @@
                 <a:ea typeface="Calibri" pitchFamily="34" charset="-122"/>
                 <a:cs typeface="Calibri" pitchFamily="34" charset="-120"/>
               </a:rPr>
-              <a:t>Industrial clusters</a:t>
+              <a:t>Garbage dump fires</a:t>
             </a:r>
             <a:endParaRPr lang="en-US" sz="1600" dirty="0"/>
           </a:p>
@@ -4316,13 +3839,13 @@
       </p:sp>
       <p:sp>
         <p:nvSpPr>
-          <p:cNvPr id="15" name="Text 10"/>
-          <p:cNvSpPr/>
-          <p:nvPr/>
-        </p:nvSpPr>
-        <p:spPr>
-          <a:xfrm>
-            <a:off x="4709160" y="4617720"/>
+          <p:cNvPr id="10" name="Text 6"/>
+          <p:cNvSpPr/>
+          <p:nvPr/>
+        </p:nvSpPr>
+        <p:spPr>
+          <a:xfrm>
+            <a:off x="1005840" y="4617720"/>
             <a:ext cx="2834640" cy="914400"/>
           </a:xfrm>
           <a:prstGeom prst="rect">
@@ -4335,7 +3858,7 @@
           <a:bodyPr wrap="square" rtlCol="0" anchor="ctr"/>
           <a:lstStyle/>
           <a:p>
-            <a:pPr algn="ctr" indent="0" marL="0">
+            <a:pPr marL="0" indent="0" algn="ctr">
               <a:buNone/>
             </a:pPr>
             <a:r>
@@ -4347,7 +3870,7 @@
                 <a:ea typeface="Calibri" pitchFamily="34" charset="-122"/>
                 <a:cs typeface="Calibri" pitchFamily="34" charset="-120"/>
               </a:rPr>
-              <a:t>Concentrated emissions in specific pockets</a:t>
+              <a:t>Localized, short-lived, invisible to city sensors</a:t>
             </a:r>
             <a:endParaRPr lang="en-US" sz="1250" dirty="0"/>
           </a:p>
@@ -4355,13 +3878,13 @@
       </p:sp>
       <p:sp>
         <p:nvSpPr>
-          <p:cNvPr id="16" name="Shape 11"/>
-          <p:cNvSpPr/>
-          <p:nvPr/>
-        </p:nvSpPr>
-        <p:spPr>
-          <a:xfrm>
-            <a:off x="8138160" y="2743200"/>
+          <p:cNvPr id="11" name="Shape 7"/>
+          <p:cNvSpPr/>
+          <p:nvPr/>
+        </p:nvSpPr>
+        <p:spPr>
+          <a:xfrm>
+            <a:off x="4434840" y="2743200"/>
             <a:ext cx="3383280" cy="2926080"/>
           </a:xfrm>
           <a:prstGeom prst="roundRect">
@@ -4374,7 +3897,7 @@
           </a:solidFill>
           <a:ln/>
           <a:effectLst>
-            <a:outerShdw sx="100000" sy="100000" kx="0" ky="0" algn="bl" rotWithShape="0" blurRad="101600" dist="38100" dir="2700000">
+            <a:outerShdw blurRad="101600" dist="38100" dir="2700000" algn="bl" rotWithShape="0">
               <a:srgbClr val="000000">
                 <a:alpha val="12000"/>
               </a:srgbClr>
@@ -4384,13 +3907,13 @@
       </p:sp>
       <p:sp>
         <p:nvSpPr>
-          <p:cNvPr id="17" name="Shape 12"/>
-          <p:cNvSpPr/>
-          <p:nvPr/>
-        </p:nvSpPr>
-        <p:spPr>
-          <a:xfrm>
-            <a:off x="9418320" y="3063240"/>
+          <p:cNvPr id="12" name="Shape 8"/>
+          <p:cNvSpPr/>
+          <p:nvPr/>
+        </p:nvSpPr>
+        <p:spPr>
+          <a:xfrm>
+            <a:off x="5715000" y="3063240"/>
             <a:ext cx="822960" cy="822960"/>
           </a:xfrm>
           <a:prstGeom prst="ellipse">
@@ -4404,7 +3927,7 @@
       </p:sp>
       <p:pic>
         <p:nvPicPr>
-          <p:cNvPr id="18" name="Image 3" descr="preencoded.png">    </p:cNvPr>
+          <p:cNvPr id="13" name="Image 2" descr="preencoded.png"/>
           <p:cNvPicPr>
             <a:picLocks noChangeAspect="1"/>
           </p:cNvPicPr>
@@ -4418,7 +3941,7 @@
         </p:blipFill>
         <p:spPr>
           <a:xfrm>
-            <a:off x="9603486" y="3248406"/>
+            <a:off x="5900166" y="3248406"/>
             <a:ext cx="452628" cy="452628"/>
           </a:xfrm>
           <a:prstGeom prst="rect">
@@ -4428,13 +3951,13 @@
       </p:pic>
       <p:sp>
         <p:nvSpPr>
-          <p:cNvPr id="19" name="Text 13"/>
-          <p:cNvSpPr/>
-          <p:nvPr/>
-        </p:nvSpPr>
-        <p:spPr>
-          <a:xfrm>
-            <a:off x="8321040" y="4069080"/>
+          <p:cNvPr id="14" name="Text 9"/>
+          <p:cNvSpPr/>
+          <p:nvPr/>
+        </p:nvSpPr>
+        <p:spPr>
+          <a:xfrm>
+            <a:off x="4617720" y="4069080"/>
             <a:ext cx="3017520" cy="548640"/>
           </a:xfrm>
           <a:prstGeom prst="rect">
@@ -4447,7 +3970,7 @@
           <a:bodyPr wrap="square" rtlCol="0" anchor="ctr"/>
           <a:lstStyle/>
           <a:p>
-            <a:pPr algn="ctr" indent="0" marL="0">
+            <a:pPr marL="0" indent="0" algn="ctr">
               <a:buNone/>
             </a:pPr>
             <a:r>
@@ -4459,6 +3982,157 @@
                 <a:ea typeface="Calibri" pitchFamily="34" charset="-122"/>
                 <a:cs typeface="Calibri" pitchFamily="34" charset="-120"/>
               </a:rPr>
+              <a:t>Industrial clusters</a:t>
+            </a:r>
+            <a:endParaRPr lang="en-US" sz="1600" dirty="0"/>
+          </a:p>
+        </p:txBody>
+      </p:sp>
+      <p:sp>
+        <p:nvSpPr>
+          <p:cNvPr id="15" name="Text 10"/>
+          <p:cNvSpPr/>
+          <p:nvPr/>
+        </p:nvSpPr>
+        <p:spPr>
+          <a:xfrm>
+            <a:off x="4709160" y="4617720"/>
+            <a:ext cx="2834640" cy="914400"/>
+          </a:xfrm>
+          <a:prstGeom prst="rect">
+            <a:avLst/>
+          </a:prstGeom>
+          <a:noFill/>
+          <a:ln/>
+        </p:spPr>
+        <p:txBody>
+          <a:bodyPr wrap="square" rtlCol="0" anchor="ctr"/>
+          <a:lstStyle/>
+          <a:p>
+            <a:pPr marL="0" indent="0" algn="ctr">
+              <a:buNone/>
+            </a:pPr>
+            <a:r>
+              <a:rPr lang="en-US" sz="1250" dirty="0">
+                <a:solidFill>
+                  <a:srgbClr val="667085"/>
+                </a:solidFill>
+                <a:latin typeface="Calibri" pitchFamily="34" charset="0"/>
+                <a:ea typeface="Calibri" pitchFamily="34" charset="-122"/>
+                <a:cs typeface="Calibri" pitchFamily="34" charset="-120"/>
+              </a:rPr>
+              <a:t>Concentrated emissions in specific pockets</a:t>
+            </a:r>
+            <a:endParaRPr lang="en-US" sz="1250" dirty="0"/>
+          </a:p>
+        </p:txBody>
+      </p:sp>
+      <p:sp>
+        <p:nvSpPr>
+          <p:cNvPr id="16" name="Shape 11"/>
+          <p:cNvSpPr/>
+          <p:nvPr/>
+        </p:nvSpPr>
+        <p:spPr>
+          <a:xfrm>
+            <a:off x="8138160" y="2743200"/>
+            <a:ext cx="3383280" cy="2926080"/>
+          </a:xfrm>
+          <a:prstGeom prst="roundRect">
+            <a:avLst>
+              <a:gd name="adj" fmla="val 3125"/>
+            </a:avLst>
+          </a:prstGeom>
+          <a:solidFill>
+            <a:srgbClr val="F7F7F8"/>
+          </a:solidFill>
+          <a:ln/>
+          <a:effectLst>
+            <a:outerShdw blurRad="101600" dist="38100" dir="2700000" algn="bl" rotWithShape="0">
+              <a:srgbClr val="000000">
+                <a:alpha val="12000"/>
+              </a:srgbClr>
+            </a:outerShdw>
+          </a:effectLst>
+        </p:spPr>
+      </p:sp>
+      <p:sp>
+        <p:nvSpPr>
+          <p:cNvPr id="17" name="Shape 12"/>
+          <p:cNvSpPr/>
+          <p:nvPr/>
+        </p:nvSpPr>
+        <p:spPr>
+          <a:xfrm>
+            <a:off x="9418320" y="3063240"/>
+            <a:ext cx="822960" cy="822960"/>
+          </a:xfrm>
+          <a:prstGeom prst="ellipse">
+            <a:avLst/>
+          </a:prstGeom>
+          <a:solidFill>
+            <a:srgbClr val="FDEDD3"/>
+          </a:solidFill>
+          <a:ln/>
+        </p:spPr>
+      </p:sp>
+      <p:pic>
+        <p:nvPicPr>
+          <p:cNvPr id="18" name="Image 3" descr="preencoded.png"/>
+          <p:cNvPicPr>
+            <a:picLocks noChangeAspect="1"/>
+          </p:cNvPicPr>
+          <p:nvPr/>
+        </p:nvPicPr>
+        <p:blipFill>
+          <a:blip r:embed="rId5"/>
+          <a:stretch>
+            <a:fillRect/>
+          </a:stretch>
+        </p:blipFill>
+        <p:spPr>
+          <a:xfrm>
+            <a:off x="9603486" y="3248406"/>
+            <a:ext cx="452628" cy="452628"/>
+          </a:xfrm>
+          <a:prstGeom prst="rect">
+            <a:avLst/>
+          </a:prstGeom>
+        </p:spPr>
+      </p:pic>
+      <p:sp>
+        <p:nvSpPr>
+          <p:cNvPr id="19" name="Text 13"/>
+          <p:cNvSpPr/>
+          <p:nvPr/>
+        </p:nvSpPr>
+        <p:spPr>
+          <a:xfrm>
+            <a:off x="8321040" y="4069080"/>
+            <a:ext cx="3017520" cy="548640"/>
+          </a:xfrm>
+          <a:prstGeom prst="rect">
+            <a:avLst/>
+          </a:prstGeom>
+          <a:noFill/>
+          <a:ln/>
+        </p:spPr>
+        <p:txBody>
+          <a:bodyPr wrap="square" rtlCol="0" anchor="ctr"/>
+          <a:lstStyle/>
+          <a:p>
+            <a:pPr marL="0" indent="0" algn="ctr">
+              <a:buNone/>
+            </a:pPr>
+            <a:r>
+              <a:rPr lang="en-US" sz="1600" b="1" dirty="0">
+                <a:solidFill>
+                  <a:srgbClr val="1B1F23"/>
+                </a:solidFill>
+                <a:latin typeface="Calibri" pitchFamily="34" charset="0"/>
+                <a:ea typeface="Calibri" pitchFamily="34" charset="-122"/>
+                <a:cs typeface="Calibri" pitchFamily="34" charset="-120"/>
+              </a:rPr>
               <a:t>Smog-trapping junctions</a:t>
             </a:r>
             <a:endParaRPr lang="en-US" sz="1600" dirty="0"/>
@@ -4486,7 +4160,7 @@
           <a:bodyPr wrap="square" rtlCol="0" anchor="ctr"/>
           <a:lstStyle/>
           <a:p>
-            <a:pPr algn="ctr" indent="0" marL="0">
+            <a:pPr marL="0" indent="0" algn="ctr">
               <a:buNone/>
             </a:pPr>
             <a:r>
@@ -4520,6 +4194,7 @@
         <a:solidFill>
           <a:srgbClr val="FFFFFF"/>
         </a:solidFill>
+        <a:effectLst/>
       </p:bgPr>
     </p:bg>
     <p:spTree>
@@ -4558,280 +4233,7 @@
       </p:sp>
       <p:pic>
         <p:nvPicPr>
-          <p:cNvPr id="3" name="Image 0" descr="preencoded.png">    </p:cNvPr>
-          <p:cNvPicPr>
-            <a:picLocks noChangeAspect="1"/>
-          </p:cNvPicPr>
-          <p:nvPr/>
-        </p:nvPicPr>
-        <p:blipFill>
-          <a:blip r:embed="rId1"/>
-          <a:stretch>
-            <a:fillRect/>
-          </a:stretch>
-        </p:blipFill>
-        <p:spPr>
-          <a:xfrm>
-            <a:off x="875538" y="692658"/>
-            <a:ext cx="352044" cy="352044"/>
-          </a:xfrm>
-          <a:prstGeom prst="rect">
-            <a:avLst/>
-          </a:prstGeom>
-        </p:spPr>
-      </p:pic>
-      <p:sp>
-        <p:nvSpPr>
-          <p:cNvPr id="4" name="Text 1"/>
-          <p:cNvSpPr/>
-          <p:nvPr/>
-        </p:nvSpPr>
-        <p:spPr>
-          <a:xfrm>
-            <a:off x="1554480" y="548640"/>
-            <a:ext cx="7315200" cy="640080"/>
-          </a:xfrm>
-          <a:prstGeom prst="rect">
-            <a:avLst/>
-          </a:prstGeom>
-          <a:noFill/>
-          <a:ln/>
-        </p:spPr>
-        <p:txBody>
-          <a:bodyPr wrap="square" rtlCol="0" anchor="ctr"/>
-          <a:lstStyle/>
-          <a:p>
-            <a:pPr indent="0" marL="0">
-              <a:buNone/>
-            </a:pPr>
-            <a:r>
-              <a:rPr lang="en-US" sz="3000" b="1" dirty="0">
-                <a:solidFill>
-                  <a:srgbClr val="1B1F23"/>
-                </a:solidFill>
-                <a:latin typeface="Cambria" pitchFamily="34" charset="0"/>
-                <a:ea typeface="Cambria" pitchFamily="34" charset="-122"/>
-                <a:cs typeface="Cambria" pitchFamily="34" charset="-120"/>
-              </a:rPr>
-              <a:t>Our Solution</a:t>
-            </a:r>
-            <a:endParaRPr lang="en-US" sz="3000" dirty="0"/>
-          </a:p>
-        </p:txBody>
-      </p:sp>
-      <p:sp>
-        <p:nvSpPr>
-          <p:cNvPr id="5" name="Shape 2"/>
-          <p:cNvSpPr/>
-          <p:nvPr/>
-        </p:nvSpPr>
-        <p:spPr>
-          <a:xfrm>
-            <a:off x="731520" y="1463040"/>
-            <a:ext cx="10698480" cy="1188720"/>
-          </a:xfrm>
-          <a:prstGeom prst="roundRect">
-            <a:avLst>
-              <a:gd name="adj" fmla="val 7692"/>
-            </a:avLst>
-          </a:prstGeom>
-          <a:solidFill>
-            <a:srgbClr val="1B1F23"/>
-          </a:solidFill>
-          <a:ln/>
-          <a:effectLst>
-            <a:outerShdw sx="100000" sy="100000" kx="0" ky="0" algn="bl" rotWithShape="0" blurRad="101600" dist="38100" dir="2700000">
-              <a:srgbClr val="000000">
-                <a:alpha val="12000"/>
-              </a:srgbClr>
-            </a:outerShdw>
-          </a:effectLst>
-        </p:spPr>
-      </p:sp>
-      <p:sp>
-        <p:nvSpPr>
-          <p:cNvPr id="6" name="Text 3"/>
-          <p:cNvSpPr/>
-          <p:nvPr/>
-        </p:nvSpPr>
-        <p:spPr>
-          <a:xfrm>
-            <a:off x="1005840" y="1463040"/>
-            <a:ext cx="10149840" cy="1188720"/>
-          </a:xfrm>
-          <a:prstGeom prst="rect">
-            <a:avLst/>
-          </a:prstGeom>
-          <a:noFill/>
-          <a:ln/>
-        </p:spPr>
-        <p:txBody>
-          <a:bodyPr wrap="square" rtlCol="0" anchor="ctr"/>
-          <a:lstStyle/>
-          <a:p>
-            <a:pPr algn="ctr" indent="0" marL="0">
-              <a:buNone/>
-            </a:pPr>
-            <a:r>
-              <a:rPr lang="en-US" sz="1700" i="1" dirty="0">
-                <a:solidFill>
-                  <a:srgbClr val="FFFFFF"/>
-                </a:solidFill>
-                <a:latin typeface="Calibri" pitchFamily="34" charset="0"/>
-                <a:ea typeface="Calibri" pitchFamily="34" charset="-122"/>
-                <a:cs typeface="Calibri" pitchFamily="34" charset="-120"/>
-              </a:rPr>
-              <a:t>A living pollution map that fuses ground sensors, satellite data, and citizen photos into real-time hotspots, 24-hour forecasts, and plain-language AI briefings — in English and Hindi.</a:t>
-            </a:r>
-            <a:endParaRPr lang="en-US" sz="1700" dirty="0"/>
-          </a:p>
-        </p:txBody>
-      </p:sp>
-      <p:sp>
-        <p:nvSpPr>
-          <p:cNvPr id="7" name="Shape 4"/>
-          <p:cNvSpPr/>
-          <p:nvPr/>
-        </p:nvSpPr>
-        <p:spPr>
-          <a:xfrm>
-            <a:off x="731520" y="3017520"/>
-            <a:ext cx="731520" cy="731520"/>
-          </a:xfrm>
-          <a:prstGeom prst="ellipse">
-            <a:avLst/>
-          </a:prstGeom>
-          <a:solidFill>
-            <a:srgbClr val="E8F0FE"/>
-          </a:solidFill>
-          <a:ln/>
-        </p:spPr>
-      </p:sp>
-      <p:pic>
-        <p:nvPicPr>
-          <p:cNvPr id="8" name="Image 1" descr="preencoded.png">    </p:cNvPr>
-          <p:cNvPicPr>
-            <a:picLocks noChangeAspect="1"/>
-          </p:cNvPicPr>
-          <p:nvPr/>
-        </p:nvPicPr>
-        <p:blipFill>
-          <a:blip r:embed="rId2"/>
-          <a:stretch>
-            <a:fillRect/>
-          </a:stretch>
-        </p:blipFill>
-        <p:spPr>
-          <a:xfrm>
-            <a:off x="896112" y="3182112"/>
-            <a:ext cx="402336" cy="402336"/>
-          </a:xfrm>
-          <a:prstGeom prst="rect">
-            <a:avLst/>
-          </a:prstGeom>
-        </p:spPr>
-      </p:pic>
-      <p:sp>
-        <p:nvSpPr>
-          <p:cNvPr id="9" name="Text 5"/>
-          <p:cNvSpPr/>
-          <p:nvPr/>
-        </p:nvSpPr>
-        <p:spPr>
-          <a:xfrm>
-            <a:off x="1645920" y="3017520"/>
-            <a:ext cx="2468880" cy="731520"/>
-          </a:xfrm>
-          <a:prstGeom prst="rect">
-            <a:avLst/>
-          </a:prstGeom>
-          <a:noFill/>
-          <a:ln/>
-        </p:spPr>
-        <p:txBody>
-          <a:bodyPr wrap="square" rtlCol="0" anchor="ctr"/>
-          <a:lstStyle/>
-          <a:p>
-            <a:pPr indent="0" marL="0">
-              <a:buNone/>
-            </a:pPr>
-            <a:r>
-              <a:rPr lang="en-US" sz="2000" b="1" dirty="0">
-                <a:solidFill>
-                  <a:srgbClr val="1B1F23"/>
-                </a:solidFill>
-                <a:latin typeface="Calibri" pitchFamily="34" charset="0"/>
-                <a:ea typeface="Calibri" pitchFamily="34" charset="-122"/>
-                <a:cs typeface="Calibri" pitchFamily="34" charset="-120"/>
-              </a:rPr>
-              <a:t>Detect</a:t>
-            </a:r>
-            <a:endParaRPr lang="en-US" sz="2000" dirty="0"/>
-          </a:p>
-        </p:txBody>
-      </p:sp>
-      <p:sp>
-        <p:nvSpPr>
-          <p:cNvPr id="10" name="Text 6"/>
-          <p:cNvSpPr/>
-          <p:nvPr/>
-        </p:nvSpPr>
-        <p:spPr>
-          <a:xfrm>
-            <a:off x="731520" y="3886200"/>
-            <a:ext cx="3383280" cy="1463040"/>
-          </a:xfrm>
-          <a:prstGeom prst="rect">
-            <a:avLst/>
-          </a:prstGeom>
-          <a:noFill/>
-          <a:ln/>
-        </p:spPr>
-        <p:txBody>
-          <a:bodyPr wrap="square" rtlCol="0" anchor="ctr"/>
-          <a:lstStyle/>
-          <a:p>
-            <a:pPr algn="l" indent="0" marL="0">
-              <a:buNone/>
-            </a:pPr>
-            <a:r>
-              <a:rPr lang="en-US" sz="1300" dirty="0">
-                <a:solidFill>
-                  <a:srgbClr val="667085"/>
-                </a:solidFill>
-                <a:latin typeface="Calibri" pitchFamily="34" charset="0"/>
-                <a:ea typeface="Calibri" pitchFamily="34" charset="-122"/>
-                <a:cs typeface="Calibri" pitchFamily="34" charset="-120"/>
-              </a:rPr>
-              <a:t>Fuses CPCB sensors + satellite fire data + citizen photos into a per-zone hotspot score</a:t>
-            </a:r>
-            <a:endParaRPr lang="en-US" sz="1300" dirty="0"/>
-          </a:p>
-        </p:txBody>
-      </p:sp>
-      <p:sp>
-        <p:nvSpPr>
-          <p:cNvPr id="11" name="Shape 7"/>
-          <p:cNvSpPr/>
-          <p:nvPr/>
-        </p:nvSpPr>
-        <p:spPr>
-          <a:xfrm>
-            <a:off x="4434840" y="3017520"/>
-            <a:ext cx="731520" cy="731520"/>
-          </a:xfrm>
-          <a:prstGeom prst="ellipse">
-            <a:avLst/>
-          </a:prstGeom>
-          <a:solidFill>
-            <a:srgbClr val="E8F0FE"/>
-          </a:solidFill>
-          <a:ln/>
-        </p:spPr>
-      </p:sp>
-      <p:pic>
-        <p:nvPicPr>
-          <p:cNvPr id="12" name="Image 2" descr="preencoded.png">    </p:cNvPr>
+          <p:cNvPr id="3" name="Image 0" descr="preencoded.png"/>
           <p:cNvPicPr>
             <a:picLocks noChangeAspect="1"/>
           </p:cNvPicPr>
@@ -4845,8 +4247,8 @@
         </p:blipFill>
         <p:spPr>
           <a:xfrm>
-            <a:off x="4599432" y="3182112"/>
-            <a:ext cx="402336" cy="402336"/>
+            <a:off x="875538" y="692658"/>
+            <a:ext cx="352044" cy="352044"/>
           </a:xfrm>
           <a:prstGeom prst="rect">
             <a:avLst/>
@@ -4855,14 +4257,14 @@
       </p:pic>
       <p:sp>
         <p:nvSpPr>
-          <p:cNvPr id="13" name="Text 8"/>
-          <p:cNvSpPr/>
-          <p:nvPr/>
-        </p:nvSpPr>
-        <p:spPr>
-          <a:xfrm>
-            <a:off x="5349240" y="3017520"/>
-            <a:ext cx="2468880" cy="731520"/>
+          <p:cNvPr id="4" name="Text 1"/>
+          <p:cNvSpPr/>
+          <p:nvPr/>
+        </p:nvSpPr>
+        <p:spPr>
+          <a:xfrm>
+            <a:off x="1554480" y="548640"/>
+            <a:ext cx="7315200" cy="640080"/>
           </a:xfrm>
           <a:prstGeom prst="rect">
             <a:avLst/>
@@ -4874,72 +4276,101 @@
           <a:bodyPr wrap="square" rtlCol="0" anchor="ctr"/>
           <a:lstStyle/>
           <a:p>
-            <a:pPr indent="0" marL="0">
-              <a:buNone/>
-            </a:pPr>
-            <a:r>
-              <a:rPr lang="en-US" sz="2000" b="1" dirty="0">
+            <a:pPr marL="0" indent="0">
+              <a:buNone/>
+            </a:pPr>
+            <a:r>
+              <a:rPr lang="en-US" sz="3000" b="1" dirty="0">
                 <a:solidFill>
                   <a:srgbClr val="1B1F23"/>
+                </a:solidFill>
+                <a:latin typeface="Cambria" pitchFamily="34" charset="0"/>
+                <a:ea typeface="Cambria" pitchFamily="34" charset="-122"/>
+                <a:cs typeface="Cambria" pitchFamily="34" charset="-120"/>
+              </a:rPr>
+              <a:t>Our Solution</a:t>
+            </a:r>
+            <a:endParaRPr lang="en-US" sz="3000" dirty="0"/>
+          </a:p>
+        </p:txBody>
+      </p:sp>
+      <p:sp>
+        <p:nvSpPr>
+          <p:cNvPr id="5" name="Shape 2"/>
+          <p:cNvSpPr/>
+          <p:nvPr/>
+        </p:nvSpPr>
+        <p:spPr>
+          <a:xfrm>
+            <a:off x="731520" y="1463040"/>
+            <a:ext cx="10698480" cy="1188720"/>
+          </a:xfrm>
+          <a:prstGeom prst="roundRect">
+            <a:avLst>
+              <a:gd name="adj" fmla="val 7692"/>
+            </a:avLst>
+          </a:prstGeom>
+          <a:solidFill>
+            <a:srgbClr val="1B1F23"/>
+          </a:solidFill>
+          <a:ln/>
+          <a:effectLst>
+            <a:outerShdw blurRad="101600" dist="38100" dir="2700000" algn="bl" rotWithShape="0">
+              <a:srgbClr val="000000">
+                <a:alpha val="12000"/>
+              </a:srgbClr>
+            </a:outerShdw>
+          </a:effectLst>
+        </p:spPr>
+      </p:sp>
+      <p:sp>
+        <p:nvSpPr>
+          <p:cNvPr id="6" name="Text 3"/>
+          <p:cNvSpPr/>
+          <p:nvPr/>
+        </p:nvSpPr>
+        <p:spPr>
+          <a:xfrm>
+            <a:off x="1005840" y="1463040"/>
+            <a:ext cx="10149840" cy="1188720"/>
+          </a:xfrm>
+          <a:prstGeom prst="rect">
+            <a:avLst/>
+          </a:prstGeom>
+          <a:noFill/>
+          <a:ln/>
+        </p:spPr>
+        <p:txBody>
+          <a:bodyPr wrap="square" rtlCol="0" anchor="ctr"/>
+          <a:lstStyle/>
+          <a:p>
+            <a:pPr marL="0" indent="0" algn="ctr">
+              <a:buNone/>
+            </a:pPr>
+            <a:r>
+              <a:rPr lang="en-US" sz="1700" i="1" dirty="0">
+                <a:solidFill>
+                  <a:srgbClr val="FFFFFF"/>
                 </a:solidFill>
                 <a:latin typeface="Calibri" pitchFamily="34" charset="0"/>
                 <a:ea typeface="Calibri" pitchFamily="34" charset="-122"/>
                 <a:cs typeface="Calibri" pitchFamily="34" charset="-120"/>
               </a:rPr>
-              <a:t>Predict</a:t>
-            </a:r>
-            <a:endParaRPr lang="en-US" sz="2000" dirty="0"/>
-          </a:p>
-        </p:txBody>
-      </p:sp>
-      <p:sp>
-        <p:nvSpPr>
-          <p:cNvPr id="14" name="Text 9"/>
-          <p:cNvSpPr/>
-          <p:nvPr/>
-        </p:nvSpPr>
-        <p:spPr>
-          <a:xfrm>
-            <a:off x="4434840" y="3886200"/>
-            <a:ext cx="3383280" cy="1463040"/>
-          </a:xfrm>
-          <a:prstGeom prst="rect">
-            <a:avLst/>
-          </a:prstGeom>
-          <a:noFill/>
-          <a:ln/>
-        </p:spPr>
-        <p:txBody>
-          <a:bodyPr wrap="square" rtlCol="0" anchor="ctr"/>
-          <a:lstStyle/>
-          <a:p>
-            <a:pPr algn="l" indent="0" marL="0">
-              <a:buNone/>
-            </a:pPr>
-            <a:r>
-              <a:rPr lang="en-US" sz="1300" dirty="0">
-                <a:solidFill>
-                  <a:srgbClr val="667085"/>
-                </a:solidFill>
-                <a:latin typeface="Calibri" pitchFamily="34" charset="0"/>
-                <a:ea typeface="Calibri" pitchFamily="34" charset="-122"/>
-                <a:cs typeface="Calibri" pitchFamily="34" charset="-120"/>
-              </a:rPr>
-              <a:t>Forecasts each zone's AQI 24 hours ahead using a model trained on live + historical data</a:t>
-            </a:r>
-            <a:endParaRPr lang="en-US" sz="1300" dirty="0"/>
-          </a:p>
-        </p:txBody>
-      </p:sp>
-      <p:sp>
-        <p:nvSpPr>
-          <p:cNvPr id="15" name="Shape 10"/>
-          <p:cNvSpPr/>
-          <p:nvPr/>
-        </p:nvSpPr>
-        <p:spPr>
-          <a:xfrm>
-            <a:off x="8138160" y="3017520"/>
+              <a:t>A living pollution map that fuses ground sensors, satellite data, and citizen photos into real-time hotspots, 24-hour forecasts, and plain-language AI briefings — in English and Hindi.</a:t>
+            </a:r>
+            <a:endParaRPr lang="en-US" sz="1700" dirty="0"/>
+          </a:p>
+        </p:txBody>
+      </p:sp>
+      <p:sp>
+        <p:nvSpPr>
+          <p:cNvPr id="7" name="Shape 4"/>
+          <p:cNvSpPr/>
+          <p:nvPr/>
+        </p:nvSpPr>
+        <p:spPr>
+          <a:xfrm>
+            <a:off x="731520" y="3017520"/>
             <a:ext cx="731520" cy="731520"/>
           </a:xfrm>
           <a:prstGeom prst="ellipse">
@@ -4953,7 +4384,7 @@
       </p:sp>
       <p:pic>
         <p:nvPicPr>
-          <p:cNvPr id="16" name="Image 3" descr="preencoded.png">    </p:cNvPr>
+          <p:cNvPr id="8" name="Image 1" descr="preencoded.png"/>
           <p:cNvPicPr>
             <a:picLocks noChangeAspect="1"/>
           </p:cNvPicPr>
@@ -4967,7 +4398,7 @@
         </p:blipFill>
         <p:spPr>
           <a:xfrm>
-            <a:off x="8302752" y="3182112"/>
+            <a:off x="896112" y="3182112"/>
             <a:ext cx="402336" cy="402336"/>
           </a:xfrm>
           <a:prstGeom prst="rect">
@@ -4977,13 +4408,13 @@
       </p:pic>
       <p:sp>
         <p:nvSpPr>
-          <p:cNvPr id="17" name="Text 11"/>
-          <p:cNvSpPr/>
-          <p:nvPr/>
-        </p:nvSpPr>
-        <p:spPr>
-          <a:xfrm>
-            <a:off x="9052560" y="3017520"/>
+          <p:cNvPr id="9" name="Text 5"/>
+          <p:cNvSpPr/>
+          <p:nvPr/>
+        </p:nvSpPr>
+        <p:spPr>
+          <a:xfrm>
+            <a:off x="1645920" y="3017520"/>
             <a:ext cx="2468880" cy="731520"/>
           </a:xfrm>
           <a:prstGeom prst="rect">
@@ -4996,7 +4427,7 @@
           <a:bodyPr wrap="square" rtlCol="0" anchor="ctr"/>
           <a:lstStyle/>
           <a:p>
-            <a:pPr indent="0" marL="0">
+            <a:pPr marL="0" indent="0">
               <a:buNone/>
             </a:pPr>
             <a:r>
@@ -5008,6 +4439,250 @@
                 <a:ea typeface="Calibri" pitchFamily="34" charset="-122"/>
                 <a:cs typeface="Calibri" pitchFamily="34" charset="-120"/>
               </a:rPr>
+              <a:t>Detect</a:t>
+            </a:r>
+            <a:endParaRPr lang="en-US" sz="2000" dirty="0"/>
+          </a:p>
+        </p:txBody>
+      </p:sp>
+      <p:sp>
+        <p:nvSpPr>
+          <p:cNvPr id="10" name="Text 6"/>
+          <p:cNvSpPr/>
+          <p:nvPr/>
+        </p:nvSpPr>
+        <p:spPr>
+          <a:xfrm>
+            <a:off x="731520" y="3886200"/>
+            <a:ext cx="3383280" cy="1463040"/>
+          </a:xfrm>
+          <a:prstGeom prst="rect">
+            <a:avLst/>
+          </a:prstGeom>
+          <a:noFill/>
+          <a:ln/>
+        </p:spPr>
+        <p:txBody>
+          <a:bodyPr wrap="square" rtlCol="0" anchor="ctr"/>
+          <a:lstStyle/>
+          <a:p>
+            <a:pPr marL="0" indent="0" algn="l">
+              <a:buNone/>
+            </a:pPr>
+            <a:r>
+              <a:rPr lang="en-US" sz="1300" dirty="0">
+                <a:solidFill>
+                  <a:srgbClr val="667085"/>
+                </a:solidFill>
+                <a:latin typeface="Calibri" pitchFamily="34" charset="0"/>
+                <a:ea typeface="Calibri" pitchFamily="34" charset="-122"/>
+                <a:cs typeface="Calibri" pitchFamily="34" charset="-120"/>
+              </a:rPr>
+              <a:t>Fuses CPCB sensors + satellite fire data + citizen photos into a per-zone hotspot score</a:t>
+            </a:r>
+            <a:endParaRPr lang="en-US" sz="1300" dirty="0"/>
+          </a:p>
+        </p:txBody>
+      </p:sp>
+      <p:sp>
+        <p:nvSpPr>
+          <p:cNvPr id="11" name="Shape 7"/>
+          <p:cNvSpPr/>
+          <p:nvPr/>
+        </p:nvSpPr>
+        <p:spPr>
+          <a:xfrm>
+            <a:off x="4434840" y="3017520"/>
+            <a:ext cx="731520" cy="731520"/>
+          </a:xfrm>
+          <a:prstGeom prst="ellipse">
+            <a:avLst/>
+          </a:prstGeom>
+          <a:solidFill>
+            <a:srgbClr val="E8F0FE"/>
+          </a:solidFill>
+          <a:ln/>
+        </p:spPr>
+      </p:sp>
+      <p:pic>
+        <p:nvPicPr>
+          <p:cNvPr id="12" name="Image 2" descr="preencoded.png"/>
+          <p:cNvPicPr>
+            <a:picLocks noChangeAspect="1"/>
+          </p:cNvPicPr>
+          <p:nvPr/>
+        </p:nvPicPr>
+        <p:blipFill>
+          <a:blip r:embed="rId5"/>
+          <a:stretch>
+            <a:fillRect/>
+          </a:stretch>
+        </p:blipFill>
+        <p:spPr>
+          <a:xfrm>
+            <a:off x="4599432" y="3182112"/>
+            <a:ext cx="402336" cy="402336"/>
+          </a:xfrm>
+          <a:prstGeom prst="rect">
+            <a:avLst/>
+          </a:prstGeom>
+        </p:spPr>
+      </p:pic>
+      <p:sp>
+        <p:nvSpPr>
+          <p:cNvPr id="13" name="Text 8"/>
+          <p:cNvSpPr/>
+          <p:nvPr/>
+        </p:nvSpPr>
+        <p:spPr>
+          <a:xfrm>
+            <a:off x="5349240" y="3017520"/>
+            <a:ext cx="2468880" cy="731520"/>
+          </a:xfrm>
+          <a:prstGeom prst="rect">
+            <a:avLst/>
+          </a:prstGeom>
+          <a:noFill/>
+          <a:ln/>
+        </p:spPr>
+        <p:txBody>
+          <a:bodyPr wrap="square" rtlCol="0" anchor="ctr"/>
+          <a:lstStyle/>
+          <a:p>
+            <a:pPr marL="0" indent="0">
+              <a:buNone/>
+            </a:pPr>
+            <a:r>
+              <a:rPr lang="en-US" sz="2000" b="1" dirty="0">
+                <a:solidFill>
+                  <a:srgbClr val="1B1F23"/>
+                </a:solidFill>
+                <a:latin typeface="Calibri" pitchFamily="34" charset="0"/>
+                <a:ea typeface="Calibri" pitchFamily="34" charset="-122"/>
+                <a:cs typeface="Calibri" pitchFamily="34" charset="-120"/>
+              </a:rPr>
+              <a:t>Predict</a:t>
+            </a:r>
+            <a:endParaRPr lang="en-US" sz="2000" dirty="0"/>
+          </a:p>
+        </p:txBody>
+      </p:sp>
+      <p:sp>
+        <p:nvSpPr>
+          <p:cNvPr id="14" name="Text 9"/>
+          <p:cNvSpPr/>
+          <p:nvPr/>
+        </p:nvSpPr>
+        <p:spPr>
+          <a:xfrm>
+            <a:off x="4434840" y="3886200"/>
+            <a:ext cx="3383280" cy="1463040"/>
+          </a:xfrm>
+          <a:prstGeom prst="rect">
+            <a:avLst/>
+          </a:prstGeom>
+          <a:noFill/>
+          <a:ln/>
+        </p:spPr>
+        <p:txBody>
+          <a:bodyPr wrap="square" rtlCol="0" anchor="ctr"/>
+          <a:lstStyle/>
+          <a:p>
+            <a:pPr marL="0" indent="0" algn="l">
+              <a:buNone/>
+            </a:pPr>
+            <a:r>
+              <a:rPr lang="en-US" sz="1300" dirty="0">
+                <a:solidFill>
+                  <a:srgbClr val="667085"/>
+                </a:solidFill>
+                <a:latin typeface="Calibri" pitchFamily="34" charset="0"/>
+                <a:ea typeface="Calibri" pitchFamily="34" charset="-122"/>
+                <a:cs typeface="Calibri" pitchFamily="34" charset="-120"/>
+              </a:rPr>
+              <a:t>Forecasts each zone's AQI 24 hours ahead using a model trained on live + historical data</a:t>
+            </a:r>
+            <a:endParaRPr lang="en-US" sz="1300" dirty="0"/>
+          </a:p>
+        </p:txBody>
+      </p:sp>
+      <p:sp>
+        <p:nvSpPr>
+          <p:cNvPr id="15" name="Shape 10"/>
+          <p:cNvSpPr/>
+          <p:nvPr/>
+        </p:nvSpPr>
+        <p:spPr>
+          <a:xfrm>
+            <a:off x="8138160" y="3017520"/>
+            <a:ext cx="731520" cy="731520"/>
+          </a:xfrm>
+          <a:prstGeom prst="ellipse">
+            <a:avLst/>
+          </a:prstGeom>
+          <a:solidFill>
+            <a:srgbClr val="E8F0FE"/>
+          </a:solidFill>
+          <a:ln/>
+        </p:spPr>
+      </p:sp>
+      <p:pic>
+        <p:nvPicPr>
+          <p:cNvPr id="16" name="Image 3" descr="preencoded.png"/>
+          <p:cNvPicPr>
+            <a:picLocks noChangeAspect="1"/>
+          </p:cNvPicPr>
+          <p:nvPr/>
+        </p:nvPicPr>
+        <p:blipFill>
+          <a:blip r:embed="rId6"/>
+          <a:stretch>
+            <a:fillRect/>
+          </a:stretch>
+        </p:blipFill>
+        <p:spPr>
+          <a:xfrm>
+            <a:off x="8302752" y="3182112"/>
+            <a:ext cx="402336" cy="402336"/>
+          </a:xfrm>
+          <a:prstGeom prst="rect">
+            <a:avLst/>
+          </a:prstGeom>
+        </p:spPr>
+      </p:pic>
+      <p:sp>
+        <p:nvSpPr>
+          <p:cNvPr id="17" name="Text 11"/>
+          <p:cNvSpPr/>
+          <p:nvPr/>
+        </p:nvSpPr>
+        <p:spPr>
+          <a:xfrm>
+            <a:off x="9052560" y="3017520"/>
+            <a:ext cx="2468880" cy="731520"/>
+          </a:xfrm>
+          <a:prstGeom prst="rect">
+            <a:avLst/>
+          </a:prstGeom>
+          <a:noFill/>
+          <a:ln/>
+        </p:spPr>
+        <p:txBody>
+          <a:bodyPr wrap="square" rtlCol="0" anchor="ctr"/>
+          <a:lstStyle/>
+          <a:p>
+            <a:pPr marL="0" indent="0">
+              <a:buNone/>
+            </a:pPr>
+            <a:r>
+              <a:rPr lang="en-US" sz="2000" b="1" dirty="0">
+                <a:solidFill>
+                  <a:srgbClr val="1B1F23"/>
+                </a:solidFill>
+                <a:latin typeface="Calibri" pitchFamily="34" charset="0"/>
+                <a:ea typeface="Calibri" pitchFamily="34" charset="-122"/>
+                <a:cs typeface="Calibri" pitchFamily="34" charset="-120"/>
+              </a:rPr>
               <a:t>Explain</a:t>
             </a:r>
             <a:endParaRPr lang="en-US" sz="2000" dirty="0"/>
@@ -5035,7 +4710,7 @@
           <a:bodyPr wrap="square" rtlCol="0" anchor="ctr"/>
           <a:lstStyle/>
           <a:p>
-            <a:pPr algn="l" indent="0" marL="0">
+            <a:pPr marL="0" indent="0" algn="l">
               <a:buNone/>
             </a:pPr>
             <a:r>
@@ -5069,6 +4744,7 @@
         <a:solidFill>
           <a:srgbClr val="FFFFFF"/>
         </a:solidFill>
+        <a:effectLst/>
       </p:bgPr>
     </p:bg>
     <p:spTree>
@@ -5107,287 +4783,7 @@
       </p:sp>
       <p:pic>
         <p:nvPicPr>
-          <p:cNvPr id="3" name="Image 0" descr="preencoded.png">    </p:cNvPr>
-          <p:cNvPicPr>
-            <a:picLocks noChangeAspect="1"/>
-          </p:cNvPicPr>
-          <p:nvPr/>
-        </p:nvPicPr>
-        <p:blipFill>
-          <a:blip r:embed="rId1"/>
-          <a:stretch>
-            <a:fillRect/>
-          </a:stretch>
-        </p:blipFill>
-        <p:spPr>
-          <a:xfrm>
-            <a:off x="875538" y="601218"/>
-            <a:ext cx="352044" cy="352044"/>
-          </a:xfrm>
-          <a:prstGeom prst="rect">
-            <a:avLst/>
-          </a:prstGeom>
-        </p:spPr>
-      </p:pic>
-      <p:sp>
-        <p:nvSpPr>
-          <p:cNvPr id="4" name="Text 1"/>
-          <p:cNvSpPr/>
-          <p:nvPr/>
-        </p:nvSpPr>
-        <p:spPr>
-          <a:xfrm>
-            <a:off x="1554480" y="457200"/>
-            <a:ext cx="7315200" cy="640080"/>
-          </a:xfrm>
-          <a:prstGeom prst="rect">
-            <a:avLst/>
-          </a:prstGeom>
-          <a:noFill/>
-          <a:ln/>
-        </p:spPr>
-        <p:txBody>
-          <a:bodyPr wrap="square" rtlCol="0" anchor="ctr"/>
-          <a:lstStyle/>
-          <a:p>
-            <a:pPr indent="0" marL="0">
-              <a:buNone/>
-            </a:pPr>
-            <a:r>
-              <a:rPr lang="en-US" sz="3000" b="1" dirty="0">
-                <a:solidFill>
-                  <a:srgbClr val="1B1F23"/>
-                </a:solidFill>
-                <a:latin typeface="Cambria" pitchFamily="34" charset="0"/>
-                <a:ea typeface="Cambria" pitchFamily="34" charset="-122"/>
-                <a:cs typeface="Cambria" pitchFamily="34" charset="-120"/>
-              </a:rPr>
-              <a:t>How It Works</a:t>
-            </a:r>
-            <a:endParaRPr lang="en-US" sz="3000" dirty="0"/>
-          </a:p>
-        </p:txBody>
-      </p:sp>
-      <p:sp>
-        <p:nvSpPr>
-          <p:cNvPr id="5" name="Shape 2"/>
-          <p:cNvSpPr/>
-          <p:nvPr/>
-        </p:nvSpPr>
-        <p:spPr>
-          <a:xfrm>
-            <a:off x="822960" y="1417320"/>
-            <a:ext cx="3200400" cy="1188720"/>
-          </a:xfrm>
-          <a:prstGeom prst="roundRect">
-            <a:avLst>
-              <a:gd name="adj" fmla="val 6154"/>
-            </a:avLst>
-          </a:prstGeom>
-          <a:solidFill>
-            <a:srgbClr val="F7F7F8"/>
-          </a:solidFill>
-          <a:ln/>
-          <a:effectLst>
-            <a:outerShdw sx="100000" sy="100000" kx="0" ky="0" algn="bl" rotWithShape="0" blurRad="101600" dist="38100" dir="2700000">
-              <a:srgbClr val="000000">
-                <a:alpha val="12000"/>
-              </a:srgbClr>
-            </a:outerShdw>
-          </a:effectLst>
-        </p:spPr>
-      </p:sp>
-      <p:sp>
-        <p:nvSpPr>
-          <p:cNvPr id="6" name="Shape 3"/>
-          <p:cNvSpPr/>
-          <p:nvPr/>
-        </p:nvSpPr>
-        <p:spPr>
-          <a:xfrm>
-            <a:off x="1005840" y="1645920"/>
-            <a:ext cx="731520" cy="731520"/>
-          </a:xfrm>
-          <a:prstGeom prst="ellipse">
-            <a:avLst/>
-          </a:prstGeom>
-          <a:solidFill>
-            <a:srgbClr val="E8F0FE"/>
-          </a:solidFill>
-          <a:ln/>
-        </p:spPr>
-      </p:sp>
-      <p:pic>
-        <p:nvPicPr>
-          <p:cNvPr id="7" name="Image 1" descr="preencoded.png">    </p:cNvPr>
-          <p:cNvPicPr>
-            <a:picLocks noChangeAspect="1"/>
-          </p:cNvPicPr>
-          <p:nvPr/>
-        </p:nvPicPr>
-        <p:blipFill>
-          <a:blip r:embed="rId2"/>
-          <a:stretch>
-            <a:fillRect/>
-          </a:stretch>
-        </p:blipFill>
-        <p:spPr>
-          <a:xfrm>
-            <a:off x="1170432" y="1810512"/>
-            <a:ext cx="402336" cy="402336"/>
-          </a:xfrm>
-          <a:prstGeom prst="rect">
-            <a:avLst/>
-          </a:prstGeom>
-        </p:spPr>
-      </p:pic>
-      <p:sp>
-        <p:nvSpPr>
-          <p:cNvPr id="8" name="Text 4"/>
-          <p:cNvSpPr/>
-          <p:nvPr/>
-        </p:nvSpPr>
-        <p:spPr>
-          <a:xfrm>
-            <a:off x="1874520" y="1527048"/>
-            <a:ext cx="2011680" cy="457200"/>
-          </a:xfrm>
-          <a:prstGeom prst="rect">
-            <a:avLst/>
-          </a:prstGeom>
-          <a:noFill/>
-          <a:ln/>
-        </p:spPr>
-        <p:txBody>
-          <a:bodyPr wrap="square" rtlCol="0" anchor="ctr"/>
-          <a:lstStyle/>
-          <a:p>
-            <a:pPr indent="0" marL="0">
-              <a:buNone/>
-            </a:pPr>
-            <a:r>
-              <a:rPr lang="en-US" sz="1350" b="1" dirty="0">
-                <a:solidFill>
-                  <a:srgbClr val="1B1F23"/>
-                </a:solidFill>
-                <a:latin typeface="Calibri" pitchFamily="34" charset="0"/>
-                <a:ea typeface="Calibri" pitchFamily="34" charset="-122"/>
-                <a:cs typeface="Calibri" pitchFamily="34" charset="-120"/>
-              </a:rPr>
-              <a:t>Citizen Photos</a:t>
-            </a:r>
-            <a:endParaRPr lang="en-US" sz="1350" dirty="0"/>
-          </a:p>
-        </p:txBody>
-      </p:sp>
-      <p:sp>
-        <p:nvSpPr>
-          <p:cNvPr id="9" name="Text 5"/>
-          <p:cNvSpPr/>
-          <p:nvPr/>
-        </p:nvSpPr>
-        <p:spPr>
-          <a:xfrm>
-            <a:off x="1874520" y="1965960"/>
-            <a:ext cx="2011680" cy="548640"/>
-          </a:xfrm>
-          <a:prstGeom prst="rect">
-            <a:avLst/>
-          </a:prstGeom>
-          <a:noFill/>
-          <a:ln/>
-        </p:spPr>
-        <p:txBody>
-          <a:bodyPr wrap="square" rtlCol="0" anchor="t"/>
-          <a:lstStyle/>
-          <a:p>
-            <a:pPr indent="0" marL="0">
-              <a:buNone/>
-            </a:pPr>
-            <a:r>
-              <a:rPr lang="en-US" sz="1050" dirty="0">
-                <a:solidFill>
-                  <a:srgbClr val="667085"/>
-                </a:solidFill>
-                <a:latin typeface="Calibri" pitchFamily="34" charset="0"/>
-                <a:ea typeface="Calibri" pitchFamily="34" charset="-122"/>
-                <a:cs typeface="Calibri" pitchFamily="34" charset="-120"/>
-              </a:rPr>
-              <a:t>Gemini Vision classifies</a:t>
-            </a:r>
-            <a:endParaRPr lang="en-US" sz="1050" dirty="0"/>
-          </a:p>
-          <a:p>
-            <a:pPr indent="0" marL="0">
-              <a:buNone/>
-            </a:pPr>
-            <a:r>
-              <a:rPr lang="en-US" sz="1050" dirty="0">
-                <a:solidFill>
-                  <a:srgbClr val="667085"/>
-                </a:solidFill>
-                <a:latin typeface="Calibri" pitchFamily="34" charset="0"/>
-                <a:ea typeface="Calibri" pitchFamily="34" charset="-122"/>
-                <a:cs typeface="Calibri" pitchFamily="34" charset="-120"/>
-              </a:rPr>
-              <a:t>smoke / dust / haze</a:t>
-            </a:r>
-            <a:endParaRPr lang="en-US" sz="1050" dirty="0"/>
-          </a:p>
-        </p:txBody>
-      </p:sp>
-      <p:sp>
-        <p:nvSpPr>
-          <p:cNvPr id="10" name="Shape 6"/>
-          <p:cNvSpPr/>
-          <p:nvPr/>
-        </p:nvSpPr>
-        <p:spPr>
-          <a:xfrm>
-            <a:off x="4526280" y="1417320"/>
-            <a:ext cx="3200400" cy="1188720"/>
-          </a:xfrm>
-          <a:prstGeom prst="roundRect">
-            <a:avLst>
-              <a:gd name="adj" fmla="val 6154"/>
-            </a:avLst>
-          </a:prstGeom>
-          <a:solidFill>
-            <a:srgbClr val="F7F7F8"/>
-          </a:solidFill>
-          <a:ln/>
-          <a:effectLst>
-            <a:outerShdw sx="100000" sy="100000" kx="0" ky="0" algn="bl" rotWithShape="0" blurRad="101600" dist="38100" dir="2700000">
-              <a:srgbClr val="000000">
-                <a:alpha val="12000"/>
-              </a:srgbClr>
-            </a:outerShdw>
-          </a:effectLst>
-        </p:spPr>
-      </p:sp>
-      <p:sp>
-        <p:nvSpPr>
-          <p:cNvPr id="11" name="Shape 7"/>
-          <p:cNvSpPr/>
-          <p:nvPr/>
-        </p:nvSpPr>
-        <p:spPr>
-          <a:xfrm>
-            <a:off x="4709160" y="1645920"/>
-            <a:ext cx="731520" cy="731520"/>
-          </a:xfrm>
-          <a:prstGeom prst="ellipse">
-            <a:avLst/>
-          </a:prstGeom>
-          <a:solidFill>
-            <a:srgbClr val="E8F0FE"/>
-          </a:solidFill>
-          <a:ln/>
-        </p:spPr>
-      </p:sp>
-      <p:pic>
-        <p:nvPicPr>
-          <p:cNvPr id="12" name="Image 2" descr="preencoded.png">    </p:cNvPr>
+          <p:cNvPr id="3" name="Image 0" descr="preencoded.png"/>
           <p:cNvPicPr>
             <a:picLocks noChangeAspect="1"/>
           </p:cNvPicPr>
@@ -5401,8 +4797,8 @@
         </p:blipFill>
         <p:spPr>
           <a:xfrm>
-            <a:off x="4873752" y="1810512"/>
-            <a:ext cx="402336" cy="402336"/>
+            <a:off x="875538" y="601218"/>
+            <a:ext cx="352044" cy="352044"/>
           </a:xfrm>
           <a:prstGeom prst="rect">
             <a:avLst/>
@@ -5411,14 +4807,14 @@
       </p:pic>
       <p:sp>
         <p:nvSpPr>
-          <p:cNvPr id="13" name="Text 8"/>
-          <p:cNvSpPr/>
-          <p:nvPr/>
-        </p:nvSpPr>
-        <p:spPr>
-          <a:xfrm>
-            <a:off x="5577840" y="1527048"/>
-            <a:ext cx="2011680" cy="457200"/>
+          <p:cNvPr id="4" name="Text 1"/>
+          <p:cNvSpPr/>
+          <p:nvPr/>
+        </p:nvSpPr>
+        <p:spPr>
+          <a:xfrm>
+            <a:off x="1554480" y="457200"/>
+            <a:ext cx="7315200" cy="640080"/>
           </a:xfrm>
           <a:prstGeom prst="rect">
             <a:avLst/>
@@ -5430,89 +4826,33 @@
           <a:bodyPr wrap="square" rtlCol="0" anchor="ctr"/>
           <a:lstStyle/>
           <a:p>
-            <a:pPr indent="0" marL="0">
-              <a:buNone/>
-            </a:pPr>
-            <a:r>
-              <a:rPr lang="en-US" sz="1350" b="1" dirty="0">
+            <a:pPr marL="0" indent="0">
+              <a:buNone/>
+            </a:pPr>
+            <a:r>
+              <a:rPr lang="en-US" sz="3000" b="1" dirty="0">
                 <a:solidFill>
                   <a:srgbClr val="1B1F23"/>
                 </a:solidFill>
-                <a:latin typeface="Calibri" pitchFamily="34" charset="0"/>
-                <a:ea typeface="Calibri" pitchFamily="34" charset="-122"/>
-                <a:cs typeface="Calibri" pitchFamily="34" charset="-120"/>
-              </a:rPr>
-              <a:t>CPCB Ground Sensors</a:t>
-            </a:r>
-            <a:endParaRPr lang="en-US" sz="1350" dirty="0"/>
-          </a:p>
-        </p:txBody>
-      </p:sp>
-      <p:sp>
-        <p:nvSpPr>
-          <p:cNvPr id="14" name="Text 9"/>
-          <p:cNvSpPr/>
-          <p:nvPr/>
-        </p:nvSpPr>
-        <p:spPr>
-          <a:xfrm>
-            <a:off x="5577840" y="1965960"/>
-            <a:ext cx="2011680" cy="548640"/>
-          </a:xfrm>
-          <a:prstGeom prst="rect">
-            <a:avLst/>
-          </a:prstGeom>
-          <a:noFill/>
-          <a:ln/>
-        </p:spPr>
-        <p:txBody>
-          <a:bodyPr wrap="square" rtlCol="0" anchor="t"/>
-          <a:lstStyle/>
-          <a:p>
-            <a:pPr indent="0" marL="0">
-              <a:buNone/>
-            </a:pPr>
-            <a:r>
-              <a:rPr lang="en-US" sz="1050" dirty="0">
-                <a:solidFill>
-                  <a:srgbClr val="667085"/>
-                </a:solidFill>
-                <a:latin typeface="Calibri" pitchFamily="34" charset="0"/>
-                <a:ea typeface="Calibri" pitchFamily="34" charset="-122"/>
-                <a:cs typeface="Calibri" pitchFamily="34" charset="-120"/>
-              </a:rPr>
-              <a:t>Real PM2.5 / PM10</a:t>
-            </a:r>
-            <a:endParaRPr lang="en-US" sz="1050" dirty="0"/>
-          </a:p>
-          <a:p>
-            <a:pPr indent="0" marL="0">
-              <a:buNone/>
-            </a:pPr>
-            <a:r>
-              <a:rPr lang="en-US" sz="1050" dirty="0">
-                <a:solidFill>
-                  <a:srgbClr val="667085"/>
-                </a:solidFill>
-                <a:latin typeface="Calibri" pitchFamily="34" charset="0"/>
-                <a:ea typeface="Calibri" pitchFamily="34" charset="-122"/>
-                <a:cs typeface="Calibri" pitchFamily="34" charset="-120"/>
-              </a:rPr>
-              <a:t>station readings</a:t>
-            </a:r>
-            <a:endParaRPr lang="en-US" sz="1050" dirty="0"/>
-          </a:p>
-        </p:txBody>
-      </p:sp>
-      <p:sp>
-        <p:nvSpPr>
-          <p:cNvPr id="15" name="Shape 10"/>
-          <p:cNvSpPr/>
-          <p:nvPr/>
-        </p:nvSpPr>
-        <p:spPr>
-          <a:xfrm>
-            <a:off x="8229600" y="1417320"/>
+                <a:latin typeface="Cambria" pitchFamily="34" charset="0"/>
+                <a:ea typeface="Cambria" pitchFamily="34" charset="-122"/>
+                <a:cs typeface="Cambria" pitchFamily="34" charset="-120"/>
+              </a:rPr>
+              <a:t>How It Works</a:t>
+            </a:r>
+            <a:endParaRPr lang="en-US" sz="3000" dirty="0"/>
+          </a:p>
+        </p:txBody>
+      </p:sp>
+      <p:sp>
+        <p:nvSpPr>
+          <p:cNvPr id="5" name="Shape 2"/>
+          <p:cNvSpPr/>
+          <p:nvPr/>
+        </p:nvSpPr>
+        <p:spPr>
+          <a:xfrm>
+            <a:off x="822960" y="1417320"/>
             <a:ext cx="3200400" cy="1188720"/>
           </a:xfrm>
           <a:prstGeom prst="roundRect">
@@ -5525,7 +4865,7 @@
           </a:solidFill>
           <a:ln/>
           <a:effectLst>
-            <a:outerShdw sx="100000" sy="100000" kx="0" ky="0" algn="bl" rotWithShape="0" blurRad="101600" dist="38100" dir="2700000">
+            <a:outerShdw blurRad="101600" dist="38100" dir="2700000" algn="bl" rotWithShape="0">
               <a:srgbClr val="000000">
                 <a:alpha val="12000"/>
               </a:srgbClr>
@@ -5535,13 +4875,13 @@
       </p:sp>
       <p:sp>
         <p:nvSpPr>
-          <p:cNvPr id="16" name="Shape 11"/>
-          <p:cNvSpPr/>
-          <p:nvPr/>
-        </p:nvSpPr>
-        <p:spPr>
-          <a:xfrm>
-            <a:off x="8412480" y="1645920"/>
+          <p:cNvPr id="6" name="Shape 3"/>
+          <p:cNvSpPr/>
+          <p:nvPr/>
+        </p:nvSpPr>
+        <p:spPr>
+          <a:xfrm>
+            <a:off x="1005840" y="1645920"/>
             <a:ext cx="731520" cy="731520"/>
           </a:xfrm>
           <a:prstGeom prst="ellipse">
@@ -5555,7 +4895,7 @@
       </p:sp>
       <p:pic>
         <p:nvPicPr>
-          <p:cNvPr id="17" name="Image 3" descr="preencoded.png">    </p:cNvPr>
+          <p:cNvPr id="7" name="Image 1" descr="preencoded.png"/>
           <p:cNvPicPr>
             <a:picLocks noChangeAspect="1"/>
           </p:cNvPicPr>
@@ -5569,7 +4909,7 @@
         </p:blipFill>
         <p:spPr>
           <a:xfrm>
-            <a:off x="8577072" y="1810512"/>
+            <a:off x="1170432" y="1810512"/>
             <a:ext cx="402336" cy="402336"/>
           </a:xfrm>
           <a:prstGeom prst="rect">
@@ -5579,13 +4919,13 @@
       </p:pic>
       <p:sp>
         <p:nvSpPr>
-          <p:cNvPr id="18" name="Text 12"/>
-          <p:cNvSpPr/>
-          <p:nvPr/>
-        </p:nvSpPr>
-        <p:spPr>
-          <a:xfrm>
-            <a:off x="9281160" y="1527048"/>
+          <p:cNvPr id="8" name="Text 4"/>
+          <p:cNvSpPr/>
+          <p:nvPr/>
+        </p:nvSpPr>
+        <p:spPr>
+          <a:xfrm>
+            <a:off x="1874520" y="1527048"/>
             <a:ext cx="2011680" cy="457200"/>
           </a:xfrm>
           <a:prstGeom prst="rect">
@@ -5598,7 +4938,7 @@
           <a:bodyPr wrap="square" rtlCol="0" anchor="ctr"/>
           <a:lstStyle/>
           <a:p>
-            <a:pPr indent="0" marL="0">
+            <a:pPr marL="0" indent="0">
               <a:buNone/>
             </a:pPr>
             <a:r>
@@ -5610,7 +4950,7 @@
                 <a:ea typeface="Calibri" pitchFamily="34" charset="-122"/>
                 <a:cs typeface="Calibri" pitchFamily="34" charset="-120"/>
               </a:rPr>
-              <a:t>NASA FIRMS Satellite</a:t>
+              <a:t>Citizen Photos</a:t>
             </a:r>
             <a:endParaRPr lang="en-US" sz="1350" dirty="0"/>
           </a:p>
@@ -5618,13 +4958,13 @@
       </p:sp>
       <p:sp>
         <p:nvSpPr>
-          <p:cNvPr id="19" name="Text 13"/>
-          <p:cNvSpPr/>
-          <p:nvPr/>
-        </p:nvSpPr>
-        <p:spPr>
-          <a:xfrm>
-            <a:off x="9281160" y="1965960"/>
+          <p:cNvPr id="9" name="Text 5"/>
+          <p:cNvSpPr/>
+          <p:nvPr/>
+        </p:nvSpPr>
+        <p:spPr>
+          <a:xfrm>
+            <a:off x="1874520" y="1965960"/>
             <a:ext cx="2011680" cy="548640"/>
           </a:xfrm>
           <a:prstGeom prst="rect">
@@ -5637,7 +4977,7 @@
           <a:bodyPr wrap="square" rtlCol="0" anchor="t"/>
           <a:lstStyle/>
           <a:p>
-            <a:pPr indent="0" marL="0">
+            <a:pPr marL="0" indent="0">
               <a:buNone/>
             </a:pPr>
             <a:r>
@@ -5649,12 +4989,12 @@
                 <a:ea typeface="Calibri" pitchFamily="34" charset="-122"/>
                 <a:cs typeface="Calibri" pitchFamily="34" charset="-120"/>
               </a:rPr>
-              <a:t>Active fire / smoke</a:t>
+              <a:t>Gemini Vision classifies</a:t>
             </a:r>
             <a:endParaRPr lang="en-US" sz="1050" dirty="0"/>
           </a:p>
           <a:p>
-            <a:pPr indent="0" marL="0">
+            <a:pPr marL="0" indent="0">
               <a:buNone/>
             </a:pPr>
             <a:r>
@@ -5666,7 +5006,7 @@
                 <a:ea typeface="Calibri" pitchFamily="34" charset="-122"/>
                 <a:cs typeface="Calibri" pitchFamily="34" charset="-120"/>
               </a:rPr>
-              <a:t>detections</a:t>
+              <a:t>smoke / dust / haze</a:t>
             </a:r>
             <a:endParaRPr lang="en-US" sz="1050" dirty="0"/>
           </a:p>
@@ -5674,86 +5014,26 @@
       </p:sp>
       <p:sp>
         <p:nvSpPr>
-          <p:cNvPr id="20" name="Shape 14"/>
-          <p:cNvSpPr/>
-          <p:nvPr/>
-        </p:nvSpPr>
-        <p:spPr>
-          <a:xfrm>
-            <a:off x="2368296" y="2651760"/>
-            <a:ext cx="109728" cy="320040"/>
-          </a:xfrm>
-          <a:prstGeom prst="downArrow">
-            <a:avLst/>
-          </a:prstGeom>
-          <a:solidFill>
-            <a:srgbClr val="667085"/>
-          </a:solidFill>
-          <a:ln/>
-        </p:spPr>
-      </p:sp>
-      <p:sp>
-        <p:nvSpPr>
-          <p:cNvPr id="21" name="Shape 15"/>
-          <p:cNvSpPr/>
-          <p:nvPr/>
-        </p:nvSpPr>
-        <p:spPr>
-          <a:xfrm>
-            <a:off x="6071616" y="2651760"/>
-            <a:ext cx="109728" cy="320040"/>
-          </a:xfrm>
-          <a:prstGeom prst="downArrow">
-            <a:avLst/>
-          </a:prstGeom>
-          <a:solidFill>
-            <a:srgbClr val="667085"/>
-          </a:solidFill>
-          <a:ln/>
-        </p:spPr>
-      </p:sp>
-      <p:sp>
-        <p:nvSpPr>
-          <p:cNvPr id="22" name="Shape 16"/>
-          <p:cNvSpPr/>
-          <p:nvPr/>
-        </p:nvSpPr>
-        <p:spPr>
-          <a:xfrm>
-            <a:off x="9774936" y="2651760"/>
-            <a:ext cx="109728" cy="320040"/>
-          </a:xfrm>
-          <a:prstGeom prst="downArrow">
-            <a:avLst/>
-          </a:prstGeom>
-          <a:solidFill>
-            <a:srgbClr val="667085"/>
-          </a:solidFill>
-          <a:ln/>
-        </p:spPr>
-      </p:sp>
-      <p:sp>
-        <p:nvSpPr>
-          <p:cNvPr id="23" name="Shape 17"/>
-          <p:cNvSpPr/>
-          <p:nvPr/>
-        </p:nvSpPr>
-        <p:spPr>
-          <a:xfrm>
-            <a:off x="822960" y="3063240"/>
-            <a:ext cx="10515600" cy="960120"/>
+          <p:cNvPr id="10" name="Shape 6"/>
+          <p:cNvSpPr/>
+          <p:nvPr/>
+        </p:nvSpPr>
+        <p:spPr>
+          <a:xfrm>
+            <a:off x="4526280" y="1417320"/>
+            <a:ext cx="3200400" cy="1188720"/>
           </a:xfrm>
           <a:prstGeom prst="roundRect">
             <a:avLst>
-              <a:gd name="adj" fmla="val 7619"/>
+              <a:gd name="adj" fmla="val 6154"/>
             </a:avLst>
           </a:prstGeom>
           <a:solidFill>
-            <a:srgbClr val="1B1F23"/>
+            <a:srgbClr val="F7F7F8"/>
           </a:solidFill>
           <a:ln/>
           <a:effectLst>
-            <a:outerShdw sx="100000" sy="100000" kx="0" ky="0" algn="bl" rotWithShape="0" blurRad="101600" dist="38100" dir="2700000">
+            <a:outerShdw blurRad="101600" dist="38100" dir="2700000" algn="bl" rotWithShape="0">
               <a:srgbClr val="000000">
                 <a:alpha val="12000"/>
               </a:srgbClr>
@@ -5763,27 +5043,27 @@
       </p:sp>
       <p:sp>
         <p:nvSpPr>
-          <p:cNvPr id="24" name="Shape 18"/>
-          <p:cNvSpPr/>
-          <p:nvPr/>
-        </p:nvSpPr>
-        <p:spPr>
-          <a:xfrm>
-            <a:off x="1051560" y="3246120"/>
-            <a:ext cx="594360" cy="594360"/>
+          <p:cNvPr id="11" name="Shape 7"/>
+          <p:cNvSpPr/>
+          <p:nvPr/>
+        </p:nvSpPr>
+        <p:spPr>
+          <a:xfrm>
+            <a:off x="4709160" y="1645920"/>
+            <a:ext cx="731520" cy="731520"/>
           </a:xfrm>
           <a:prstGeom prst="ellipse">
             <a:avLst/>
           </a:prstGeom>
           <a:solidFill>
-            <a:srgbClr val="1A73E8"/>
+            <a:srgbClr val="E8F0FE"/>
           </a:solidFill>
           <a:ln/>
         </p:spPr>
       </p:sp>
       <p:pic>
         <p:nvPicPr>
-          <p:cNvPr id="25" name="Image 4" descr="preencoded.png">    </p:cNvPr>
+          <p:cNvPr id="12" name="Image 2" descr="preencoded.png"/>
           <p:cNvPicPr>
             <a:picLocks noChangeAspect="1"/>
           </p:cNvPicPr>
@@ -5797,8 +5077,8 @@
         </p:blipFill>
         <p:spPr>
           <a:xfrm>
-            <a:off x="1185291" y="3379851"/>
-            <a:ext cx="326898" cy="326898"/>
+            <a:off x="4873752" y="1810512"/>
+            <a:ext cx="402336" cy="402336"/>
           </a:xfrm>
           <a:prstGeom prst="rect">
             <a:avLst/>
@@ -5807,14 +5087,14 @@
       </p:pic>
       <p:sp>
         <p:nvSpPr>
-          <p:cNvPr id="26" name="Text 19"/>
-          <p:cNvSpPr/>
-          <p:nvPr/>
-        </p:nvSpPr>
-        <p:spPr>
-          <a:xfrm>
-            <a:off x="1828800" y="3136392"/>
-            <a:ext cx="3657600" cy="457200"/>
+          <p:cNvPr id="13" name="Text 8"/>
+          <p:cNvSpPr/>
+          <p:nvPr/>
+        </p:nvSpPr>
+        <p:spPr>
+          <a:xfrm>
+            <a:off x="5577840" y="1527048"/>
+            <a:ext cx="2011680" cy="457200"/>
           </a:xfrm>
           <a:prstGeom prst="rect">
             <a:avLst/>
@@ -5826,97 +5106,94 @@
           <a:bodyPr wrap="square" rtlCol="0" anchor="ctr"/>
           <a:lstStyle/>
           <a:p>
-            <a:pPr indent="0" marL="0">
-              <a:buNone/>
-            </a:pPr>
-            <a:r>
-              <a:rPr lang="en-US" sz="1500" b="1" dirty="0">
-                <a:solidFill>
-                  <a:srgbClr val="FFFFFF"/>
+            <a:pPr marL="0" indent="0">
+              <a:buNone/>
+            </a:pPr>
+            <a:r>
+              <a:rPr lang="en-US" sz="1350" b="1" dirty="0">
+                <a:solidFill>
+                  <a:srgbClr val="1B1F23"/>
                 </a:solidFill>
                 <a:latin typeface="Calibri" pitchFamily="34" charset="0"/>
                 <a:ea typeface="Calibri" pitchFamily="34" charset="-122"/>
                 <a:cs typeface="Calibri" pitchFamily="34" charset="-120"/>
               </a:rPr>
-              <a:t>Hotspot Fusion Engine</a:t>
-            </a:r>
-            <a:endParaRPr lang="en-US" sz="1500" dirty="0"/>
-          </a:p>
-        </p:txBody>
-      </p:sp>
-      <p:sp>
-        <p:nvSpPr>
-          <p:cNvPr id="27" name="Text 20"/>
-          <p:cNvSpPr/>
-          <p:nvPr/>
-        </p:nvSpPr>
-        <p:spPr>
-          <a:xfrm>
-            <a:off x="1828800" y="3566160"/>
-            <a:ext cx="8412480" cy="365760"/>
-          </a:xfrm>
-          <a:prstGeom prst="rect">
-            <a:avLst/>
-          </a:prstGeom>
-          <a:noFill/>
-          <a:ln/>
-        </p:spPr>
-        <p:txBody>
-          <a:bodyPr wrap="square" rtlCol="0" anchor="ctr"/>
-          <a:lstStyle/>
-          <a:p>
-            <a:pPr indent="0" marL="0">
-              <a:buNone/>
-            </a:pPr>
-            <a:r>
-              <a:rPr lang="en-US" sz="1100" dirty="0">
-                <a:solidFill>
-                  <a:srgbClr val="9FD3F5"/>
+              <a:t>CPCB Ground Sensors</a:t>
+            </a:r>
+            <a:endParaRPr lang="en-US" sz="1350" dirty="0"/>
+          </a:p>
+        </p:txBody>
+      </p:sp>
+      <p:sp>
+        <p:nvSpPr>
+          <p:cNvPr id="14" name="Text 9"/>
+          <p:cNvSpPr/>
+          <p:nvPr/>
+        </p:nvSpPr>
+        <p:spPr>
+          <a:xfrm>
+            <a:off x="5577840" y="1965960"/>
+            <a:ext cx="2011680" cy="548640"/>
+          </a:xfrm>
+          <a:prstGeom prst="rect">
+            <a:avLst/>
+          </a:prstGeom>
+          <a:noFill/>
+          <a:ln/>
+        </p:spPr>
+        <p:txBody>
+          <a:bodyPr wrap="square" rtlCol="0" anchor="t"/>
+          <a:lstStyle/>
+          <a:p>
+            <a:pPr marL="0" indent="0">
+              <a:buNone/>
+            </a:pPr>
+            <a:r>
+              <a:rPr lang="en-US" sz="1050" dirty="0">
+                <a:solidFill>
+                  <a:srgbClr val="667085"/>
                 </a:solidFill>
                 <a:latin typeface="Calibri" pitchFamily="34" charset="0"/>
                 <a:ea typeface="Calibri" pitchFamily="34" charset="-122"/>
                 <a:cs typeface="Calibri" pitchFamily="34" charset="-120"/>
               </a:rPr>
-              <a:t>50% ground AQI + 30% satellite fire data + 20% citizen photo severity = one 0-1 score / zone</a:t>
-            </a:r>
-            <a:endParaRPr lang="en-US" sz="1100" dirty="0"/>
-          </a:p>
-        </p:txBody>
-      </p:sp>
-      <p:sp>
-        <p:nvSpPr>
-          <p:cNvPr id="28" name="Shape 21"/>
-          <p:cNvSpPr/>
-          <p:nvPr/>
-        </p:nvSpPr>
-        <p:spPr>
-          <a:xfrm>
-            <a:off x="6035040" y="4069080"/>
-            <a:ext cx="109728" cy="274320"/>
-          </a:xfrm>
-          <a:prstGeom prst="downArrow">
-            <a:avLst/>
-          </a:prstGeom>
-          <a:solidFill>
-            <a:srgbClr val="667085"/>
-          </a:solidFill>
-          <a:ln/>
-        </p:spPr>
-      </p:sp>
-      <p:sp>
-        <p:nvSpPr>
-          <p:cNvPr id="29" name="Shape 22"/>
-          <p:cNvSpPr/>
-          <p:nvPr/>
-        </p:nvSpPr>
-        <p:spPr>
-          <a:xfrm>
-            <a:off x="1645920" y="4434840"/>
-            <a:ext cx="4206240" cy="1005840"/>
+              <a:t>Real PM2.5 / PM10</a:t>
+            </a:r>
+            <a:endParaRPr lang="en-US" sz="1050" dirty="0"/>
+          </a:p>
+          <a:p>
+            <a:pPr marL="0" indent="0">
+              <a:buNone/>
+            </a:pPr>
+            <a:r>
+              <a:rPr lang="en-US" sz="1050" dirty="0">
+                <a:solidFill>
+                  <a:srgbClr val="667085"/>
+                </a:solidFill>
+                <a:latin typeface="Calibri" pitchFamily="34" charset="0"/>
+                <a:ea typeface="Calibri" pitchFamily="34" charset="-122"/>
+                <a:cs typeface="Calibri" pitchFamily="34" charset="-120"/>
+              </a:rPr>
+              <a:t>station readings</a:t>
+            </a:r>
+            <a:endParaRPr lang="en-US" sz="1050" dirty="0"/>
+          </a:p>
+        </p:txBody>
+      </p:sp>
+      <p:sp>
+        <p:nvSpPr>
+          <p:cNvPr id="15" name="Shape 10"/>
+          <p:cNvSpPr/>
+          <p:nvPr/>
+        </p:nvSpPr>
+        <p:spPr>
+          <a:xfrm>
+            <a:off x="8229600" y="1417320"/>
+            <a:ext cx="3200400" cy="1188720"/>
           </a:xfrm>
           <a:prstGeom prst="roundRect">
             <a:avLst>
-              <a:gd name="adj" fmla="val 7273"/>
+              <a:gd name="adj" fmla="val 6154"/>
             </a:avLst>
           </a:prstGeom>
           <a:solidFill>
@@ -5924,7 +5201,7 @@
           </a:solidFill>
           <a:ln/>
           <a:effectLst>
-            <a:outerShdw sx="100000" sy="100000" kx="0" ky="0" algn="bl" rotWithShape="0" blurRad="101600" dist="38100" dir="2700000">
+            <a:outerShdw blurRad="101600" dist="38100" dir="2700000" algn="bl" rotWithShape="0">
               <a:srgbClr val="000000">
                 <a:alpha val="12000"/>
               </a:srgbClr>
@@ -5934,27 +5211,27 @@
       </p:sp>
       <p:sp>
         <p:nvSpPr>
-          <p:cNvPr id="30" name="Shape 23"/>
-          <p:cNvSpPr/>
-          <p:nvPr/>
-        </p:nvSpPr>
-        <p:spPr>
-          <a:xfrm>
-            <a:off x="1828800" y="4636008"/>
-            <a:ext cx="594360" cy="594360"/>
+          <p:cNvPr id="16" name="Shape 11"/>
+          <p:cNvSpPr/>
+          <p:nvPr/>
+        </p:nvSpPr>
+        <p:spPr>
+          <a:xfrm>
+            <a:off x="8412480" y="1645920"/>
+            <a:ext cx="731520" cy="731520"/>
           </a:xfrm>
           <a:prstGeom prst="ellipse">
             <a:avLst/>
           </a:prstGeom>
           <a:solidFill>
-            <a:srgbClr val="FDEDD3"/>
+            <a:srgbClr val="E8F0FE"/>
           </a:solidFill>
           <a:ln/>
         </p:spPr>
       </p:sp>
       <p:pic>
         <p:nvPicPr>
-          <p:cNvPr id="31" name="Image 5" descr="preencoded.png">    </p:cNvPr>
+          <p:cNvPr id="17" name="Image 3" descr="preencoded.png"/>
           <p:cNvPicPr>
             <a:picLocks noChangeAspect="1"/>
           </p:cNvPicPr>
@@ -5968,8 +5245,8 @@
         </p:blipFill>
         <p:spPr>
           <a:xfrm>
-            <a:off x="1962531" y="4769739"/>
-            <a:ext cx="326898" cy="326898"/>
+            <a:off x="8577072" y="1810512"/>
+            <a:ext cx="402336" cy="402336"/>
           </a:xfrm>
           <a:prstGeom prst="rect">
             <a:avLst/>
@@ -5978,14 +5255,14 @@
       </p:pic>
       <p:sp>
         <p:nvSpPr>
-          <p:cNvPr id="32" name="Text 24"/>
-          <p:cNvSpPr/>
-          <p:nvPr/>
-        </p:nvSpPr>
-        <p:spPr>
-          <a:xfrm>
-            <a:off x="2606040" y="4544568"/>
-            <a:ext cx="3108960" cy="457200"/>
+          <p:cNvPr id="18" name="Text 12"/>
+          <p:cNvSpPr/>
+          <p:nvPr/>
+        </p:nvSpPr>
+        <p:spPr>
+          <a:xfrm>
+            <a:off x="9281160" y="1527048"/>
+            <a:ext cx="2011680" cy="457200"/>
           </a:xfrm>
           <a:prstGeom prst="rect">
             <a:avLst/>
@@ -5997,11 +5274,11 @@
           <a:bodyPr wrap="square" rtlCol="0" anchor="ctr"/>
           <a:lstStyle/>
           <a:p>
-            <a:pPr indent="0" marL="0">
-              <a:buNone/>
-            </a:pPr>
-            <a:r>
-              <a:rPr lang="en-US" sz="1300" b="1" dirty="0">
+            <a:pPr marL="0" indent="0">
+              <a:buNone/>
+            </a:pPr>
+            <a:r>
+              <a:rPr lang="en-US" sz="1350" b="1" dirty="0">
                 <a:solidFill>
                   <a:srgbClr val="1B1F23"/>
                 </a:solidFill>
@@ -6009,34 +5286,34 @@
                 <a:ea typeface="Calibri" pitchFamily="34" charset="-122"/>
                 <a:cs typeface="Calibri" pitchFamily="34" charset="-120"/>
               </a:rPr>
-              <a:t>24h AQI Prediction</a:t>
-            </a:r>
-            <a:endParaRPr lang="en-US" sz="1300" dirty="0"/>
-          </a:p>
-        </p:txBody>
-      </p:sp>
-      <p:sp>
-        <p:nvSpPr>
-          <p:cNvPr id="33" name="Text 25"/>
-          <p:cNvSpPr/>
-          <p:nvPr/>
-        </p:nvSpPr>
-        <p:spPr>
-          <a:xfrm>
-            <a:off x="2606040" y="4937760"/>
-            <a:ext cx="3108960" cy="457200"/>
-          </a:xfrm>
-          <a:prstGeom prst="rect">
-            <a:avLst/>
-          </a:prstGeom>
-          <a:noFill/>
-          <a:ln/>
-        </p:spPr>
-        <p:txBody>
-          <a:bodyPr wrap="square" rtlCol="0" anchor="ctr"/>
-          <a:lstStyle/>
-          <a:p>
-            <a:pPr indent="0" marL="0">
+              <a:t>NASA FIRMS Satellite</a:t>
+            </a:r>
+            <a:endParaRPr lang="en-US" sz="1350" dirty="0"/>
+          </a:p>
+        </p:txBody>
+      </p:sp>
+      <p:sp>
+        <p:nvSpPr>
+          <p:cNvPr id="19" name="Text 13"/>
+          <p:cNvSpPr/>
+          <p:nvPr/>
+        </p:nvSpPr>
+        <p:spPr>
+          <a:xfrm>
+            <a:off x="9281160" y="1965960"/>
+            <a:ext cx="2011680" cy="548640"/>
+          </a:xfrm>
+          <a:prstGeom prst="rect">
+            <a:avLst/>
+          </a:prstGeom>
+          <a:noFill/>
+          <a:ln/>
+        </p:spPr>
+        <p:txBody>
+          <a:bodyPr wrap="square" rtlCol="0" anchor="t"/>
+          <a:lstStyle/>
+          <a:p>
+            <a:pPr marL="0" indent="0">
               <a:buNone/>
             </a:pPr>
             <a:r>
@@ -6048,34 +5325,111 @@
                 <a:ea typeface="Calibri" pitchFamily="34" charset="-122"/>
                 <a:cs typeface="Calibri" pitchFamily="34" charset="-120"/>
               </a:rPr>
-              <a:t>Regression model, live + historical training data</a:t>
+              <a:t>Active fire / smoke</a:t>
             </a:r>
             <a:endParaRPr lang="en-US" sz="1050" dirty="0"/>
           </a:p>
-        </p:txBody>
-      </p:sp>
-      <p:sp>
-        <p:nvSpPr>
-          <p:cNvPr id="34" name="Shape 26"/>
-          <p:cNvSpPr/>
-          <p:nvPr/>
-        </p:nvSpPr>
-        <p:spPr>
-          <a:xfrm>
-            <a:off x="6766560" y="4434840"/>
-            <a:ext cx="4206240" cy="1005840"/>
+          <a:p>
+            <a:pPr marL="0" indent="0">
+              <a:buNone/>
+            </a:pPr>
+            <a:r>
+              <a:rPr lang="en-US" sz="1050" dirty="0">
+                <a:solidFill>
+                  <a:srgbClr val="667085"/>
+                </a:solidFill>
+                <a:latin typeface="Calibri" pitchFamily="34" charset="0"/>
+                <a:ea typeface="Calibri" pitchFamily="34" charset="-122"/>
+                <a:cs typeface="Calibri" pitchFamily="34" charset="-120"/>
+              </a:rPr>
+              <a:t>detections</a:t>
+            </a:r>
+            <a:endParaRPr lang="en-US" sz="1050" dirty="0"/>
+          </a:p>
+        </p:txBody>
+      </p:sp>
+      <p:sp>
+        <p:nvSpPr>
+          <p:cNvPr id="20" name="Shape 14"/>
+          <p:cNvSpPr/>
+          <p:nvPr/>
+        </p:nvSpPr>
+        <p:spPr>
+          <a:xfrm>
+            <a:off x="2368296" y="2651760"/>
+            <a:ext cx="109728" cy="320040"/>
+          </a:xfrm>
+          <a:prstGeom prst="downArrow">
+            <a:avLst/>
+          </a:prstGeom>
+          <a:solidFill>
+            <a:srgbClr val="667085"/>
+          </a:solidFill>
+          <a:ln/>
+        </p:spPr>
+      </p:sp>
+      <p:sp>
+        <p:nvSpPr>
+          <p:cNvPr id="21" name="Shape 15"/>
+          <p:cNvSpPr/>
+          <p:nvPr/>
+        </p:nvSpPr>
+        <p:spPr>
+          <a:xfrm>
+            <a:off x="6071616" y="2651760"/>
+            <a:ext cx="109728" cy="320040"/>
+          </a:xfrm>
+          <a:prstGeom prst="downArrow">
+            <a:avLst/>
+          </a:prstGeom>
+          <a:solidFill>
+            <a:srgbClr val="667085"/>
+          </a:solidFill>
+          <a:ln/>
+        </p:spPr>
+      </p:sp>
+      <p:sp>
+        <p:nvSpPr>
+          <p:cNvPr id="22" name="Shape 16"/>
+          <p:cNvSpPr/>
+          <p:nvPr/>
+        </p:nvSpPr>
+        <p:spPr>
+          <a:xfrm>
+            <a:off x="9774936" y="2651760"/>
+            <a:ext cx="109728" cy="320040"/>
+          </a:xfrm>
+          <a:prstGeom prst="downArrow">
+            <a:avLst/>
+          </a:prstGeom>
+          <a:solidFill>
+            <a:srgbClr val="667085"/>
+          </a:solidFill>
+          <a:ln/>
+        </p:spPr>
+      </p:sp>
+      <p:sp>
+        <p:nvSpPr>
+          <p:cNvPr id="23" name="Shape 17"/>
+          <p:cNvSpPr/>
+          <p:nvPr/>
+        </p:nvSpPr>
+        <p:spPr>
+          <a:xfrm>
+            <a:off x="822960" y="3063240"/>
+            <a:ext cx="10515600" cy="960120"/>
           </a:xfrm>
           <a:prstGeom prst="roundRect">
             <a:avLst>
-              <a:gd name="adj" fmla="val 7273"/>
+              <a:gd name="adj" fmla="val 7619"/>
             </a:avLst>
           </a:prstGeom>
           <a:solidFill>
-            <a:srgbClr val="F7F7F8"/>
+            <a:srgbClr val="1B1F23"/>
           </a:solidFill>
           <a:ln/>
           <a:effectLst>
-            <a:outerShdw sx="100000" sy="100000" kx="0" ky="0" algn="bl" rotWithShape="0" blurRad="101600" dist="38100" dir="2700000">
+            <a:outerShdw blurRad="101600" dist="38100" dir="2700000" algn="bl" rotWithShape="0">
               <a:srgbClr val="000000">
                 <a:alpha val="12000"/>
               </a:srgbClr>
@@ -6085,27 +5439,27 @@
       </p:sp>
       <p:sp>
         <p:nvSpPr>
-          <p:cNvPr id="35" name="Shape 27"/>
-          <p:cNvSpPr/>
-          <p:nvPr/>
-        </p:nvSpPr>
-        <p:spPr>
-          <a:xfrm>
-            <a:off x="6949440" y="4636008"/>
+          <p:cNvPr id="24" name="Shape 18"/>
+          <p:cNvSpPr/>
+          <p:nvPr/>
+        </p:nvSpPr>
+        <p:spPr>
+          <a:xfrm>
+            <a:off x="1051560" y="3246120"/>
             <a:ext cx="594360" cy="594360"/>
           </a:xfrm>
           <a:prstGeom prst="ellipse">
             <a:avLst/>
           </a:prstGeom>
           <a:solidFill>
-            <a:srgbClr val="FDEDD3"/>
+            <a:srgbClr val="1A73E8"/>
           </a:solidFill>
           <a:ln/>
         </p:spPr>
       </p:sp>
       <p:pic>
         <p:nvPicPr>
-          <p:cNvPr id="36" name="Image 6" descr="preencoded.png">    </p:cNvPr>
+          <p:cNvPr id="25" name="Image 4" descr="preencoded.png"/>
           <p:cNvPicPr>
             <a:picLocks noChangeAspect="1"/>
           </p:cNvPicPr>
@@ -6119,7 +5473,7 @@
         </p:blipFill>
         <p:spPr>
           <a:xfrm>
-            <a:off x="7083171" y="4769739"/>
+            <a:off x="1185291" y="3379851"/>
             <a:ext cx="326898" cy="326898"/>
           </a:xfrm>
           <a:prstGeom prst="rect">
@@ -6129,14 +5483,14 @@
       </p:pic>
       <p:sp>
         <p:nvSpPr>
-          <p:cNvPr id="37" name="Text 28"/>
-          <p:cNvSpPr/>
-          <p:nvPr/>
-        </p:nvSpPr>
-        <p:spPr>
-          <a:xfrm>
-            <a:off x="7726680" y="4544568"/>
-            <a:ext cx="3108960" cy="457200"/>
+          <p:cNvPr id="26" name="Text 19"/>
+          <p:cNvSpPr/>
+          <p:nvPr/>
+        </p:nvSpPr>
+        <p:spPr>
+          <a:xfrm>
+            <a:off x="1828800" y="3136392"/>
+            <a:ext cx="3657600" cy="457200"/>
           </a:xfrm>
           <a:prstGeom prst="rect">
             <a:avLst/>
@@ -6148,34 +5502,34 @@
           <a:bodyPr wrap="square" rtlCol="0" anchor="ctr"/>
           <a:lstStyle/>
           <a:p>
-            <a:pPr indent="0" marL="0">
-              <a:buNone/>
-            </a:pPr>
-            <a:r>
-              <a:rPr lang="en-US" sz="1300" b="1" dirty="0">
-                <a:solidFill>
-                  <a:srgbClr val="1B1F23"/>
+            <a:pPr marL="0" indent="0">
+              <a:buNone/>
+            </a:pPr>
+            <a:r>
+              <a:rPr lang="en-US" sz="1500" b="1" dirty="0">
+                <a:solidFill>
+                  <a:srgbClr val="FFFFFF"/>
                 </a:solidFill>
                 <a:latin typeface="Calibri" pitchFamily="34" charset="0"/>
                 <a:ea typeface="Calibri" pitchFamily="34" charset="-122"/>
                 <a:cs typeface="Calibri" pitchFamily="34" charset="-120"/>
               </a:rPr>
-              <a:t>Bilingual AI Briefing</a:t>
-            </a:r>
-            <a:endParaRPr lang="en-US" sz="1300" dirty="0"/>
-          </a:p>
-        </p:txBody>
-      </p:sp>
-      <p:sp>
-        <p:nvSpPr>
-          <p:cNvPr id="38" name="Text 29"/>
-          <p:cNvSpPr/>
-          <p:nvPr/>
-        </p:nvSpPr>
-        <p:spPr>
-          <a:xfrm>
-            <a:off x="7726680" y="4937760"/>
-            <a:ext cx="3108960" cy="457200"/>
+              <a:t>Hotspot Fusion Engine</a:t>
+            </a:r>
+            <a:endParaRPr lang="en-US" sz="1500" dirty="0"/>
+          </a:p>
+        </p:txBody>
+      </p:sp>
+      <p:sp>
+        <p:nvSpPr>
+          <p:cNvPr id="27" name="Text 20"/>
+          <p:cNvSpPr/>
+          <p:nvPr/>
+        </p:nvSpPr>
+        <p:spPr>
+          <a:xfrm>
+            <a:off x="1828800" y="3566160"/>
+            <a:ext cx="8412480" cy="365760"/>
           </a:xfrm>
           <a:prstGeom prst="rect">
             <a:avLst/>
@@ -6187,34 +5541,34 @@
           <a:bodyPr wrap="square" rtlCol="0" anchor="ctr"/>
           <a:lstStyle/>
           <a:p>
-            <a:pPr indent="0" marL="0">
-              <a:buNone/>
-            </a:pPr>
-            <a:r>
-              <a:rPr lang="en-US" sz="1050" dirty="0">
-                <a:solidFill>
-                  <a:srgbClr val="667085"/>
+            <a:pPr marL="0" indent="0">
+              <a:buNone/>
+            </a:pPr>
+            <a:r>
+              <a:rPr lang="en-US" sz="1100" dirty="0">
+                <a:solidFill>
+                  <a:srgbClr val="9FD3F5"/>
                 </a:solidFill>
                 <a:latin typeface="Calibri" pitchFamily="34" charset="0"/>
                 <a:ea typeface="Calibri" pitchFamily="34" charset="-122"/>
                 <a:cs typeface="Calibri" pitchFamily="34" charset="-120"/>
               </a:rPr>
-              <a:t>Gemini (Groq fallback) reasons about cause, EN + HI</a:t>
-            </a:r>
-            <a:endParaRPr lang="en-US" sz="1050" dirty="0"/>
-          </a:p>
-        </p:txBody>
-      </p:sp>
-      <p:sp>
-        <p:nvSpPr>
-          <p:cNvPr id="39" name="Shape 30"/>
-          <p:cNvSpPr/>
-          <p:nvPr/>
-        </p:nvSpPr>
-        <p:spPr>
-          <a:xfrm>
-            <a:off x="6035040" y="5486400"/>
-            <a:ext cx="109728" cy="256032"/>
+              <a:t>50% ground AQI + 30% satellite fire data + 20% citizen photo severity = one 0-1 score / zone</a:t>
+            </a:r>
+            <a:endParaRPr lang="en-US" sz="1100" dirty="0"/>
+          </a:p>
+        </p:txBody>
+      </p:sp>
+      <p:sp>
+        <p:nvSpPr>
+          <p:cNvPr id="28" name="Shape 21"/>
+          <p:cNvSpPr/>
+          <p:nvPr/>
+        </p:nvSpPr>
+        <p:spPr>
+          <a:xfrm>
+            <a:off x="6035040" y="4069080"/>
+            <a:ext cx="109728" cy="274320"/>
           </a:xfrm>
           <a:prstGeom prst="downArrow">
             <a:avLst/>
@@ -6227,6 +5581,328 @@
       </p:sp>
       <p:sp>
         <p:nvSpPr>
+          <p:cNvPr id="29" name="Shape 22"/>
+          <p:cNvSpPr/>
+          <p:nvPr/>
+        </p:nvSpPr>
+        <p:spPr>
+          <a:xfrm>
+            <a:off x="1645920" y="4434840"/>
+            <a:ext cx="4206240" cy="1005840"/>
+          </a:xfrm>
+          <a:prstGeom prst="roundRect">
+            <a:avLst>
+              <a:gd name="adj" fmla="val 7273"/>
+            </a:avLst>
+          </a:prstGeom>
+          <a:solidFill>
+            <a:srgbClr val="F7F7F8"/>
+          </a:solidFill>
+          <a:ln/>
+          <a:effectLst>
+            <a:outerShdw blurRad="101600" dist="38100" dir="2700000" algn="bl" rotWithShape="0">
+              <a:srgbClr val="000000">
+                <a:alpha val="12000"/>
+              </a:srgbClr>
+            </a:outerShdw>
+          </a:effectLst>
+        </p:spPr>
+      </p:sp>
+      <p:sp>
+        <p:nvSpPr>
+          <p:cNvPr id="30" name="Shape 23"/>
+          <p:cNvSpPr/>
+          <p:nvPr/>
+        </p:nvSpPr>
+        <p:spPr>
+          <a:xfrm>
+            <a:off x="1828800" y="4636008"/>
+            <a:ext cx="594360" cy="594360"/>
+          </a:xfrm>
+          <a:prstGeom prst="ellipse">
+            <a:avLst/>
+          </a:prstGeom>
+          <a:solidFill>
+            <a:srgbClr val="FDEDD3"/>
+          </a:solidFill>
+          <a:ln/>
+        </p:spPr>
+      </p:sp>
+      <p:pic>
+        <p:nvPicPr>
+          <p:cNvPr id="31" name="Image 5" descr="preencoded.png"/>
+          <p:cNvPicPr>
+            <a:picLocks noChangeAspect="1"/>
+          </p:cNvPicPr>
+          <p:nvPr/>
+        </p:nvPicPr>
+        <p:blipFill>
+          <a:blip r:embed="rId8"/>
+          <a:stretch>
+            <a:fillRect/>
+          </a:stretch>
+        </p:blipFill>
+        <p:spPr>
+          <a:xfrm>
+            <a:off x="1962531" y="4769739"/>
+            <a:ext cx="326898" cy="326898"/>
+          </a:xfrm>
+          <a:prstGeom prst="rect">
+            <a:avLst/>
+          </a:prstGeom>
+        </p:spPr>
+      </p:pic>
+      <p:sp>
+        <p:nvSpPr>
+          <p:cNvPr id="32" name="Text 24"/>
+          <p:cNvSpPr/>
+          <p:nvPr/>
+        </p:nvSpPr>
+        <p:spPr>
+          <a:xfrm>
+            <a:off x="2606040" y="4544568"/>
+            <a:ext cx="3108960" cy="457200"/>
+          </a:xfrm>
+          <a:prstGeom prst="rect">
+            <a:avLst/>
+          </a:prstGeom>
+          <a:noFill/>
+          <a:ln/>
+        </p:spPr>
+        <p:txBody>
+          <a:bodyPr wrap="square" rtlCol="0" anchor="ctr"/>
+          <a:lstStyle/>
+          <a:p>
+            <a:pPr marL="0" indent="0">
+              <a:buNone/>
+            </a:pPr>
+            <a:r>
+              <a:rPr lang="en-US" sz="1300" b="1" dirty="0">
+                <a:solidFill>
+                  <a:srgbClr val="1B1F23"/>
+                </a:solidFill>
+                <a:latin typeface="Calibri" pitchFamily="34" charset="0"/>
+                <a:ea typeface="Calibri" pitchFamily="34" charset="-122"/>
+                <a:cs typeface="Calibri" pitchFamily="34" charset="-120"/>
+              </a:rPr>
+              <a:t>24h AQI Prediction</a:t>
+            </a:r>
+            <a:endParaRPr lang="en-US" sz="1300" dirty="0"/>
+          </a:p>
+        </p:txBody>
+      </p:sp>
+      <p:sp>
+        <p:nvSpPr>
+          <p:cNvPr id="33" name="Text 25"/>
+          <p:cNvSpPr/>
+          <p:nvPr/>
+        </p:nvSpPr>
+        <p:spPr>
+          <a:xfrm>
+            <a:off x="2606040" y="4937760"/>
+            <a:ext cx="3108960" cy="457200"/>
+          </a:xfrm>
+          <a:prstGeom prst="rect">
+            <a:avLst/>
+          </a:prstGeom>
+          <a:noFill/>
+          <a:ln/>
+        </p:spPr>
+        <p:txBody>
+          <a:bodyPr wrap="square" rtlCol="0" anchor="ctr"/>
+          <a:lstStyle/>
+          <a:p>
+            <a:pPr marL="0" indent="0">
+              <a:buNone/>
+            </a:pPr>
+            <a:r>
+              <a:rPr lang="en-US" sz="1050" dirty="0">
+                <a:solidFill>
+                  <a:srgbClr val="667085"/>
+                </a:solidFill>
+                <a:latin typeface="Calibri" pitchFamily="34" charset="0"/>
+                <a:ea typeface="Calibri" pitchFamily="34" charset="-122"/>
+                <a:cs typeface="Calibri" pitchFamily="34" charset="-120"/>
+              </a:rPr>
+              <a:t>Regression model, live + historical training data</a:t>
+            </a:r>
+            <a:endParaRPr lang="en-US" sz="1050" dirty="0"/>
+          </a:p>
+        </p:txBody>
+      </p:sp>
+      <p:sp>
+        <p:nvSpPr>
+          <p:cNvPr id="34" name="Shape 26"/>
+          <p:cNvSpPr/>
+          <p:nvPr/>
+        </p:nvSpPr>
+        <p:spPr>
+          <a:xfrm>
+            <a:off x="6766560" y="4434840"/>
+            <a:ext cx="4206240" cy="1005840"/>
+          </a:xfrm>
+          <a:prstGeom prst="roundRect">
+            <a:avLst>
+              <a:gd name="adj" fmla="val 7273"/>
+            </a:avLst>
+          </a:prstGeom>
+          <a:solidFill>
+            <a:srgbClr val="F7F7F8"/>
+          </a:solidFill>
+          <a:ln/>
+          <a:effectLst>
+            <a:outerShdw blurRad="101600" dist="38100" dir="2700000" algn="bl" rotWithShape="0">
+              <a:srgbClr val="000000">
+                <a:alpha val="12000"/>
+              </a:srgbClr>
+            </a:outerShdw>
+          </a:effectLst>
+        </p:spPr>
+      </p:sp>
+      <p:sp>
+        <p:nvSpPr>
+          <p:cNvPr id="35" name="Shape 27"/>
+          <p:cNvSpPr/>
+          <p:nvPr/>
+        </p:nvSpPr>
+        <p:spPr>
+          <a:xfrm>
+            <a:off x="6949440" y="4636008"/>
+            <a:ext cx="594360" cy="594360"/>
+          </a:xfrm>
+          <a:prstGeom prst="ellipse">
+            <a:avLst/>
+          </a:prstGeom>
+          <a:solidFill>
+            <a:srgbClr val="FDEDD3"/>
+          </a:solidFill>
+          <a:ln/>
+        </p:spPr>
+      </p:sp>
+      <p:pic>
+        <p:nvPicPr>
+          <p:cNvPr id="36" name="Image 6" descr="preencoded.png"/>
+          <p:cNvPicPr>
+            <a:picLocks noChangeAspect="1"/>
+          </p:cNvPicPr>
+          <p:nvPr/>
+        </p:nvPicPr>
+        <p:blipFill>
+          <a:blip r:embed="rId9"/>
+          <a:stretch>
+            <a:fillRect/>
+          </a:stretch>
+        </p:blipFill>
+        <p:spPr>
+          <a:xfrm>
+            <a:off x="7083171" y="4769739"/>
+            <a:ext cx="326898" cy="326898"/>
+          </a:xfrm>
+          <a:prstGeom prst="rect">
+            <a:avLst/>
+          </a:prstGeom>
+        </p:spPr>
+      </p:pic>
+      <p:sp>
+        <p:nvSpPr>
+          <p:cNvPr id="37" name="Text 28"/>
+          <p:cNvSpPr/>
+          <p:nvPr/>
+        </p:nvSpPr>
+        <p:spPr>
+          <a:xfrm>
+            <a:off x="7726680" y="4544568"/>
+            <a:ext cx="3108960" cy="457200"/>
+          </a:xfrm>
+          <a:prstGeom prst="rect">
+            <a:avLst/>
+          </a:prstGeom>
+          <a:noFill/>
+          <a:ln/>
+        </p:spPr>
+        <p:txBody>
+          <a:bodyPr wrap="square" rtlCol="0" anchor="ctr"/>
+          <a:lstStyle/>
+          <a:p>
+            <a:pPr marL="0" indent="0">
+              <a:buNone/>
+            </a:pPr>
+            <a:r>
+              <a:rPr lang="en-US" sz="1300" b="1" dirty="0">
+                <a:solidFill>
+                  <a:srgbClr val="1B1F23"/>
+                </a:solidFill>
+                <a:latin typeface="Calibri" pitchFamily="34" charset="0"/>
+                <a:ea typeface="Calibri" pitchFamily="34" charset="-122"/>
+                <a:cs typeface="Calibri" pitchFamily="34" charset="-120"/>
+              </a:rPr>
+              <a:t>Bilingual AI Briefing</a:t>
+            </a:r>
+            <a:endParaRPr lang="en-US" sz="1300" dirty="0"/>
+          </a:p>
+        </p:txBody>
+      </p:sp>
+      <p:sp>
+        <p:nvSpPr>
+          <p:cNvPr id="38" name="Text 29"/>
+          <p:cNvSpPr/>
+          <p:nvPr/>
+        </p:nvSpPr>
+        <p:spPr>
+          <a:xfrm>
+            <a:off x="7726680" y="4937760"/>
+            <a:ext cx="3108960" cy="457200"/>
+          </a:xfrm>
+          <a:prstGeom prst="rect">
+            <a:avLst/>
+          </a:prstGeom>
+          <a:noFill/>
+          <a:ln/>
+        </p:spPr>
+        <p:txBody>
+          <a:bodyPr wrap="square" rtlCol="0" anchor="ctr"/>
+          <a:lstStyle/>
+          <a:p>
+            <a:pPr marL="0" indent="0">
+              <a:buNone/>
+            </a:pPr>
+            <a:r>
+              <a:rPr lang="en-US" sz="1050" dirty="0">
+                <a:solidFill>
+                  <a:srgbClr val="667085"/>
+                </a:solidFill>
+                <a:latin typeface="Calibri" pitchFamily="34" charset="0"/>
+                <a:ea typeface="Calibri" pitchFamily="34" charset="-122"/>
+                <a:cs typeface="Calibri" pitchFamily="34" charset="-120"/>
+              </a:rPr>
+              <a:t>Gemini (Groq fallback) reasons about cause, EN + HI</a:t>
+            </a:r>
+            <a:endParaRPr lang="en-US" sz="1050" dirty="0"/>
+          </a:p>
+        </p:txBody>
+      </p:sp>
+      <p:sp>
+        <p:nvSpPr>
+          <p:cNvPr id="39" name="Shape 30"/>
+          <p:cNvSpPr/>
+          <p:nvPr/>
+        </p:nvSpPr>
+        <p:spPr>
+          <a:xfrm>
+            <a:off x="6035040" y="5486400"/>
+            <a:ext cx="109728" cy="256032"/>
+          </a:xfrm>
+          <a:prstGeom prst="downArrow">
+            <a:avLst/>
+          </a:prstGeom>
+          <a:solidFill>
+            <a:srgbClr val="667085"/>
+          </a:solidFill>
+          <a:ln/>
+        </p:spPr>
+      </p:sp>
+      <p:sp>
+        <p:nvSpPr>
           <p:cNvPr id="40" name="Text 31"/>
           <p:cNvSpPr/>
           <p:nvPr/>
@@ -6246,7 +5922,7 @@
           <a:bodyPr wrap="square" rtlCol="0" anchor="ctr"/>
           <a:lstStyle/>
           <a:p>
-            <a:pPr algn="ctr" indent="0" marL="0">
+            <a:pPr marL="0" indent="0" algn="ctr">
               <a:buNone/>
             </a:pPr>
             <a:r>
@@ -6280,6 +5956,7 @@
         <a:solidFill>
           <a:srgbClr val="FFFFFF"/>
         </a:solidFill>
+        <a:effectLst/>
       </p:bgPr>
     </p:bg>
     <p:spTree>
@@ -6318,251 +5995,7 @@
       </p:sp>
       <p:pic>
         <p:nvPicPr>
-          <p:cNvPr id="3" name="Image 0" descr="preencoded.png">    </p:cNvPr>
-          <p:cNvPicPr>
-            <a:picLocks noChangeAspect="1"/>
-          </p:cNvPicPr>
-          <p:nvPr/>
-        </p:nvPicPr>
-        <p:blipFill>
-          <a:blip r:embed="rId1"/>
-          <a:stretch>
-            <a:fillRect/>
-          </a:stretch>
-        </p:blipFill>
-        <p:spPr>
-          <a:xfrm>
-            <a:off x="875538" y="692658"/>
-            <a:ext cx="352044" cy="352044"/>
-          </a:xfrm>
-          <a:prstGeom prst="rect">
-            <a:avLst/>
-          </a:prstGeom>
-        </p:spPr>
-      </p:pic>
-      <p:sp>
-        <p:nvSpPr>
-          <p:cNvPr id="4" name="Text 1"/>
-          <p:cNvSpPr/>
-          <p:nvPr/>
-        </p:nvSpPr>
-        <p:spPr>
-          <a:xfrm>
-            <a:off x="1554480" y="548640"/>
-            <a:ext cx="7315200" cy="640080"/>
-          </a:xfrm>
-          <a:prstGeom prst="rect">
-            <a:avLst/>
-          </a:prstGeom>
-          <a:noFill/>
-          <a:ln/>
-        </p:spPr>
-        <p:txBody>
-          <a:bodyPr wrap="square" rtlCol="0" anchor="ctr"/>
-          <a:lstStyle/>
-          <a:p>
-            <a:pPr indent="0" marL="0">
-              <a:buNone/>
-            </a:pPr>
-            <a:r>
-              <a:rPr lang="en-US" sz="3000" b="1" dirty="0">
-                <a:solidFill>
-                  <a:srgbClr val="1B1F23"/>
-                </a:solidFill>
-                <a:latin typeface="Cambria" pitchFamily="34" charset="0"/>
-                <a:ea typeface="Cambria" pitchFamily="34" charset="-122"/>
-                <a:cs typeface="Cambria" pitchFamily="34" charset="-120"/>
-              </a:rPr>
-              <a:t>AI in Action</a:t>
-            </a:r>
-            <a:endParaRPr lang="en-US" sz="3000" dirty="0"/>
-          </a:p>
-        </p:txBody>
-      </p:sp>
-      <p:sp>
-        <p:nvSpPr>
-          <p:cNvPr id="5" name="Text 2"/>
-          <p:cNvSpPr/>
-          <p:nvPr/>
-        </p:nvSpPr>
-        <p:spPr>
-          <a:xfrm>
-            <a:off x="731520" y="1234440"/>
-            <a:ext cx="10058400" cy="365760"/>
-          </a:xfrm>
-          <a:prstGeom prst="rect">
-            <a:avLst/>
-          </a:prstGeom>
-          <a:noFill/>
-          <a:ln/>
-        </p:spPr>
-        <p:txBody>
-          <a:bodyPr wrap="square" rtlCol="0" anchor="ctr"/>
-          <a:lstStyle/>
-          <a:p>
-            <a:pPr indent="0" marL="0">
-              <a:buNone/>
-            </a:pPr>
-            <a:r>
-              <a:rPr lang="en-US" sz="1400" i="1" dirty="0">
-                <a:solidFill>
-                  <a:srgbClr val="667085"/>
-                </a:solidFill>
-                <a:latin typeface="Calibri" pitchFamily="34" charset="0"/>
-                <a:ea typeface="Calibri" pitchFamily="34" charset="-122"/>
-                <a:cs typeface="Calibri" pitchFamily="34" charset="-120"/>
-              </a:rPr>
-              <a:t>Three distinct AI roles — each doing real interpretive work, not decoration</a:t>
-            </a:r>
-            <a:endParaRPr lang="en-US" sz="1400" dirty="0"/>
-          </a:p>
-        </p:txBody>
-      </p:sp>
-      <p:sp>
-        <p:nvSpPr>
-          <p:cNvPr id="6" name="Shape 3"/>
-          <p:cNvSpPr/>
-          <p:nvPr/>
-        </p:nvSpPr>
-        <p:spPr>
-          <a:xfrm>
-            <a:off x="822960" y="1920240"/>
-            <a:ext cx="685800" cy="685800"/>
-          </a:xfrm>
-          <a:prstGeom prst="ellipse">
-            <a:avLst/>
-          </a:prstGeom>
-          <a:solidFill>
-            <a:srgbClr val="E8F0FE"/>
-          </a:solidFill>
-          <a:ln/>
-        </p:spPr>
-      </p:sp>
-      <p:pic>
-        <p:nvPicPr>
-          <p:cNvPr id="7" name="Image 1" descr="preencoded.png">    </p:cNvPr>
-          <p:cNvPicPr>
-            <a:picLocks noChangeAspect="1"/>
-          </p:cNvPicPr>
-          <p:nvPr/>
-        </p:nvPicPr>
-        <p:blipFill>
-          <a:blip r:embed="rId2"/>
-          <a:stretch>
-            <a:fillRect/>
-          </a:stretch>
-        </p:blipFill>
-        <p:spPr>
-          <a:xfrm>
-            <a:off x="977265" y="2074545"/>
-            <a:ext cx="377190" cy="377190"/>
-          </a:xfrm>
-          <a:prstGeom prst="rect">
-            <a:avLst/>
-          </a:prstGeom>
-        </p:spPr>
-      </p:pic>
-      <p:sp>
-        <p:nvSpPr>
-          <p:cNvPr id="8" name="Text 4"/>
-          <p:cNvSpPr/>
-          <p:nvPr/>
-        </p:nvSpPr>
-        <p:spPr>
-          <a:xfrm>
-            <a:off x="1783080" y="1874520"/>
-            <a:ext cx="2743200" cy="777240"/>
-          </a:xfrm>
-          <a:prstGeom prst="rect">
-            <a:avLst/>
-          </a:prstGeom>
-          <a:noFill/>
-          <a:ln/>
-        </p:spPr>
-        <p:txBody>
-          <a:bodyPr wrap="square" rtlCol="0" anchor="ctr"/>
-          <a:lstStyle/>
-          <a:p>
-            <a:pPr indent="0" marL="0">
-              <a:buNone/>
-            </a:pPr>
-            <a:r>
-              <a:rPr lang="en-US" sz="1500" b="1" dirty="0">
-                <a:solidFill>
-                  <a:srgbClr val="1B1F23"/>
-                </a:solidFill>
-                <a:latin typeface="Calibri" pitchFamily="34" charset="0"/>
-                <a:ea typeface="Calibri" pitchFamily="34" charset="-122"/>
-                <a:cs typeface="Calibri" pitchFamily="34" charset="-120"/>
-              </a:rPr>
-              <a:t>Vision Classification</a:t>
-            </a:r>
-            <a:endParaRPr lang="en-US" sz="1500" dirty="0"/>
-          </a:p>
-        </p:txBody>
-      </p:sp>
-      <p:sp>
-        <p:nvSpPr>
-          <p:cNvPr id="9" name="Text 5"/>
-          <p:cNvSpPr/>
-          <p:nvPr/>
-        </p:nvSpPr>
-        <p:spPr>
-          <a:xfrm>
-            <a:off x="4663440" y="1874520"/>
-            <a:ext cx="6766560" cy="822960"/>
-          </a:xfrm>
-          <a:prstGeom prst="rect">
-            <a:avLst/>
-          </a:prstGeom>
-          <a:noFill/>
-          <a:ln/>
-        </p:spPr>
-        <p:txBody>
-          <a:bodyPr wrap="square" rtlCol="0" anchor="ctr"/>
-          <a:lstStyle/>
-          <a:p>
-            <a:pPr indent="0" marL="0">
-              <a:buNone/>
-            </a:pPr>
-            <a:r>
-              <a:rPr lang="en-US" sz="1250" dirty="0">
-                <a:solidFill>
-                  <a:srgbClr val="667085"/>
-                </a:solidFill>
-                <a:latin typeface="Calibri" pitchFamily="34" charset="0"/>
-                <a:ea typeface="Calibri" pitchFamily="34" charset="-122"/>
-                <a:cs typeface="Calibri" pitchFamily="34" charset="-120"/>
-              </a:rPr>
-              <a:t>Gemini (via Firebase AI Logic) classifies each citizen photo into smoke, dust, garbage burning, haze, or none — with a severity score and a one-sentence reasoning, not just a label.</a:t>
-            </a:r>
-            <a:endParaRPr lang="en-US" sz="1250" dirty="0"/>
-          </a:p>
-        </p:txBody>
-      </p:sp>
-      <p:sp>
-        <p:nvSpPr>
-          <p:cNvPr id="10" name="Shape 6"/>
-          <p:cNvSpPr/>
-          <p:nvPr/>
-        </p:nvSpPr>
-        <p:spPr>
-          <a:xfrm>
-            <a:off x="822960" y="3337560"/>
-            <a:ext cx="685800" cy="685800"/>
-          </a:xfrm>
-          <a:prstGeom prst="ellipse">
-            <a:avLst/>
-          </a:prstGeom>
-          <a:solidFill>
-            <a:srgbClr val="E8F0FE"/>
-          </a:solidFill>
-          <a:ln/>
-        </p:spPr>
-      </p:sp>
-      <p:pic>
-        <p:nvPicPr>
-          <p:cNvPr id="11" name="Image 2" descr="preencoded.png">    </p:cNvPr>
+          <p:cNvPr id="3" name="Image 0" descr="preencoded.png"/>
           <p:cNvPicPr>
             <a:picLocks noChangeAspect="1"/>
           </p:cNvPicPr>
@@ -6576,8 +6009,8 @@
         </p:blipFill>
         <p:spPr>
           <a:xfrm>
-            <a:off x="977265" y="3491865"/>
-            <a:ext cx="377190" cy="377190"/>
+            <a:off x="875538" y="692658"/>
+            <a:ext cx="352044" cy="352044"/>
           </a:xfrm>
           <a:prstGeom prst="rect">
             <a:avLst/>
@@ -6586,14 +6019,14 @@
       </p:pic>
       <p:sp>
         <p:nvSpPr>
-          <p:cNvPr id="12" name="Text 7"/>
-          <p:cNvSpPr/>
-          <p:nvPr/>
-        </p:nvSpPr>
-        <p:spPr>
-          <a:xfrm>
-            <a:off x="1783080" y="3291840"/>
-            <a:ext cx="2743200" cy="777240"/>
+          <p:cNvPr id="4" name="Text 1"/>
+          <p:cNvSpPr/>
+          <p:nvPr/>
+        </p:nvSpPr>
+        <p:spPr>
+          <a:xfrm>
+            <a:off x="1554480" y="548640"/>
+            <a:ext cx="7315200" cy="640080"/>
           </a:xfrm>
           <a:prstGeom prst="rect">
             <a:avLst/>
@@ -6605,72 +6038,72 @@
           <a:bodyPr wrap="square" rtlCol="0" anchor="ctr"/>
           <a:lstStyle/>
           <a:p>
-            <a:pPr indent="0" marL="0">
-              <a:buNone/>
-            </a:pPr>
-            <a:r>
-              <a:rPr lang="en-US" sz="1500" b="1" dirty="0">
+            <a:pPr marL="0" indent="0">
+              <a:buNone/>
+            </a:pPr>
+            <a:r>
+              <a:rPr lang="en-US" sz="3000" b="1" dirty="0">
                 <a:solidFill>
                   <a:srgbClr val="1B1F23"/>
+                </a:solidFill>
+                <a:latin typeface="Cambria" pitchFamily="34" charset="0"/>
+                <a:ea typeface="Cambria" pitchFamily="34" charset="-122"/>
+                <a:cs typeface="Cambria" pitchFamily="34" charset="-120"/>
+              </a:rPr>
+              <a:t>AI in Action</a:t>
+            </a:r>
+            <a:endParaRPr lang="en-US" sz="3000" dirty="0"/>
+          </a:p>
+        </p:txBody>
+      </p:sp>
+      <p:sp>
+        <p:nvSpPr>
+          <p:cNvPr id="5" name="Text 2"/>
+          <p:cNvSpPr/>
+          <p:nvPr/>
+        </p:nvSpPr>
+        <p:spPr>
+          <a:xfrm>
+            <a:off x="731520" y="1234440"/>
+            <a:ext cx="10058400" cy="365760"/>
+          </a:xfrm>
+          <a:prstGeom prst="rect">
+            <a:avLst/>
+          </a:prstGeom>
+          <a:noFill/>
+          <a:ln/>
+        </p:spPr>
+        <p:txBody>
+          <a:bodyPr wrap="square" rtlCol="0" anchor="ctr"/>
+          <a:lstStyle/>
+          <a:p>
+            <a:pPr marL="0" indent="0">
+              <a:buNone/>
+            </a:pPr>
+            <a:r>
+              <a:rPr lang="en-US" sz="1400" i="1" dirty="0">
+                <a:solidFill>
+                  <a:srgbClr val="667085"/>
                 </a:solidFill>
                 <a:latin typeface="Calibri" pitchFamily="34" charset="0"/>
                 <a:ea typeface="Calibri" pitchFamily="34" charset="-122"/>
                 <a:cs typeface="Calibri" pitchFamily="34" charset="-120"/>
               </a:rPr>
-              <a:t>Predictive Forecasting</a:t>
-            </a:r>
-            <a:endParaRPr lang="en-US" sz="1500" dirty="0"/>
-          </a:p>
-        </p:txBody>
-      </p:sp>
-      <p:sp>
-        <p:nvSpPr>
-          <p:cNvPr id="13" name="Text 8"/>
-          <p:cNvSpPr/>
-          <p:nvPr/>
-        </p:nvSpPr>
-        <p:spPr>
-          <a:xfrm>
-            <a:off x="4663440" y="3291840"/>
-            <a:ext cx="6766560" cy="822960"/>
-          </a:xfrm>
-          <a:prstGeom prst="rect">
-            <a:avLst/>
-          </a:prstGeom>
-          <a:noFill/>
-          <a:ln/>
-        </p:spPr>
-        <p:txBody>
-          <a:bodyPr wrap="square" rtlCol="0" anchor="ctr"/>
-          <a:lstStyle/>
-          <a:p>
-            <a:pPr indent="0" marL="0">
-              <a:buNone/>
-            </a:pPr>
-            <a:r>
-              <a:rPr lang="en-US" sz="1250" dirty="0">
-                <a:solidFill>
-                  <a:srgbClr val="667085"/>
-                </a:solidFill>
-                <a:latin typeface="Calibri" pitchFamily="34" charset="0"/>
-                <a:ea typeface="Calibri" pitchFamily="34" charset="-122"/>
-                <a:cs typeface="Calibri" pitchFamily="34" charset="-120"/>
-              </a:rPr>
-              <a:t>A regression model forecasts each zone's AQI 24 hours ahead, trained on real CPCB + weather data accumulated live, bootstrapped with historical reanalysis data — clearly tagged as such.</a:t>
-            </a:r>
-            <a:endParaRPr lang="en-US" sz="1250" dirty="0"/>
-          </a:p>
-        </p:txBody>
-      </p:sp>
-      <p:sp>
-        <p:nvSpPr>
-          <p:cNvPr id="14" name="Shape 9"/>
-          <p:cNvSpPr/>
-          <p:nvPr/>
-        </p:nvSpPr>
-        <p:spPr>
-          <a:xfrm>
-            <a:off x="822960" y="4754880"/>
+              <a:t>Three distinct AI roles — each doing real interpretive work, not decoration</a:t>
+            </a:r>
+            <a:endParaRPr lang="en-US" sz="1400" dirty="0"/>
+          </a:p>
+        </p:txBody>
+      </p:sp>
+      <p:sp>
+        <p:nvSpPr>
+          <p:cNvPr id="6" name="Shape 3"/>
+          <p:cNvSpPr/>
+          <p:nvPr/>
+        </p:nvSpPr>
+        <p:spPr>
+          <a:xfrm>
+            <a:off x="822960" y="1920240"/>
             <a:ext cx="685800" cy="685800"/>
           </a:xfrm>
           <a:prstGeom prst="ellipse">
@@ -6684,7 +6117,7 @@
       </p:sp>
       <p:pic>
         <p:nvPicPr>
-          <p:cNvPr id="15" name="Image 3" descr="preencoded.png">    </p:cNvPr>
+          <p:cNvPr id="7" name="Image 1" descr="preencoded.png"/>
           <p:cNvPicPr>
             <a:picLocks noChangeAspect="1"/>
           </p:cNvPicPr>
@@ -6698,7 +6131,7 @@
         </p:blipFill>
         <p:spPr>
           <a:xfrm>
-            <a:off x="977265" y="4909185"/>
+            <a:off x="977265" y="2074545"/>
             <a:ext cx="377190" cy="377190"/>
           </a:xfrm>
           <a:prstGeom prst="rect">
@@ -6708,13 +6141,13 @@
       </p:pic>
       <p:sp>
         <p:nvSpPr>
-          <p:cNvPr id="16" name="Text 10"/>
-          <p:cNvSpPr/>
-          <p:nvPr/>
-        </p:nvSpPr>
-        <p:spPr>
-          <a:xfrm>
-            <a:off x="1783080" y="4709160"/>
+          <p:cNvPr id="8" name="Text 4"/>
+          <p:cNvSpPr/>
+          <p:nvPr/>
+        </p:nvSpPr>
+        <p:spPr>
+          <a:xfrm>
+            <a:off x="1783080" y="1874520"/>
             <a:ext cx="2743200" cy="777240"/>
           </a:xfrm>
           <a:prstGeom prst="rect">
@@ -6727,7 +6160,7 @@
           <a:bodyPr wrap="square" rtlCol="0" anchor="ctr"/>
           <a:lstStyle/>
           <a:p>
-            <a:pPr indent="0" marL="0">
+            <a:pPr marL="0" indent="0">
               <a:buNone/>
             </a:pPr>
             <a:r>
@@ -6739,6 +6172,250 @@
                 <a:ea typeface="Calibri" pitchFamily="34" charset="-122"/>
                 <a:cs typeface="Calibri" pitchFamily="34" charset="-120"/>
               </a:rPr>
+              <a:t>Vision Classification</a:t>
+            </a:r>
+            <a:endParaRPr lang="en-US" sz="1500" dirty="0"/>
+          </a:p>
+        </p:txBody>
+      </p:sp>
+      <p:sp>
+        <p:nvSpPr>
+          <p:cNvPr id="9" name="Text 5"/>
+          <p:cNvSpPr/>
+          <p:nvPr/>
+        </p:nvSpPr>
+        <p:spPr>
+          <a:xfrm>
+            <a:off x="4663440" y="1874520"/>
+            <a:ext cx="6766560" cy="822960"/>
+          </a:xfrm>
+          <a:prstGeom prst="rect">
+            <a:avLst/>
+          </a:prstGeom>
+          <a:noFill/>
+          <a:ln/>
+        </p:spPr>
+        <p:txBody>
+          <a:bodyPr wrap="square" rtlCol="0" anchor="ctr"/>
+          <a:lstStyle/>
+          <a:p>
+            <a:pPr marL="0" indent="0">
+              <a:buNone/>
+            </a:pPr>
+            <a:r>
+              <a:rPr lang="en-US" sz="1250" dirty="0">
+                <a:solidFill>
+                  <a:srgbClr val="667085"/>
+                </a:solidFill>
+                <a:latin typeface="Calibri" pitchFamily="34" charset="0"/>
+                <a:ea typeface="Calibri" pitchFamily="34" charset="-122"/>
+                <a:cs typeface="Calibri" pitchFamily="34" charset="-120"/>
+              </a:rPr>
+              <a:t>Gemini (via Firebase AI Logic) classifies each citizen photo into smoke, dust, garbage burning, haze, or none — with a severity score and a one-sentence reasoning, not just a label.</a:t>
+            </a:r>
+            <a:endParaRPr lang="en-US" sz="1250" dirty="0"/>
+          </a:p>
+        </p:txBody>
+      </p:sp>
+      <p:sp>
+        <p:nvSpPr>
+          <p:cNvPr id="10" name="Shape 6"/>
+          <p:cNvSpPr/>
+          <p:nvPr/>
+        </p:nvSpPr>
+        <p:spPr>
+          <a:xfrm>
+            <a:off x="822960" y="3337560"/>
+            <a:ext cx="685800" cy="685800"/>
+          </a:xfrm>
+          <a:prstGeom prst="ellipse">
+            <a:avLst/>
+          </a:prstGeom>
+          <a:solidFill>
+            <a:srgbClr val="E8F0FE"/>
+          </a:solidFill>
+          <a:ln/>
+        </p:spPr>
+      </p:sp>
+      <p:pic>
+        <p:nvPicPr>
+          <p:cNvPr id="11" name="Image 2" descr="preencoded.png"/>
+          <p:cNvPicPr>
+            <a:picLocks noChangeAspect="1"/>
+          </p:cNvPicPr>
+          <p:nvPr/>
+        </p:nvPicPr>
+        <p:blipFill>
+          <a:blip r:embed="rId5"/>
+          <a:stretch>
+            <a:fillRect/>
+          </a:stretch>
+        </p:blipFill>
+        <p:spPr>
+          <a:xfrm>
+            <a:off x="977265" y="3491865"/>
+            <a:ext cx="377190" cy="377190"/>
+          </a:xfrm>
+          <a:prstGeom prst="rect">
+            <a:avLst/>
+          </a:prstGeom>
+        </p:spPr>
+      </p:pic>
+      <p:sp>
+        <p:nvSpPr>
+          <p:cNvPr id="12" name="Text 7"/>
+          <p:cNvSpPr/>
+          <p:nvPr/>
+        </p:nvSpPr>
+        <p:spPr>
+          <a:xfrm>
+            <a:off x="1783080" y="3291840"/>
+            <a:ext cx="2743200" cy="777240"/>
+          </a:xfrm>
+          <a:prstGeom prst="rect">
+            <a:avLst/>
+          </a:prstGeom>
+          <a:noFill/>
+          <a:ln/>
+        </p:spPr>
+        <p:txBody>
+          <a:bodyPr wrap="square" rtlCol="0" anchor="ctr"/>
+          <a:lstStyle/>
+          <a:p>
+            <a:pPr marL="0" indent="0">
+              <a:buNone/>
+            </a:pPr>
+            <a:r>
+              <a:rPr lang="en-US" sz="1500" b="1" dirty="0">
+                <a:solidFill>
+                  <a:srgbClr val="1B1F23"/>
+                </a:solidFill>
+                <a:latin typeface="Calibri" pitchFamily="34" charset="0"/>
+                <a:ea typeface="Calibri" pitchFamily="34" charset="-122"/>
+                <a:cs typeface="Calibri" pitchFamily="34" charset="-120"/>
+              </a:rPr>
+              <a:t>Predictive Forecasting</a:t>
+            </a:r>
+            <a:endParaRPr lang="en-US" sz="1500" dirty="0"/>
+          </a:p>
+        </p:txBody>
+      </p:sp>
+      <p:sp>
+        <p:nvSpPr>
+          <p:cNvPr id="13" name="Text 8"/>
+          <p:cNvSpPr/>
+          <p:nvPr/>
+        </p:nvSpPr>
+        <p:spPr>
+          <a:xfrm>
+            <a:off x="4663440" y="3291840"/>
+            <a:ext cx="6766560" cy="822960"/>
+          </a:xfrm>
+          <a:prstGeom prst="rect">
+            <a:avLst/>
+          </a:prstGeom>
+          <a:noFill/>
+          <a:ln/>
+        </p:spPr>
+        <p:txBody>
+          <a:bodyPr wrap="square" rtlCol="0" anchor="ctr"/>
+          <a:lstStyle/>
+          <a:p>
+            <a:pPr marL="0" indent="0">
+              <a:buNone/>
+            </a:pPr>
+            <a:r>
+              <a:rPr lang="en-US" sz="1250" dirty="0">
+                <a:solidFill>
+                  <a:srgbClr val="667085"/>
+                </a:solidFill>
+                <a:latin typeface="Calibri" pitchFamily="34" charset="0"/>
+                <a:ea typeface="Calibri" pitchFamily="34" charset="-122"/>
+                <a:cs typeface="Calibri" pitchFamily="34" charset="-120"/>
+              </a:rPr>
+              <a:t>A regression model forecasts each zone's AQI 24 hours ahead, trained on real CPCB + weather data accumulated live, bootstrapped with historical reanalysis data — clearly tagged as such.</a:t>
+            </a:r>
+            <a:endParaRPr lang="en-US" sz="1250" dirty="0"/>
+          </a:p>
+        </p:txBody>
+      </p:sp>
+      <p:sp>
+        <p:nvSpPr>
+          <p:cNvPr id="14" name="Shape 9"/>
+          <p:cNvSpPr/>
+          <p:nvPr/>
+        </p:nvSpPr>
+        <p:spPr>
+          <a:xfrm>
+            <a:off x="822960" y="4754880"/>
+            <a:ext cx="685800" cy="685800"/>
+          </a:xfrm>
+          <a:prstGeom prst="ellipse">
+            <a:avLst/>
+          </a:prstGeom>
+          <a:solidFill>
+            <a:srgbClr val="E8F0FE"/>
+          </a:solidFill>
+          <a:ln/>
+        </p:spPr>
+      </p:sp>
+      <p:pic>
+        <p:nvPicPr>
+          <p:cNvPr id="15" name="Image 3" descr="preencoded.png"/>
+          <p:cNvPicPr>
+            <a:picLocks noChangeAspect="1"/>
+          </p:cNvPicPr>
+          <p:nvPr/>
+        </p:nvPicPr>
+        <p:blipFill>
+          <a:blip r:embed="rId6"/>
+          <a:stretch>
+            <a:fillRect/>
+          </a:stretch>
+        </p:blipFill>
+        <p:spPr>
+          <a:xfrm>
+            <a:off x="977265" y="4909185"/>
+            <a:ext cx="377190" cy="377190"/>
+          </a:xfrm>
+          <a:prstGeom prst="rect">
+            <a:avLst/>
+          </a:prstGeom>
+        </p:spPr>
+      </p:pic>
+      <p:sp>
+        <p:nvSpPr>
+          <p:cNvPr id="16" name="Text 10"/>
+          <p:cNvSpPr/>
+          <p:nvPr/>
+        </p:nvSpPr>
+        <p:spPr>
+          <a:xfrm>
+            <a:off x="1783080" y="4709160"/>
+            <a:ext cx="2743200" cy="777240"/>
+          </a:xfrm>
+          <a:prstGeom prst="rect">
+            <a:avLst/>
+          </a:prstGeom>
+          <a:noFill/>
+          <a:ln/>
+        </p:spPr>
+        <p:txBody>
+          <a:bodyPr wrap="square" rtlCol="0" anchor="ctr"/>
+          <a:lstStyle/>
+          <a:p>
+            <a:pPr marL="0" indent="0">
+              <a:buNone/>
+            </a:pPr>
+            <a:r>
+              <a:rPr lang="en-US" sz="1500" b="1" dirty="0">
+                <a:solidFill>
+                  <a:srgbClr val="1B1F23"/>
+                </a:solidFill>
+                <a:latin typeface="Calibri" pitchFamily="34" charset="0"/>
+                <a:ea typeface="Calibri" pitchFamily="34" charset="-122"/>
+                <a:cs typeface="Calibri" pitchFamily="34" charset="-120"/>
+              </a:rPr>
               <a:t>Bilingual Reasoning Briefing</a:t>
             </a:r>
             <a:endParaRPr lang="en-US" sz="1500" dirty="0"/>
@@ -6766,7 +6443,7 @@
           <a:bodyPr wrap="square" rtlCol="0" anchor="ctr"/>
           <a:lstStyle/>
           <a:p>
-            <a:pPr indent="0" marL="0">
+            <a:pPr marL="0" indent="0">
               <a:buNone/>
             </a:pPr>
             <a:r>
@@ -6800,6 +6477,7 @@
         <a:solidFill>
           <a:srgbClr val="FFFFFF"/>
         </a:solidFill>
+        <a:effectLst/>
       </p:bgPr>
     </p:bg>
     <p:spTree>
@@ -6838,14 +6516,14 @@
       </p:sp>
       <p:pic>
         <p:nvPicPr>
-          <p:cNvPr id="3" name="Image 0" descr="preencoded.png">    </p:cNvPr>
+          <p:cNvPr id="3" name="Image 0" descr="preencoded.png"/>
           <p:cNvPicPr>
             <a:picLocks noChangeAspect="1"/>
           </p:cNvPicPr>
           <p:nvPr/>
         </p:nvPicPr>
         <p:blipFill>
-          <a:blip r:embed="rId1"/>
+          <a:blip r:embed="rId3"/>
           <a:stretch>
             <a:fillRect/>
           </a:stretch>
@@ -6881,7 +6559,7 @@
           <a:bodyPr wrap="square" rtlCol="0" anchor="ctr"/>
           <a:lstStyle/>
           <a:p>
-            <a:pPr indent="0" marL="0">
+            <a:pPr marL="0" indent="0">
               <a:buNone/>
             </a:pPr>
             <a:r>
@@ -6947,7 +6625,7 @@
           <a:bodyPr wrap="square" rtlCol="0" anchor="ctr"/>
           <a:lstStyle/>
           <a:p>
-            <a:pPr algn="ctr" indent="0" marL="0">
+            <a:pPr marL="0" indent="0" algn="ctr">
               <a:buNone/>
             </a:pPr>
             <a:r>
@@ -6964,7 +6642,7 @@
             <a:endParaRPr lang="en-US" sz="1400" dirty="0"/>
           </a:p>
           <a:p>
-            <a:pPr algn="ctr" indent="0" marL="0">
+            <a:pPr marL="0" indent="0" algn="ctr">
               <a:buNone/>
             </a:pPr>
             <a:r>
@@ -6990,7 +6668,7 @@
         </p:nvSpPr>
         <p:spPr>
           <a:xfrm>
-            <a:off x="7863840" y="1554480"/>
+            <a:off x="8223536" y="1554480"/>
             <a:ext cx="411480" cy="411480"/>
           </a:xfrm>
           <a:prstGeom prst="ellipse">
@@ -7004,173 +6682,7 @@
       </p:sp>
       <p:pic>
         <p:nvPicPr>
-          <p:cNvPr id="8" name="Image 1" descr="preencoded.png">    </p:cNvPr>
-          <p:cNvPicPr>
-            <a:picLocks noChangeAspect="1"/>
-          </p:cNvPicPr>
-          <p:nvPr/>
-        </p:nvPicPr>
-        <p:blipFill>
-          <a:blip r:embed="rId2"/>
-          <a:stretch>
-            <a:fillRect/>
-          </a:stretch>
-        </p:blipFill>
-        <p:spPr>
-          <a:xfrm>
-            <a:off x="7956423" y="1647063"/>
-            <a:ext cx="226314" cy="226314"/>
-          </a:xfrm>
-          <a:prstGeom prst="rect">
-            <a:avLst/>
-          </a:prstGeom>
-        </p:spPr>
-      </p:pic>
-      <p:sp>
-        <p:nvSpPr>
-          <p:cNvPr id="9" name="Text 5"/>
-          <p:cNvSpPr/>
-          <p:nvPr/>
-        </p:nvSpPr>
-        <p:spPr>
-          <a:xfrm>
-            <a:off x="8412480" y="1508760"/>
-            <a:ext cx="3017520" cy="822960"/>
-          </a:xfrm>
-          <a:prstGeom prst="rect">
-            <a:avLst/>
-          </a:prstGeom>
-          <a:noFill/>
-          <a:ln/>
-        </p:spPr>
-        <p:txBody>
-          <a:bodyPr wrap="square" rtlCol="0" anchor="ctr"/>
-          <a:lstStyle/>
-          <a:p>
-            <a:pPr indent="0" marL="0">
-              <a:buNone/>
-            </a:pPr>
-            <a:r>
-              <a:rPr lang="en-US" sz="1250" dirty="0">
-                <a:solidFill>
-                  <a:srgbClr val="1B1F23"/>
-                </a:solidFill>
-                <a:latin typeface="Calibri" pitchFamily="34" charset="0"/>
-                <a:ea typeface="Calibri" pitchFamily="34" charset="-122"/>
-                <a:cs typeface="Calibri" pitchFamily="34" charset="-120"/>
-              </a:rPr>
-              <a:t>Zones ranked by AQI, colour-coded by severity</a:t>
-            </a:r>
-            <a:endParaRPr lang="en-US" sz="1250" dirty="0"/>
-          </a:p>
-        </p:txBody>
-      </p:sp>
-      <p:sp>
-        <p:nvSpPr>
-          <p:cNvPr id="10" name="Shape 6"/>
-          <p:cNvSpPr/>
-          <p:nvPr/>
-        </p:nvSpPr>
-        <p:spPr>
-          <a:xfrm>
-            <a:off x="7863840" y="2697480"/>
-            <a:ext cx="411480" cy="411480"/>
-          </a:xfrm>
-          <a:prstGeom prst="ellipse">
-            <a:avLst/>
-          </a:prstGeom>
-          <a:solidFill>
-            <a:srgbClr val="E6F4EA"/>
-          </a:solidFill>
-          <a:ln/>
-        </p:spPr>
-      </p:sp>
-      <p:pic>
-        <p:nvPicPr>
-          <p:cNvPr id="11" name="Image 2" descr="preencoded.png">    </p:cNvPr>
-          <p:cNvPicPr>
-            <a:picLocks noChangeAspect="1"/>
-          </p:cNvPicPr>
-          <p:nvPr/>
-        </p:nvPicPr>
-        <p:blipFill>
-          <a:blip r:embed="rId3"/>
-          <a:stretch>
-            <a:fillRect/>
-          </a:stretch>
-        </p:blipFill>
-        <p:spPr>
-          <a:xfrm>
-            <a:off x="7956423" y="2790063"/>
-            <a:ext cx="226314" cy="226314"/>
-          </a:xfrm>
-          <a:prstGeom prst="rect">
-            <a:avLst/>
-          </a:prstGeom>
-        </p:spPr>
-      </p:pic>
-      <p:sp>
-        <p:nvSpPr>
-          <p:cNvPr id="12" name="Text 7"/>
-          <p:cNvSpPr/>
-          <p:nvPr/>
-        </p:nvSpPr>
-        <p:spPr>
-          <a:xfrm>
-            <a:off x="8412480" y="2651760"/>
-            <a:ext cx="3017520" cy="822960"/>
-          </a:xfrm>
-          <a:prstGeom prst="rect">
-            <a:avLst/>
-          </a:prstGeom>
-          <a:noFill/>
-          <a:ln/>
-        </p:spPr>
-        <p:txBody>
-          <a:bodyPr wrap="square" rtlCol="0" anchor="ctr"/>
-          <a:lstStyle/>
-          <a:p>
-            <a:pPr indent="0" marL="0">
-              <a:buNone/>
-            </a:pPr>
-            <a:r>
-              <a:rPr lang="en-US" sz="1250" dirty="0">
-                <a:solidFill>
-                  <a:srgbClr val="1B1F23"/>
-                </a:solidFill>
-                <a:latin typeface="Calibri" pitchFamily="34" charset="0"/>
-                <a:ea typeface="Calibri" pitchFamily="34" charset="-122"/>
-                <a:cs typeface="Calibri" pitchFamily="34" charset="-120"/>
-              </a:rPr>
-              <a:t>Live map with hotspot markers + school/hospital icons</a:t>
-            </a:r>
-            <a:endParaRPr lang="en-US" sz="1250" dirty="0"/>
-          </a:p>
-        </p:txBody>
-      </p:sp>
-      <p:sp>
-        <p:nvSpPr>
-          <p:cNvPr id="13" name="Shape 8"/>
-          <p:cNvSpPr/>
-          <p:nvPr/>
-        </p:nvSpPr>
-        <p:spPr>
-          <a:xfrm>
-            <a:off x="7863840" y="3840480"/>
-            <a:ext cx="411480" cy="411480"/>
-          </a:xfrm>
-          <a:prstGeom prst="ellipse">
-            <a:avLst/>
-          </a:prstGeom>
-          <a:solidFill>
-            <a:srgbClr val="E6F4EA"/>
-          </a:solidFill>
-          <a:ln/>
-        </p:spPr>
-      </p:sp>
-      <p:pic>
-        <p:nvPicPr>
-          <p:cNvPr id="14" name="Image 3" descr="preencoded.png">    </p:cNvPr>
+          <p:cNvPr id="8" name="Image 1" descr="preencoded.png"/>
           <p:cNvPicPr>
             <a:picLocks noChangeAspect="1"/>
           </p:cNvPicPr>
@@ -7184,7 +6696,7 @@
         </p:blipFill>
         <p:spPr>
           <a:xfrm>
-            <a:off x="7956423" y="3933063"/>
+            <a:off x="8316119" y="1647063"/>
             <a:ext cx="226314" cy="226314"/>
           </a:xfrm>
           <a:prstGeom prst="rect">
@@ -7194,13 +6706,13 @@
       </p:pic>
       <p:sp>
         <p:nvSpPr>
-          <p:cNvPr id="15" name="Text 9"/>
-          <p:cNvSpPr/>
-          <p:nvPr/>
-        </p:nvSpPr>
-        <p:spPr>
-          <a:xfrm>
-            <a:off x="8412480" y="3794760"/>
+          <p:cNvPr id="9" name="Text 5"/>
+          <p:cNvSpPr/>
+          <p:nvPr/>
+        </p:nvSpPr>
+        <p:spPr>
+          <a:xfrm>
+            <a:off x="8772176" y="1508760"/>
             <a:ext cx="3017520" cy="822960"/>
           </a:xfrm>
           <a:prstGeom prst="rect">
@@ -7213,7 +6725,7 @@
           <a:bodyPr wrap="square" rtlCol="0" anchor="ctr"/>
           <a:lstStyle/>
           <a:p>
-            <a:pPr indent="0" marL="0">
+            <a:pPr marL="0" indent="0">
               <a:buNone/>
             </a:pPr>
             <a:r>
@@ -7225,7 +6737,7 @@
                 <a:ea typeface="Calibri" pitchFamily="34" charset="-122"/>
                 <a:cs typeface="Calibri" pitchFamily="34" charset="-120"/>
               </a:rPr>
-              <a:t>AI briefing per zone, in English or Hindi + voice playback</a:t>
+              <a:t>Zones ranked by AQI, colour-coded by severity</a:t>
             </a:r>
             <a:endParaRPr lang="en-US" sz="1250" dirty="0"/>
           </a:p>
@@ -7233,13 +6745,13 @@
       </p:sp>
       <p:sp>
         <p:nvSpPr>
-          <p:cNvPr id="16" name="Shape 10"/>
-          <p:cNvSpPr/>
-          <p:nvPr/>
-        </p:nvSpPr>
-        <p:spPr>
-          <a:xfrm>
-            <a:off x="7863840" y="4983480"/>
+          <p:cNvPr id="10" name="Shape 6"/>
+          <p:cNvSpPr/>
+          <p:nvPr/>
+        </p:nvSpPr>
+        <p:spPr>
+          <a:xfrm>
+            <a:off x="8223536" y="2697480"/>
             <a:ext cx="411480" cy="411480"/>
           </a:xfrm>
           <a:prstGeom prst="ellipse">
@@ -7253,21 +6765,21 @@
       </p:sp>
       <p:pic>
         <p:nvPicPr>
-          <p:cNvPr id="17" name="Image 4" descr="preencoded.png">    </p:cNvPr>
+          <p:cNvPr id="11" name="Image 2" descr="preencoded.png"/>
           <p:cNvPicPr>
             <a:picLocks noChangeAspect="1"/>
           </p:cNvPicPr>
           <p:nvPr/>
         </p:nvPicPr>
         <p:blipFill>
-          <a:blip r:embed="rId5"/>
+          <a:blip r:embed="rId4"/>
           <a:stretch>
             <a:fillRect/>
           </a:stretch>
         </p:blipFill>
         <p:spPr>
           <a:xfrm>
-            <a:off x="7956423" y="5076063"/>
+            <a:off x="8316119" y="2790063"/>
             <a:ext cx="226314" cy="226314"/>
           </a:xfrm>
           <a:prstGeom prst="rect">
@@ -7277,13 +6789,13 @@
       </p:pic>
       <p:sp>
         <p:nvSpPr>
-          <p:cNvPr id="18" name="Text 11"/>
-          <p:cNvSpPr/>
-          <p:nvPr/>
-        </p:nvSpPr>
-        <p:spPr>
-          <a:xfrm>
-            <a:off x="8412480" y="4937760"/>
+          <p:cNvPr id="12" name="Text 7"/>
+          <p:cNvSpPr/>
+          <p:nvPr/>
+        </p:nvSpPr>
+        <p:spPr>
+          <a:xfrm>
+            <a:off x="8772176" y="2651760"/>
             <a:ext cx="3017520" cy="822960"/>
           </a:xfrm>
           <a:prstGeom prst="rect">
@@ -7296,7 +6808,7 @@
           <a:bodyPr wrap="square" rtlCol="0" anchor="ctr"/>
           <a:lstStyle/>
           <a:p>
-            <a:pPr indent="0" marL="0">
+            <a:pPr marL="0" indent="0">
               <a:buNone/>
             </a:pPr>
             <a:r>
@@ -7308,12 +6820,209 @@
                 <a:ea typeface="Calibri" pitchFamily="34" charset="-122"/>
                 <a:cs typeface="Calibri" pitchFamily="34" charset="-120"/>
               </a:rPr>
+              <a:t>Live map with hotspot markers + school/hospital icons</a:t>
+            </a:r>
+            <a:endParaRPr lang="en-US" sz="1250" dirty="0"/>
+          </a:p>
+        </p:txBody>
+      </p:sp>
+      <p:sp>
+        <p:nvSpPr>
+          <p:cNvPr id="13" name="Shape 8"/>
+          <p:cNvSpPr/>
+          <p:nvPr/>
+        </p:nvSpPr>
+        <p:spPr>
+          <a:xfrm>
+            <a:off x="8223536" y="3840480"/>
+            <a:ext cx="411480" cy="411480"/>
+          </a:xfrm>
+          <a:prstGeom prst="ellipse">
+            <a:avLst/>
+          </a:prstGeom>
+          <a:solidFill>
+            <a:srgbClr val="E6F4EA"/>
+          </a:solidFill>
+          <a:ln/>
+        </p:spPr>
+      </p:sp>
+      <p:pic>
+        <p:nvPicPr>
+          <p:cNvPr id="14" name="Image 3" descr="preencoded.png"/>
+          <p:cNvPicPr>
+            <a:picLocks noChangeAspect="1"/>
+          </p:cNvPicPr>
+          <p:nvPr/>
+        </p:nvPicPr>
+        <p:blipFill>
+          <a:blip r:embed="rId4"/>
+          <a:stretch>
+            <a:fillRect/>
+          </a:stretch>
+        </p:blipFill>
+        <p:spPr>
+          <a:xfrm>
+            <a:off x="8316119" y="3933063"/>
+            <a:ext cx="226314" cy="226314"/>
+          </a:xfrm>
+          <a:prstGeom prst="rect">
+            <a:avLst/>
+          </a:prstGeom>
+        </p:spPr>
+      </p:pic>
+      <p:sp>
+        <p:nvSpPr>
+          <p:cNvPr id="15" name="Text 9"/>
+          <p:cNvSpPr/>
+          <p:nvPr/>
+        </p:nvSpPr>
+        <p:spPr>
+          <a:xfrm>
+            <a:off x="8772176" y="3794760"/>
+            <a:ext cx="3017520" cy="822960"/>
+          </a:xfrm>
+          <a:prstGeom prst="rect">
+            <a:avLst/>
+          </a:prstGeom>
+          <a:noFill/>
+          <a:ln/>
+        </p:spPr>
+        <p:txBody>
+          <a:bodyPr wrap="square" rtlCol="0" anchor="ctr"/>
+          <a:lstStyle/>
+          <a:p>
+            <a:pPr marL="0" indent="0">
+              <a:buNone/>
+            </a:pPr>
+            <a:r>
+              <a:rPr lang="en-US" sz="1250" dirty="0">
+                <a:solidFill>
+                  <a:srgbClr val="1B1F23"/>
+                </a:solidFill>
+                <a:latin typeface="Calibri" pitchFamily="34" charset="0"/>
+                <a:ea typeface="Calibri" pitchFamily="34" charset="-122"/>
+                <a:cs typeface="Calibri" pitchFamily="34" charset="-120"/>
+              </a:rPr>
+              <a:t>AI briefing per zone, in English or Hindi + voice playback</a:t>
+            </a:r>
+            <a:endParaRPr lang="en-US" sz="1250" dirty="0"/>
+          </a:p>
+        </p:txBody>
+      </p:sp>
+      <p:sp>
+        <p:nvSpPr>
+          <p:cNvPr id="16" name="Shape 10"/>
+          <p:cNvSpPr/>
+          <p:nvPr/>
+        </p:nvSpPr>
+        <p:spPr>
+          <a:xfrm>
+            <a:off x="8223536" y="4983480"/>
+            <a:ext cx="411480" cy="411480"/>
+          </a:xfrm>
+          <a:prstGeom prst="ellipse">
+            <a:avLst/>
+          </a:prstGeom>
+          <a:solidFill>
+            <a:srgbClr val="E6F4EA"/>
+          </a:solidFill>
+          <a:ln/>
+        </p:spPr>
+      </p:sp>
+      <p:pic>
+        <p:nvPicPr>
+          <p:cNvPr id="17" name="Image 4" descr="preencoded.png"/>
+          <p:cNvPicPr>
+            <a:picLocks noChangeAspect="1"/>
+          </p:cNvPicPr>
+          <p:nvPr/>
+        </p:nvPicPr>
+        <p:blipFill>
+          <a:blip r:embed="rId4"/>
+          <a:stretch>
+            <a:fillRect/>
+          </a:stretch>
+        </p:blipFill>
+        <p:spPr>
+          <a:xfrm>
+            <a:off x="8316119" y="5076063"/>
+            <a:ext cx="226314" cy="226314"/>
+          </a:xfrm>
+          <a:prstGeom prst="rect">
+            <a:avLst/>
+          </a:prstGeom>
+        </p:spPr>
+      </p:pic>
+      <p:sp>
+        <p:nvSpPr>
+          <p:cNvPr id="18" name="Text 11"/>
+          <p:cNvSpPr/>
+          <p:nvPr/>
+        </p:nvSpPr>
+        <p:spPr>
+          <a:xfrm>
+            <a:off x="8772176" y="4937760"/>
+            <a:ext cx="3017520" cy="822960"/>
+          </a:xfrm>
+          <a:prstGeom prst="rect">
+            <a:avLst/>
+          </a:prstGeom>
+          <a:noFill/>
+          <a:ln/>
+        </p:spPr>
+        <p:txBody>
+          <a:bodyPr wrap="square" rtlCol="0" anchor="ctr"/>
+          <a:lstStyle/>
+          <a:p>
+            <a:pPr marL="0" indent="0">
+              <a:buNone/>
+            </a:pPr>
+            <a:r>
+              <a:rPr lang="en-US" sz="1250" dirty="0">
+                <a:solidFill>
+                  <a:srgbClr val="1B1F23"/>
+                </a:solidFill>
+                <a:latin typeface="Calibri" pitchFamily="34" charset="0"/>
+                <a:ea typeface="Calibri" pitchFamily="34" charset="-122"/>
+                <a:cs typeface="Calibri" pitchFamily="34" charset="-120"/>
+              </a:rPr>
               <a:t>24h forecast badge and historical recurrence sparkline</a:t>
             </a:r>
             <a:endParaRPr lang="en-US" sz="1250" dirty="0"/>
           </a:p>
         </p:txBody>
       </p:sp>
+      <p:pic>
+        <p:nvPicPr>
+          <p:cNvPr id="20" name="Picture 19">
+            <a:extLst>
+              <a:ext uri="{FF2B5EF4-FFF2-40B4-BE49-F238E27FC236}">
+                <a16:creationId xmlns:a16="http://schemas.microsoft.com/office/drawing/2014/main" id="{F38395CA-F5AA-1C90-698A-D686139A4DF7}"/>
+              </a:ext>
+            </a:extLst>
+          </p:cNvPr>
+          <p:cNvPicPr>
+            <a:picLocks noChangeAspect="1"/>
+          </p:cNvPicPr>
+          <p:nvPr/>
+        </p:nvPicPr>
+        <p:blipFill>
+          <a:blip r:embed="rId5"/>
+          <a:srcRect r="2356"/>
+          <a:stretch>
+            <a:fillRect/>
+          </a:stretch>
+        </p:blipFill>
+        <p:spPr>
+          <a:xfrm>
+            <a:off x="140192" y="1175796"/>
+            <a:ext cx="7766336" cy="5312093"/>
+          </a:xfrm>
+          <a:prstGeom prst="rect">
+            <a:avLst/>
+          </a:prstGeom>
+        </p:spPr>
+      </p:pic>
     </p:spTree>
   </p:cSld>
   <p:clrMapOvr>
@@ -7330,6 +7039,7 @@
         <a:solidFill>
           <a:srgbClr val="FFFFFF"/>
         </a:solidFill>
+        <a:effectLst/>
       </p:bgPr>
     </p:bg>
     <p:spTree>
@@ -7368,270 +7078,7 @@
       </p:sp>
       <p:pic>
         <p:nvPicPr>
-          <p:cNvPr id="3" name="Image 0" descr="preencoded.png">    </p:cNvPr>
-          <p:cNvPicPr>
-            <a:picLocks noChangeAspect="1"/>
-          </p:cNvPicPr>
-          <p:nvPr/>
-        </p:nvPicPr>
-        <p:blipFill>
-          <a:blip r:embed="rId1"/>
-          <a:stretch>
-            <a:fillRect/>
-          </a:stretch>
-        </p:blipFill>
-        <p:spPr>
-          <a:xfrm>
-            <a:off x="875538" y="601218"/>
-            <a:ext cx="352044" cy="352044"/>
-          </a:xfrm>
-          <a:prstGeom prst="rect">
-            <a:avLst/>
-          </a:prstGeom>
-        </p:spPr>
-      </p:pic>
-      <p:sp>
-        <p:nvSpPr>
-          <p:cNvPr id="4" name="Text 1"/>
-          <p:cNvSpPr/>
-          <p:nvPr/>
-        </p:nvSpPr>
-        <p:spPr>
-          <a:xfrm>
-            <a:off x="1554480" y="457200"/>
-            <a:ext cx="7315200" cy="640080"/>
-          </a:xfrm>
-          <a:prstGeom prst="rect">
-            <a:avLst/>
-          </a:prstGeom>
-          <a:noFill/>
-          <a:ln/>
-        </p:spPr>
-        <p:txBody>
-          <a:bodyPr wrap="square" rtlCol="0" anchor="ctr"/>
-          <a:lstStyle/>
-          <a:p>
-            <a:pPr indent="0" marL="0">
-              <a:buNone/>
-            </a:pPr>
-            <a:r>
-              <a:rPr lang="en-US" sz="3000" b="1" dirty="0">
-                <a:solidFill>
-                  <a:srgbClr val="1B1F23"/>
-                </a:solidFill>
-                <a:latin typeface="Cambria" pitchFamily="34" charset="0"/>
-                <a:ea typeface="Cambria" pitchFamily="34" charset="-122"/>
-                <a:cs typeface="Cambria" pitchFamily="34" charset="-120"/>
-              </a:rPr>
-              <a:t>Who It Serves</a:t>
-            </a:r>
-            <a:endParaRPr lang="en-US" sz="3000" dirty="0"/>
-          </a:p>
-        </p:txBody>
-      </p:sp>
-      <p:sp>
-        <p:nvSpPr>
-          <p:cNvPr id="5" name="Shape 2"/>
-          <p:cNvSpPr/>
-          <p:nvPr/>
-        </p:nvSpPr>
-        <p:spPr>
-          <a:xfrm>
-            <a:off x="731520" y="1463040"/>
-            <a:ext cx="3383280" cy="2286000"/>
-          </a:xfrm>
-          <a:prstGeom prst="roundRect">
-            <a:avLst>
-              <a:gd name="adj" fmla="val 4000"/>
-            </a:avLst>
-          </a:prstGeom>
-          <a:solidFill>
-            <a:srgbClr val="F7F7F8"/>
-          </a:solidFill>
-          <a:ln/>
-          <a:effectLst>
-            <a:outerShdw sx="100000" sy="100000" kx="0" ky="0" algn="bl" rotWithShape="0" blurRad="101600" dist="38100" dir="2700000">
-              <a:srgbClr val="000000">
-                <a:alpha val="12000"/>
-              </a:srgbClr>
-            </a:outerShdw>
-          </a:effectLst>
-        </p:spPr>
-      </p:sp>
-      <p:sp>
-        <p:nvSpPr>
-          <p:cNvPr id="6" name="Shape 3"/>
-          <p:cNvSpPr/>
-          <p:nvPr/>
-        </p:nvSpPr>
-        <p:spPr>
-          <a:xfrm>
-            <a:off x="2034540" y="1737360"/>
-            <a:ext cx="777240" cy="777240"/>
-          </a:xfrm>
-          <a:prstGeom prst="ellipse">
-            <a:avLst/>
-          </a:prstGeom>
-          <a:solidFill>
-            <a:srgbClr val="E8F0FE"/>
-          </a:solidFill>
-          <a:ln/>
-        </p:spPr>
-      </p:sp>
-      <p:pic>
-        <p:nvPicPr>
-          <p:cNvPr id="7" name="Image 1" descr="preencoded.png">    </p:cNvPr>
-          <p:cNvPicPr>
-            <a:picLocks noChangeAspect="1"/>
-          </p:cNvPicPr>
-          <p:nvPr/>
-        </p:nvPicPr>
-        <p:blipFill>
-          <a:blip r:embed="rId2"/>
-          <a:stretch>
-            <a:fillRect/>
-          </a:stretch>
-        </p:blipFill>
-        <p:spPr>
-          <a:xfrm>
-            <a:off x="2209419" y="1912239"/>
-            <a:ext cx="427482" cy="427482"/>
-          </a:xfrm>
-          <a:prstGeom prst="rect">
-            <a:avLst/>
-          </a:prstGeom>
-        </p:spPr>
-      </p:pic>
-      <p:sp>
-        <p:nvSpPr>
-          <p:cNvPr id="8" name="Text 4"/>
-          <p:cNvSpPr/>
-          <p:nvPr/>
-        </p:nvSpPr>
-        <p:spPr>
-          <a:xfrm>
-            <a:off x="914400" y="2651760"/>
-            <a:ext cx="3017520" cy="457200"/>
-          </a:xfrm>
-          <a:prstGeom prst="rect">
-            <a:avLst/>
-          </a:prstGeom>
-          <a:noFill/>
-          <a:ln/>
-        </p:spPr>
-        <p:txBody>
-          <a:bodyPr wrap="square" rtlCol="0" anchor="ctr"/>
-          <a:lstStyle/>
-          <a:p>
-            <a:pPr algn="ctr" indent="0" marL="0">
-              <a:buNone/>
-            </a:pPr>
-            <a:r>
-              <a:rPr lang="en-US" sz="1400" b="1" dirty="0">
-                <a:solidFill>
-                  <a:srgbClr val="1B1F23"/>
-                </a:solidFill>
-                <a:latin typeface="Calibri" pitchFamily="34" charset="0"/>
-                <a:ea typeface="Calibri" pitchFamily="34" charset="-122"/>
-                <a:cs typeface="Calibri" pitchFamily="34" charset="-120"/>
-              </a:rPr>
-              <a:t>Municipal Cleanup Crews</a:t>
-            </a:r>
-            <a:endParaRPr lang="en-US" sz="1400" dirty="0"/>
-          </a:p>
-        </p:txBody>
-      </p:sp>
-      <p:sp>
-        <p:nvSpPr>
-          <p:cNvPr id="9" name="Text 5"/>
-          <p:cNvSpPr/>
-          <p:nvPr/>
-        </p:nvSpPr>
-        <p:spPr>
-          <a:xfrm>
-            <a:off x="1005840" y="3108960"/>
-            <a:ext cx="2834640" cy="594360"/>
-          </a:xfrm>
-          <a:prstGeom prst="rect">
-            <a:avLst/>
-          </a:prstGeom>
-          <a:noFill/>
-          <a:ln/>
-        </p:spPr>
-        <p:txBody>
-          <a:bodyPr wrap="square" rtlCol="0" anchor="ctr"/>
-          <a:lstStyle/>
-          <a:p>
-            <a:pPr algn="ctr" indent="0" marL="0">
-              <a:buNone/>
-            </a:pPr>
-            <a:r>
-              <a:rPr lang="en-US" sz="1150" dirty="0">
-                <a:solidFill>
-                  <a:srgbClr val="667085"/>
-                </a:solidFill>
-                <a:latin typeface="Calibri" pitchFamily="34" charset="0"/>
-                <a:ea typeface="Calibri" pitchFamily="34" charset="-122"/>
-                <a:cs typeface="Calibri" pitchFamily="34" charset="-120"/>
-              </a:rPr>
-              <a:t>Get a ranked, actionable list of where to deploy water-mist cannons and crews</a:t>
-            </a:r>
-            <a:endParaRPr lang="en-US" sz="1150" dirty="0"/>
-          </a:p>
-        </p:txBody>
-      </p:sp>
-      <p:sp>
-        <p:nvSpPr>
-          <p:cNvPr id="10" name="Shape 6"/>
-          <p:cNvSpPr/>
-          <p:nvPr/>
-        </p:nvSpPr>
-        <p:spPr>
-          <a:xfrm>
-            <a:off x="4434840" y="1463040"/>
-            <a:ext cx="3383280" cy="2286000"/>
-          </a:xfrm>
-          <a:prstGeom prst="roundRect">
-            <a:avLst>
-              <a:gd name="adj" fmla="val 4000"/>
-            </a:avLst>
-          </a:prstGeom>
-          <a:solidFill>
-            <a:srgbClr val="F7F7F8"/>
-          </a:solidFill>
-          <a:ln/>
-          <a:effectLst>
-            <a:outerShdw sx="100000" sy="100000" kx="0" ky="0" algn="bl" rotWithShape="0" blurRad="101600" dist="38100" dir="2700000">
-              <a:srgbClr val="000000">
-                <a:alpha val="12000"/>
-              </a:srgbClr>
-            </a:outerShdw>
-          </a:effectLst>
-        </p:spPr>
-      </p:sp>
-      <p:sp>
-        <p:nvSpPr>
-          <p:cNvPr id="11" name="Shape 7"/>
-          <p:cNvSpPr/>
-          <p:nvPr/>
-        </p:nvSpPr>
-        <p:spPr>
-          <a:xfrm>
-            <a:off x="5737860" y="1737360"/>
-            <a:ext cx="777240" cy="777240"/>
-          </a:xfrm>
-          <a:prstGeom prst="ellipse">
-            <a:avLst/>
-          </a:prstGeom>
-          <a:solidFill>
-            <a:srgbClr val="E8F0FE"/>
-          </a:solidFill>
-          <a:ln/>
-        </p:spPr>
-      </p:sp>
-      <p:pic>
-        <p:nvPicPr>
-          <p:cNvPr id="12" name="Image 2" descr="preencoded.png">    </p:cNvPr>
+          <p:cNvPr id="3" name="Image 0" descr="preencoded.png"/>
           <p:cNvPicPr>
             <a:picLocks noChangeAspect="1"/>
           </p:cNvPicPr>
@@ -7645,8 +7092,8 @@
         </p:blipFill>
         <p:spPr>
           <a:xfrm>
-            <a:off x="5912739" y="1912239"/>
-            <a:ext cx="427482" cy="427482"/>
+            <a:off x="875538" y="601218"/>
+            <a:ext cx="352044" cy="352044"/>
           </a:xfrm>
           <a:prstGeom prst="rect">
             <a:avLst/>
@@ -7655,14 +7102,14 @@
       </p:pic>
       <p:sp>
         <p:nvSpPr>
-          <p:cNvPr id="13" name="Text 8"/>
-          <p:cNvSpPr/>
-          <p:nvPr/>
-        </p:nvSpPr>
-        <p:spPr>
-          <a:xfrm>
-            <a:off x="4617720" y="2651760"/>
-            <a:ext cx="3017520" cy="457200"/>
+          <p:cNvPr id="4" name="Text 1"/>
+          <p:cNvSpPr/>
+          <p:nvPr/>
+        </p:nvSpPr>
+        <p:spPr>
+          <a:xfrm>
+            <a:off x="1554480" y="457200"/>
+            <a:ext cx="7315200" cy="640080"/>
           </a:xfrm>
           <a:prstGeom prst="rect">
             <a:avLst/>
@@ -7674,72 +7121,33 @@
           <a:bodyPr wrap="square" rtlCol="0" anchor="ctr"/>
           <a:lstStyle/>
           <a:p>
-            <a:pPr algn="ctr" indent="0" marL="0">
-              <a:buNone/>
-            </a:pPr>
-            <a:r>
-              <a:rPr lang="en-US" sz="1400" b="1" dirty="0">
+            <a:pPr marL="0" indent="0">
+              <a:buNone/>
+            </a:pPr>
+            <a:r>
+              <a:rPr lang="en-US" sz="3000" b="1" dirty="0">
                 <a:solidFill>
                   <a:srgbClr val="1B1F23"/>
                 </a:solidFill>
-                <a:latin typeface="Calibri" pitchFamily="34" charset="0"/>
-                <a:ea typeface="Calibri" pitchFamily="34" charset="-122"/>
-                <a:cs typeface="Calibri" pitchFamily="34" charset="-120"/>
-              </a:rPr>
-              <a:t>MP's Office &amp; District Officials</a:t>
-            </a:r>
-            <a:endParaRPr lang="en-US" sz="1400" dirty="0"/>
-          </a:p>
-        </p:txBody>
-      </p:sp>
-      <p:sp>
-        <p:nvSpPr>
-          <p:cNvPr id="14" name="Text 9"/>
-          <p:cNvSpPr/>
-          <p:nvPr/>
-        </p:nvSpPr>
-        <p:spPr>
-          <a:xfrm>
-            <a:off x="4709160" y="3108960"/>
-            <a:ext cx="2834640" cy="594360"/>
-          </a:xfrm>
-          <a:prstGeom prst="rect">
-            <a:avLst/>
-          </a:prstGeom>
-          <a:noFill/>
-          <a:ln/>
-        </p:spPr>
-        <p:txBody>
-          <a:bodyPr wrap="square" rtlCol="0" anchor="ctr"/>
-          <a:lstStyle/>
-          <a:p>
-            <a:pPr algn="ctr" indent="0" marL="0">
-              <a:buNone/>
-            </a:pPr>
-            <a:r>
-              <a:rPr lang="en-US" sz="1150" dirty="0">
-                <a:solidFill>
-                  <a:srgbClr val="667085"/>
-                </a:solidFill>
-                <a:latin typeface="Calibri" pitchFamily="34" charset="0"/>
-                <a:ea typeface="Calibri" pitchFamily="34" charset="-122"/>
-                <a:cs typeface="Calibri" pitchFamily="34" charset="-120"/>
-              </a:rPr>
-              <a:t>A 5-minute-readable briefing per zone, no technical background needed</a:t>
-            </a:r>
-            <a:endParaRPr lang="en-US" sz="1150" dirty="0"/>
-          </a:p>
-        </p:txBody>
-      </p:sp>
-      <p:sp>
-        <p:nvSpPr>
-          <p:cNvPr id="15" name="Shape 10"/>
-          <p:cNvSpPr/>
-          <p:nvPr/>
-        </p:nvSpPr>
-        <p:spPr>
-          <a:xfrm>
-            <a:off x="8138160" y="1463040"/>
+                <a:latin typeface="Cambria" pitchFamily="34" charset="0"/>
+                <a:ea typeface="Cambria" pitchFamily="34" charset="-122"/>
+                <a:cs typeface="Cambria" pitchFamily="34" charset="-120"/>
+              </a:rPr>
+              <a:t>Who It Serves</a:t>
+            </a:r>
+            <a:endParaRPr lang="en-US" sz="3000" dirty="0"/>
+          </a:p>
+        </p:txBody>
+      </p:sp>
+      <p:sp>
+        <p:nvSpPr>
+          <p:cNvPr id="5" name="Shape 2"/>
+          <p:cNvSpPr/>
+          <p:nvPr/>
+        </p:nvSpPr>
+        <p:spPr>
+          <a:xfrm>
+            <a:off x="731520" y="1463040"/>
             <a:ext cx="3383280" cy="2286000"/>
           </a:xfrm>
           <a:prstGeom prst="roundRect">
@@ -7752,7 +7160,7 @@
           </a:solidFill>
           <a:ln/>
           <a:effectLst>
-            <a:outerShdw sx="100000" sy="100000" kx="0" ky="0" algn="bl" rotWithShape="0" blurRad="101600" dist="38100" dir="2700000">
+            <a:outerShdw blurRad="101600" dist="38100" dir="2700000" algn="bl" rotWithShape="0">
               <a:srgbClr val="000000">
                 <a:alpha val="12000"/>
               </a:srgbClr>
@@ -7762,13 +7170,13 @@
       </p:sp>
       <p:sp>
         <p:nvSpPr>
-          <p:cNvPr id="16" name="Shape 11"/>
-          <p:cNvSpPr/>
-          <p:nvPr/>
-        </p:nvSpPr>
-        <p:spPr>
-          <a:xfrm>
-            <a:off x="9441180" y="1737360"/>
+          <p:cNvPr id="6" name="Shape 3"/>
+          <p:cNvSpPr/>
+          <p:nvPr/>
+        </p:nvSpPr>
+        <p:spPr>
+          <a:xfrm>
+            <a:off x="2034540" y="1737360"/>
             <a:ext cx="777240" cy="777240"/>
           </a:xfrm>
           <a:prstGeom prst="ellipse">
@@ -7782,7 +7190,7 @@
       </p:sp>
       <p:pic>
         <p:nvPicPr>
-          <p:cNvPr id="17" name="Image 3" descr="preencoded.png">    </p:cNvPr>
+          <p:cNvPr id="7" name="Image 1" descr="preencoded.png"/>
           <p:cNvPicPr>
             <a:picLocks noChangeAspect="1"/>
           </p:cNvPicPr>
@@ -7796,7 +7204,7 @@
         </p:blipFill>
         <p:spPr>
           <a:xfrm>
-            <a:off x="9616059" y="1912239"/>
+            <a:off x="2209419" y="1912239"/>
             <a:ext cx="427482" cy="427482"/>
           </a:xfrm>
           <a:prstGeom prst="rect">
@@ -7806,13 +7214,13 @@
       </p:pic>
       <p:sp>
         <p:nvSpPr>
-          <p:cNvPr id="18" name="Text 12"/>
-          <p:cNvSpPr/>
-          <p:nvPr/>
-        </p:nvSpPr>
-        <p:spPr>
-          <a:xfrm>
-            <a:off x="8321040" y="2651760"/>
+          <p:cNvPr id="8" name="Text 4"/>
+          <p:cNvSpPr/>
+          <p:nvPr/>
+        </p:nvSpPr>
+        <p:spPr>
+          <a:xfrm>
+            <a:off x="914400" y="2651760"/>
             <a:ext cx="3017520" cy="457200"/>
           </a:xfrm>
           <a:prstGeom prst="rect">
@@ -7825,7 +7233,7 @@
           <a:bodyPr wrap="square" rtlCol="0" anchor="ctr"/>
           <a:lstStyle/>
           <a:p>
-            <a:pPr algn="ctr" indent="0" marL="0">
+            <a:pPr marL="0" indent="0" algn="ctr">
               <a:buNone/>
             </a:pPr>
             <a:r>
@@ -7837,7 +7245,7 @@
                 <a:ea typeface="Calibri" pitchFamily="34" charset="-122"/>
                 <a:cs typeface="Calibri" pitchFamily="34" charset="-120"/>
               </a:rPr>
-              <a:t>Citizens</a:t>
+              <a:t>Municipal Cleanup Crews</a:t>
             </a:r>
             <a:endParaRPr lang="en-US" sz="1400" dirty="0"/>
           </a:p>
@@ -7845,13 +7253,13 @@
       </p:sp>
       <p:sp>
         <p:nvSpPr>
-          <p:cNvPr id="19" name="Text 13"/>
-          <p:cNvSpPr/>
-          <p:nvPr/>
-        </p:nvSpPr>
-        <p:spPr>
-          <a:xfrm>
-            <a:off x="8412480" y="3108960"/>
+          <p:cNvPr id="9" name="Text 5"/>
+          <p:cNvSpPr/>
+          <p:nvPr/>
+        </p:nvSpPr>
+        <p:spPr>
+          <a:xfrm>
+            <a:off x="1005840" y="3108960"/>
             <a:ext cx="2834640" cy="594360"/>
           </a:xfrm>
           <a:prstGeom prst="rect">
@@ -7864,7 +7272,7 @@
           <a:bodyPr wrap="square" rtlCol="0" anchor="ctr"/>
           <a:lstStyle/>
           <a:p>
-            <a:pPr algn="ctr" indent="0" marL="0">
+            <a:pPr marL="0" indent="0" algn="ctr">
               <a:buNone/>
             </a:pPr>
             <a:r>
@@ -7876,6 +7284,308 @@
                 <a:ea typeface="Calibri" pitchFamily="34" charset="-122"/>
                 <a:cs typeface="Calibri" pitchFamily="34" charset="-120"/>
               </a:rPr>
+              <a:t>Get a ranked, actionable list of where to deploy water-mist cannons and crews</a:t>
+            </a:r>
+            <a:endParaRPr lang="en-US" sz="1150" dirty="0"/>
+          </a:p>
+        </p:txBody>
+      </p:sp>
+      <p:sp>
+        <p:nvSpPr>
+          <p:cNvPr id="10" name="Shape 6"/>
+          <p:cNvSpPr/>
+          <p:nvPr/>
+        </p:nvSpPr>
+        <p:spPr>
+          <a:xfrm>
+            <a:off x="4434840" y="1463040"/>
+            <a:ext cx="3383280" cy="2286000"/>
+          </a:xfrm>
+          <a:prstGeom prst="roundRect">
+            <a:avLst>
+              <a:gd name="adj" fmla="val 4000"/>
+            </a:avLst>
+          </a:prstGeom>
+          <a:solidFill>
+            <a:srgbClr val="F7F7F8"/>
+          </a:solidFill>
+          <a:ln/>
+          <a:effectLst>
+            <a:outerShdw blurRad="101600" dist="38100" dir="2700000" algn="bl" rotWithShape="0">
+              <a:srgbClr val="000000">
+                <a:alpha val="12000"/>
+              </a:srgbClr>
+            </a:outerShdw>
+          </a:effectLst>
+        </p:spPr>
+      </p:sp>
+      <p:sp>
+        <p:nvSpPr>
+          <p:cNvPr id="11" name="Shape 7"/>
+          <p:cNvSpPr/>
+          <p:nvPr/>
+        </p:nvSpPr>
+        <p:spPr>
+          <a:xfrm>
+            <a:off x="5737860" y="1737360"/>
+            <a:ext cx="777240" cy="777240"/>
+          </a:xfrm>
+          <a:prstGeom prst="ellipse">
+            <a:avLst/>
+          </a:prstGeom>
+          <a:solidFill>
+            <a:srgbClr val="E8F0FE"/>
+          </a:solidFill>
+          <a:ln/>
+        </p:spPr>
+      </p:sp>
+      <p:pic>
+        <p:nvPicPr>
+          <p:cNvPr id="12" name="Image 2" descr="preencoded.png"/>
+          <p:cNvPicPr>
+            <a:picLocks noChangeAspect="1"/>
+          </p:cNvPicPr>
+          <p:nvPr/>
+        </p:nvPicPr>
+        <p:blipFill>
+          <a:blip r:embed="rId5"/>
+          <a:stretch>
+            <a:fillRect/>
+          </a:stretch>
+        </p:blipFill>
+        <p:spPr>
+          <a:xfrm>
+            <a:off x="5912739" y="1912239"/>
+            <a:ext cx="427482" cy="427482"/>
+          </a:xfrm>
+          <a:prstGeom prst="rect">
+            <a:avLst/>
+          </a:prstGeom>
+        </p:spPr>
+      </p:pic>
+      <p:sp>
+        <p:nvSpPr>
+          <p:cNvPr id="13" name="Text 8"/>
+          <p:cNvSpPr/>
+          <p:nvPr/>
+        </p:nvSpPr>
+        <p:spPr>
+          <a:xfrm>
+            <a:off x="4617720" y="2651760"/>
+            <a:ext cx="3017520" cy="457200"/>
+          </a:xfrm>
+          <a:prstGeom prst="rect">
+            <a:avLst/>
+          </a:prstGeom>
+          <a:noFill/>
+          <a:ln/>
+        </p:spPr>
+        <p:txBody>
+          <a:bodyPr wrap="square" rtlCol="0" anchor="ctr"/>
+          <a:lstStyle/>
+          <a:p>
+            <a:pPr marL="0" indent="0" algn="ctr">
+              <a:buNone/>
+            </a:pPr>
+            <a:r>
+              <a:rPr lang="en-US" sz="1400" b="1" dirty="0">
+                <a:solidFill>
+                  <a:srgbClr val="1B1F23"/>
+                </a:solidFill>
+                <a:latin typeface="Calibri" pitchFamily="34" charset="0"/>
+                <a:ea typeface="Calibri" pitchFamily="34" charset="-122"/>
+                <a:cs typeface="Calibri" pitchFamily="34" charset="-120"/>
+              </a:rPr>
+              <a:t>MP's Office &amp; District Officials</a:t>
+            </a:r>
+            <a:endParaRPr lang="en-US" sz="1400" dirty="0"/>
+          </a:p>
+        </p:txBody>
+      </p:sp>
+      <p:sp>
+        <p:nvSpPr>
+          <p:cNvPr id="14" name="Text 9"/>
+          <p:cNvSpPr/>
+          <p:nvPr/>
+        </p:nvSpPr>
+        <p:spPr>
+          <a:xfrm>
+            <a:off x="4709160" y="3108960"/>
+            <a:ext cx="2834640" cy="594360"/>
+          </a:xfrm>
+          <a:prstGeom prst="rect">
+            <a:avLst/>
+          </a:prstGeom>
+          <a:noFill/>
+          <a:ln/>
+        </p:spPr>
+        <p:txBody>
+          <a:bodyPr wrap="square" rtlCol="0" anchor="ctr"/>
+          <a:lstStyle/>
+          <a:p>
+            <a:pPr marL="0" indent="0" algn="ctr">
+              <a:buNone/>
+            </a:pPr>
+            <a:r>
+              <a:rPr lang="en-US" sz="1150" dirty="0">
+                <a:solidFill>
+                  <a:srgbClr val="667085"/>
+                </a:solidFill>
+                <a:latin typeface="Calibri" pitchFamily="34" charset="0"/>
+                <a:ea typeface="Calibri" pitchFamily="34" charset="-122"/>
+                <a:cs typeface="Calibri" pitchFamily="34" charset="-120"/>
+              </a:rPr>
+              <a:t>A 5-minute-readable briefing per zone, no technical background needed</a:t>
+            </a:r>
+            <a:endParaRPr lang="en-US" sz="1150" dirty="0"/>
+          </a:p>
+        </p:txBody>
+      </p:sp>
+      <p:sp>
+        <p:nvSpPr>
+          <p:cNvPr id="15" name="Shape 10"/>
+          <p:cNvSpPr/>
+          <p:nvPr/>
+        </p:nvSpPr>
+        <p:spPr>
+          <a:xfrm>
+            <a:off x="8138160" y="1463040"/>
+            <a:ext cx="3383280" cy="2286000"/>
+          </a:xfrm>
+          <a:prstGeom prst="roundRect">
+            <a:avLst>
+              <a:gd name="adj" fmla="val 4000"/>
+            </a:avLst>
+          </a:prstGeom>
+          <a:solidFill>
+            <a:srgbClr val="F7F7F8"/>
+          </a:solidFill>
+          <a:ln/>
+          <a:effectLst>
+            <a:outerShdw blurRad="101600" dist="38100" dir="2700000" algn="bl" rotWithShape="0">
+              <a:srgbClr val="000000">
+                <a:alpha val="12000"/>
+              </a:srgbClr>
+            </a:outerShdw>
+          </a:effectLst>
+        </p:spPr>
+      </p:sp>
+      <p:sp>
+        <p:nvSpPr>
+          <p:cNvPr id="16" name="Shape 11"/>
+          <p:cNvSpPr/>
+          <p:nvPr/>
+        </p:nvSpPr>
+        <p:spPr>
+          <a:xfrm>
+            <a:off x="9441180" y="1737360"/>
+            <a:ext cx="777240" cy="777240"/>
+          </a:xfrm>
+          <a:prstGeom prst="ellipse">
+            <a:avLst/>
+          </a:prstGeom>
+          <a:solidFill>
+            <a:srgbClr val="E8F0FE"/>
+          </a:solidFill>
+          <a:ln/>
+        </p:spPr>
+      </p:sp>
+      <p:pic>
+        <p:nvPicPr>
+          <p:cNvPr id="17" name="Image 3" descr="preencoded.png"/>
+          <p:cNvPicPr>
+            <a:picLocks noChangeAspect="1"/>
+          </p:cNvPicPr>
+          <p:nvPr/>
+        </p:nvPicPr>
+        <p:blipFill>
+          <a:blip r:embed="rId3"/>
+          <a:stretch>
+            <a:fillRect/>
+          </a:stretch>
+        </p:blipFill>
+        <p:spPr>
+          <a:xfrm>
+            <a:off x="9616059" y="1912239"/>
+            <a:ext cx="427482" cy="427482"/>
+          </a:xfrm>
+          <a:prstGeom prst="rect">
+            <a:avLst/>
+          </a:prstGeom>
+        </p:spPr>
+      </p:pic>
+      <p:sp>
+        <p:nvSpPr>
+          <p:cNvPr id="18" name="Text 12"/>
+          <p:cNvSpPr/>
+          <p:nvPr/>
+        </p:nvSpPr>
+        <p:spPr>
+          <a:xfrm>
+            <a:off x="8321040" y="2651760"/>
+            <a:ext cx="3017520" cy="457200"/>
+          </a:xfrm>
+          <a:prstGeom prst="rect">
+            <a:avLst/>
+          </a:prstGeom>
+          <a:noFill/>
+          <a:ln/>
+        </p:spPr>
+        <p:txBody>
+          <a:bodyPr wrap="square" rtlCol="0" anchor="ctr"/>
+          <a:lstStyle/>
+          <a:p>
+            <a:pPr marL="0" indent="0" algn="ctr">
+              <a:buNone/>
+            </a:pPr>
+            <a:r>
+              <a:rPr lang="en-US" sz="1400" b="1" dirty="0">
+                <a:solidFill>
+                  <a:srgbClr val="1B1F23"/>
+                </a:solidFill>
+                <a:latin typeface="Calibri" pitchFamily="34" charset="0"/>
+                <a:ea typeface="Calibri" pitchFamily="34" charset="-122"/>
+                <a:cs typeface="Calibri" pitchFamily="34" charset="-120"/>
+              </a:rPr>
+              <a:t>Citizens</a:t>
+            </a:r>
+            <a:endParaRPr lang="en-US" sz="1400" dirty="0"/>
+          </a:p>
+        </p:txBody>
+      </p:sp>
+      <p:sp>
+        <p:nvSpPr>
+          <p:cNvPr id="19" name="Text 13"/>
+          <p:cNvSpPr/>
+          <p:nvPr/>
+        </p:nvSpPr>
+        <p:spPr>
+          <a:xfrm>
+            <a:off x="8412480" y="3108960"/>
+            <a:ext cx="2834640" cy="594360"/>
+          </a:xfrm>
+          <a:prstGeom prst="rect">
+            <a:avLst/>
+          </a:prstGeom>
+          <a:noFill/>
+          <a:ln/>
+        </p:spPr>
+        <p:txBody>
+          <a:bodyPr wrap="square" rtlCol="0" anchor="ctr"/>
+          <a:lstStyle/>
+          <a:p>
+            <a:pPr marL="0" indent="0" algn="ctr">
+              <a:buNone/>
+            </a:pPr>
+            <a:r>
+              <a:rPr lang="en-US" sz="1150" dirty="0">
+                <a:solidFill>
+                  <a:srgbClr val="667085"/>
+                </a:solidFill>
+                <a:latin typeface="Calibri" pitchFamily="34" charset="0"/>
+                <a:ea typeface="Calibri" pitchFamily="34" charset="-122"/>
+                <a:cs typeface="Calibri" pitchFamily="34" charset="-120"/>
+              </a:rPr>
               <a:t>Report a source, and see it acknowledged when it shapes the live map</a:t>
             </a:r>
             <a:endParaRPr lang="en-US" sz="1150" dirty="0"/>
@@ -7903,7 +7613,7 @@
           <a:bodyPr wrap="square" rtlCol="0" anchor="ctr"/>
           <a:lstStyle/>
           <a:p>
-            <a:pPr algn="ctr" indent="0" marL="0">
+            <a:pPr marL="0" indent="0" algn="ctr">
               <a:buNone/>
             </a:pPr>
             <a:r>
@@ -7942,7 +7652,7 @@
           <a:bodyPr wrap="square" rtlCol="0" anchor="ctr"/>
           <a:lstStyle/>
           <a:p>
-            <a:pPr algn="ctr" indent="0" marL="0">
+            <a:pPr marL="0" indent="0" algn="ctr">
               <a:buNone/>
             </a:pPr>
             <a:r>
@@ -7959,7 +7669,7 @@
             <a:endParaRPr lang="en-US" sz="1250" dirty="0"/>
           </a:p>
           <a:p>
-            <a:pPr algn="ctr" indent="0" marL="0">
+            <a:pPr marL="0" indent="0" algn="ctr">
               <a:buNone/>
             </a:pPr>
             <a:r>
@@ -7998,7 +7708,7 @@
           <a:bodyPr wrap="square" rtlCol="0" anchor="ctr"/>
           <a:lstStyle/>
           <a:p>
-            <a:pPr algn="ctr" indent="0" marL="0">
+            <a:pPr marL="0" indent="0" algn="ctr">
               <a:buNone/>
             </a:pPr>
             <a:r>
@@ -8037,7 +7747,7 @@
           <a:bodyPr wrap="square" rtlCol="0" anchor="ctr"/>
           <a:lstStyle/>
           <a:p>
-            <a:pPr algn="ctr" indent="0" marL="0">
+            <a:pPr marL="0" indent="0" algn="ctr">
               <a:buNone/>
             </a:pPr>
             <a:r>
@@ -8054,7 +7764,7 @@
             <a:endParaRPr lang="en-US" sz="1250" dirty="0"/>
           </a:p>
           <a:p>
-            <a:pPr algn="ctr" indent="0" marL="0">
+            <a:pPr marL="0" indent="0" algn="ctr">
               <a:buNone/>
             </a:pPr>
             <a:r>
@@ -8093,7 +7803,7 @@
           <a:bodyPr wrap="square" rtlCol="0" anchor="ctr"/>
           <a:lstStyle/>
           <a:p>
-            <a:pPr algn="ctr" indent="0" marL="0">
+            <a:pPr marL="0" indent="0" algn="ctr">
               <a:buNone/>
             </a:pPr>
             <a:r>
@@ -8132,7 +7842,7 @@
           <a:bodyPr wrap="square" rtlCol="0" anchor="ctr"/>
           <a:lstStyle/>
           <a:p>
-            <a:pPr algn="ctr" indent="0" marL="0">
+            <a:pPr marL="0" indent="0" algn="ctr">
               <a:buNone/>
             </a:pPr>
             <a:r>
@@ -8149,7 +7859,7 @@
             <a:endParaRPr lang="en-US" sz="1250" dirty="0"/>
           </a:p>
           <a:p>
-            <a:pPr algn="ctr" indent="0" marL="0">
+            <a:pPr marL="0" indent="0" algn="ctr">
               <a:buNone/>
             </a:pPr>
             <a:r>
@@ -8183,6 +7893,7 @@
         <a:solidFill>
           <a:srgbClr val="FFFFFF"/>
         </a:solidFill>
+        <a:effectLst/>
       </p:bgPr>
     </p:bg>
     <p:spTree>
@@ -8221,270 +7932,7 @@
       </p:sp>
       <p:pic>
         <p:nvPicPr>
-          <p:cNvPr id="3" name="Image 0" descr="preencoded.png">    </p:cNvPr>
-          <p:cNvPicPr>
-            <a:picLocks noChangeAspect="1"/>
-          </p:cNvPicPr>
-          <p:nvPr/>
-        </p:nvPicPr>
-        <p:blipFill>
-          <a:blip r:embed="rId1"/>
-          <a:stretch>
-            <a:fillRect/>
-          </a:stretch>
-        </p:blipFill>
-        <p:spPr>
-          <a:xfrm>
-            <a:off x="875538" y="601218"/>
-            <a:ext cx="352044" cy="352044"/>
-          </a:xfrm>
-          <a:prstGeom prst="rect">
-            <a:avLst/>
-          </a:prstGeom>
-        </p:spPr>
-      </p:pic>
-      <p:sp>
-        <p:nvSpPr>
-          <p:cNvPr id="4" name="Text 1"/>
-          <p:cNvSpPr/>
-          <p:nvPr/>
-        </p:nvSpPr>
-        <p:spPr>
-          <a:xfrm>
-            <a:off x="1554480" y="457200"/>
-            <a:ext cx="8229600" cy="640080"/>
-          </a:xfrm>
-          <a:prstGeom prst="rect">
-            <a:avLst/>
-          </a:prstGeom>
-          <a:noFill/>
-          <a:ln/>
-        </p:spPr>
-        <p:txBody>
-          <a:bodyPr wrap="square" rtlCol="0" anchor="ctr"/>
-          <a:lstStyle/>
-          <a:p>
-            <a:pPr indent="0" marL="0">
-              <a:buNone/>
-            </a:pPr>
-            <a:r>
-              <a:rPr lang="en-US" sz="3000" b="1" dirty="0">
-                <a:solidFill>
-                  <a:srgbClr val="1B1F23"/>
-                </a:solidFill>
-                <a:latin typeface="Cambria" pitchFamily="34" charset="0"/>
-                <a:ea typeface="Cambria" pitchFamily="34" charset="-122"/>
-                <a:cs typeface="Cambria" pitchFamily="34" charset="-120"/>
-              </a:rPr>
-              <a:t>Inclusivity &amp; Accessibility</a:t>
-            </a:r>
-            <a:endParaRPr lang="en-US" sz="3000" dirty="0"/>
-          </a:p>
-        </p:txBody>
-      </p:sp>
-      <p:sp>
-        <p:nvSpPr>
-          <p:cNvPr id="5" name="Shape 2"/>
-          <p:cNvSpPr/>
-          <p:nvPr/>
-        </p:nvSpPr>
-        <p:spPr>
-          <a:xfrm>
-            <a:off x="731520" y="1554480"/>
-            <a:ext cx="3383280" cy="2926080"/>
-          </a:xfrm>
-          <a:prstGeom prst="roundRect">
-            <a:avLst>
-              <a:gd name="adj" fmla="val 3125"/>
-            </a:avLst>
-          </a:prstGeom>
-          <a:solidFill>
-            <a:srgbClr val="F7F7F8"/>
-          </a:solidFill>
-          <a:ln/>
-          <a:effectLst>
-            <a:outerShdw sx="100000" sy="100000" kx="0" ky="0" algn="bl" rotWithShape="0" blurRad="101600" dist="38100" dir="2700000">
-              <a:srgbClr val="000000">
-                <a:alpha val="12000"/>
-              </a:srgbClr>
-            </a:outerShdw>
-          </a:effectLst>
-        </p:spPr>
-      </p:sp>
-      <p:sp>
-        <p:nvSpPr>
-          <p:cNvPr id="6" name="Shape 3"/>
-          <p:cNvSpPr/>
-          <p:nvPr/>
-        </p:nvSpPr>
-        <p:spPr>
-          <a:xfrm>
-            <a:off x="2011680" y="1874520"/>
-            <a:ext cx="822960" cy="822960"/>
-          </a:xfrm>
-          <a:prstGeom prst="ellipse">
-            <a:avLst/>
-          </a:prstGeom>
-          <a:solidFill>
-            <a:srgbClr val="E6F4EA"/>
-          </a:solidFill>
-          <a:ln/>
-        </p:spPr>
-      </p:sp>
-      <p:pic>
-        <p:nvPicPr>
-          <p:cNvPr id="7" name="Image 1" descr="preencoded.png">    </p:cNvPr>
-          <p:cNvPicPr>
-            <a:picLocks noChangeAspect="1"/>
-          </p:cNvPicPr>
-          <p:nvPr/>
-        </p:nvPicPr>
-        <p:blipFill>
-          <a:blip r:embed="rId2"/>
-          <a:stretch>
-            <a:fillRect/>
-          </a:stretch>
-        </p:blipFill>
-        <p:spPr>
-          <a:xfrm>
-            <a:off x="2196846" y="2059686"/>
-            <a:ext cx="452628" cy="452628"/>
-          </a:xfrm>
-          <a:prstGeom prst="rect">
-            <a:avLst/>
-          </a:prstGeom>
-        </p:spPr>
-      </p:pic>
-      <p:sp>
-        <p:nvSpPr>
-          <p:cNvPr id="8" name="Text 4"/>
-          <p:cNvSpPr/>
-          <p:nvPr/>
-        </p:nvSpPr>
-        <p:spPr>
-          <a:xfrm>
-            <a:off x="914400" y="2880360"/>
-            <a:ext cx="3017520" cy="457200"/>
-          </a:xfrm>
-          <a:prstGeom prst="rect">
-            <a:avLst/>
-          </a:prstGeom>
-          <a:noFill/>
-          <a:ln/>
-        </p:spPr>
-        <p:txBody>
-          <a:bodyPr wrap="square" rtlCol="0" anchor="ctr"/>
-          <a:lstStyle/>
-          <a:p>
-            <a:pPr algn="ctr" indent="0" marL="0">
-              <a:buNone/>
-            </a:pPr>
-            <a:r>
-              <a:rPr lang="en-US" sz="1500" b="1" dirty="0">
-                <a:solidFill>
-                  <a:srgbClr val="1B1F23"/>
-                </a:solidFill>
-                <a:latin typeface="Calibri" pitchFamily="34" charset="0"/>
-                <a:ea typeface="Calibri" pitchFamily="34" charset="-122"/>
-                <a:cs typeface="Calibri" pitchFamily="34" charset="-120"/>
-              </a:rPr>
-              <a:t>English + Hindi</a:t>
-            </a:r>
-            <a:endParaRPr lang="en-US" sz="1500" dirty="0"/>
-          </a:p>
-        </p:txBody>
-      </p:sp>
-      <p:sp>
-        <p:nvSpPr>
-          <p:cNvPr id="9" name="Text 5"/>
-          <p:cNvSpPr/>
-          <p:nvPr/>
-        </p:nvSpPr>
-        <p:spPr>
-          <a:xfrm>
-            <a:off x="1005840" y="3383280"/>
-            <a:ext cx="2834640" cy="1005840"/>
-          </a:xfrm>
-          <a:prstGeom prst="rect">
-            <a:avLst/>
-          </a:prstGeom>
-          <a:noFill/>
-          <a:ln/>
-        </p:spPr>
-        <p:txBody>
-          <a:bodyPr wrap="square" rtlCol="0" anchor="ctr"/>
-          <a:lstStyle/>
-          <a:p>
-            <a:pPr algn="ctr" indent="0" marL="0">
-              <a:buNone/>
-            </a:pPr>
-            <a:r>
-              <a:rPr lang="en-US" sz="1200" dirty="0">
-                <a:solidFill>
-                  <a:srgbClr val="667085"/>
-                </a:solidFill>
-                <a:latin typeface="Calibri" pitchFamily="34" charset="0"/>
-                <a:ea typeface="Calibri" pitchFamily="34" charset="-122"/>
-                <a:cs typeface="Calibri" pitchFamily="34" charset="-120"/>
-              </a:rPr>
-              <a:t>Every label, action, and AI briefing switches language instantly — including zone names</a:t>
-            </a:r>
-            <a:endParaRPr lang="en-US" sz="1200" dirty="0"/>
-          </a:p>
-        </p:txBody>
-      </p:sp>
-      <p:sp>
-        <p:nvSpPr>
-          <p:cNvPr id="10" name="Shape 6"/>
-          <p:cNvSpPr/>
-          <p:nvPr/>
-        </p:nvSpPr>
-        <p:spPr>
-          <a:xfrm>
-            <a:off x="4434840" y="1554480"/>
-            <a:ext cx="3383280" cy="2926080"/>
-          </a:xfrm>
-          <a:prstGeom prst="roundRect">
-            <a:avLst>
-              <a:gd name="adj" fmla="val 3125"/>
-            </a:avLst>
-          </a:prstGeom>
-          <a:solidFill>
-            <a:srgbClr val="F7F7F8"/>
-          </a:solidFill>
-          <a:ln/>
-          <a:effectLst>
-            <a:outerShdw sx="100000" sy="100000" kx="0" ky="0" algn="bl" rotWithShape="0" blurRad="101600" dist="38100" dir="2700000">
-              <a:srgbClr val="000000">
-                <a:alpha val="12000"/>
-              </a:srgbClr>
-            </a:outerShdw>
-          </a:effectLst>
-        </p:spPr>
-      </p:sp>
-      <p:sp>
-        <p:nvSpPr>
-          <p:cNvPr id="11" name="Shape 7"/>
-          <p:cNvSpPr/>
-          <p:nvPr/>
-        </p:nvSpPr>
-        <p:spPr>
-          <a:xfrm>
-            <a:off x="5715000" y="1874520"/>
-            <a:ext cx="822960" cy="822960"/>
-          </a:xfrm>
-          <a:prstGeom prst="ellipse">
-            <a:avLst/>
-          </a:prstGeom>
-          <a:solidFill>
-            <a:srgbClr val="E6F4EA"/>
-          </a:solidFill>
-          <a:ln/>
-        </p:spPr>
-      </p:sp>
-      <p:pic>
-        <p:nvPicPr>
-          <p:cNvPr id="12" name="Image 2" descr="preencoded.png">    </p:cNvPr>
+          <p:cNvPr id="3" name="Image 0" descr="preencoded.png"/>
           <p:cNvPicPr>
             <a:picLocks noChangeAspect="1"/>
           </p:cNvPicPr>
@@ -8498,8 +7946,8 @@
         </p:blipFill>
         <p:spPr>
           <a:xfrm>
-            <a:off x="5900166" y="2059686"/>
-            <a:ext cx="452628" cy="452628"/>
+            <a:off x="875538" y="601218"/>
+            <a:ext cx="352044" cy="352044"/>
           </a:xfrm>
           <a:prstGeom prst="rect">
             <a:avLst/>
@@ -8508,14 +7956,14 @@
       </p:pic>
       <p:sp>
         <p:nvSpPr>
-          <p:cNvPr id="13" name="Text 8"/>
-          <p:cNvSpPr/>
-          <p:nvPr/>
-        </p:nvSpPr>
-        <p:spPr>
-          <a:xfrm>
-            <a:off x="4617720" y="2880360"/>
-            <a:ext cx="3017520" cy="457200"/>
+          <p:cNvPr id="4" name="Text 1"/>
+          <p:cNvSpPr/>
+          <p:nvPr/>
+        </p:nvSpPr>
+        <p:spPr>
+          <a:xfrm>
+            <a:off x="1554480" y="457200"/>
+            <a:ext cx="8229600" cy="640080"/>
           </a:xfrm>
           <a:prstGeom prst="rect">
             <a:avLst/>
@@ -8527,72 +7975,33 @@
           <a:bodyPr wrap="square" rtlCol="0" anchor="ctr"/>
           <a:lstStyle/>
           <a:p>
-            <a:pPr algn="ctr" indent="0" marL="0">
-              <a:buNone/>
-            </a:pPr>
-            <a:r>
-              <a:rPr lang="en-US" sz="1500" b="1" dirty="0">
+            <a:pPr marL="0" indent="0">
+              <a:buNone/>
+            </a:pPr>
+            <a:r>
+              <a:rPr lang="en-US" sz="3000" b="1" dirty="0">
                 <a:solidFill>
                   <a:srgbClr val="1B1F23"/>
                 </a:solidFill>
-                <a:latin typeface="Calibri" pitchFamily="34" charset="0"/>
-                <a:ea typeface="Calibri" pitchFamily="34" charset="-122"/>
-                <a:cs typeface="Calibri" pitchFamily="34" charset="-120"/>
-              </a:rPr>
-              <a:t>Voice Playback</a:t>
-            </a:r>
-            <a:endParaRPr lang="en-US" sz="1500" dirty="0"/>
-          </a:p>
-        </p:txBody>
-      </p:sp>
-      <p:sp>
-        <p:nvSpPr>
-          <p:cNvPr id="14" name="Text 9"/>
-          <p:cNvSpPr/>
-          <p:nvPr/>
-        </p:nvSpPr>
-        <p:spPr>
-          <a:xfrm>
-            <a:off x="4709160" y="3383280"/>
-            <a:ext cx="2834640" cy="1005840"/>
-          </a:xfrm>
-          <a:prstGeom prst="rect">
-            <a:avLst/>
-          </a:prstGeom>
-          <a:noFill/>
-          <a:ln/>
-        </p:spPr>
-        <p:txBody>
-          <a:bodyPr wrap="square" rtlCol="0" anchor="ctr"/>
-          <a:lstStyle/>
-          <a:p>
-            <a:pPr algn="ctr" indent="0" marL="0">
-              <a:buNone/>
-            </a:pPr>
-            <a:r>
-              <a:rPr lang="en-US" sz="1200" dirty="0">
-                <a:solidFill>
-                  <a:srgbClr val="667085"/>
-                </a:solidFill>
-                <a:latin typeface="Calibri" pitchFamily="34" charset="0"/>
-                <a:ea typeface="Calibri" pitchFamily="34" charset="-122"/>
-                <a:cs typeface="Calibri" pitchFamily="34" charset="-120"/>
-              </a:rPr>
-              <a:t>Browser text-to-speech reads any briefing aloud, for low-literacy users, in either language</a:t>
-            </a:r>
-            <a:endParaRPr lang="en-US" sz="1200" dirty="0"/>
-          </a:p>
-        </p:txBody>
-      </p:sp>
-      <p:sp>
-        <p:nvSpPr>
-          <p:cNvPr id="15" name="Shape 10"/>
-          <p:cNvSpPr/>
-          <p:nvPr/>
-        </p:nvSpPr>
-        <p:spPr>
-          <a:xfrm>
-            <a:off x="8138160" y="1554480"/>
+                <a:latin typeface="Cambria" pitchFamily="34" charset="0"/>
+                <a:ea typeface="Cambria" pitchFamily="34" charset="-122"/>
+                <a:cs typeface="Cambria" pitchFamily="34" charset="-120"/>
+              </a:rPr>
+              <a:t>Inclusivity &amp; Accessibility</a:t>
+            </a:r>
+            <a:endParaRPr lang="en-US" sz="3000" dirty="0"/>
+          </a:p>
+        </p:txBody>
+      </p:sp>
+      <p:sp>
+        <p:nvSpPr>
+          <p:cNvPr id="5" name="Shape 2"/>
+          <p:cNvSpPr/>
+          <p:nvPr/>
+        </p:nvSpPr>
+        <p:spPr>
+          <a:xfrm>
+            <a:off x="731520" y="1554480"/>
             <a:ext cx="3383280" cy="2926080"/>
           </a:xfrm>
           <a:prstGeom prst="roundRect">
@@ -8605,7 +8014,7 @@
           </a:solidFill>
           <a:ln/>
           <a:effectLst>
-            <a:outerShdw sx="100000" sy="100000" kx="0" ky="0" algn="bl" rotWithShape="0" blurRad="101600" dist="38100" dir="2700000">
+            <a:outerShdw blurRad="101600" dist="38100" dir="2700000" algn="bl" rotWithShape="0">
               <a:srgbClr val="000000">
                 <a:alpha val="12000"/>
               </a:srgbClr>
@@ -8615,13 +8024,13 @@
       </p:sp>
       <p:sp>
         <p:nvSpPr>
-          <p:cNvPr id="16" name="Shape 11"/>
-          <p:cNvSpPr/>
-          <p:nvPr/>
-        </p:nvSpPr>
-        <p:spPr>
-          <a:xfrm>
-            <a:off x="9418320" y="1874520"/>
+          <p:cNvPr id="6" name="Shape 3"/>
+          <p:cNvSpPr/>
+          <p:nvPr/>
+        </p:nvSpPr>
+        <p:spPr>
+          <a:xfrm>
+            <a:off x="2011680" y="1874520"/>
             <a:ext cx="822960" cy="822960"/>
           </a:xfrm>
           <a:prstGeom prst="ellipse">
@@ -8635,7 +8044,158 @@
       </p:sp>
       <p:pic>
         <p:nvPicPr>
-          <p:cNvPr id="17" name="Image 3" descr="preencoded.png">    </p:cNvPr>
+          <p:cNvPr id="7" name="Image 1" descr="preencoded.png"/>
+          <p:cNvPicPr>
+            <a:picLocks noChangeAspect="1"/>
+          </p:cNvPicPr>
+          <p:nvPr/>
+        </p:nvPicPr>
+        <p:blipFill>
+          <a:blip r:embed="rId3"/>
+          <a:stretch>
+            <a:fillRect/>
+          </a:stretch>
+        </p:blipFill>
+        <p:spPr>
+          <a:xfrm>
+            <a:off x="2196846" y="2059686"/>
+            <a:ext cx="452628" cy="452628"/>
+          </a:xfrm>
+          <a:prstGeom prst="rect">
+            <a:avLst/>
+          </a:prstGeom>
+        </p:spPr>
+      </p:pic>
+      <p:sp>
+        <p:nvSpPr>
+          <p:cNvPr id="8" name="Text 4"/>
+          <p:cNvSpPr/>
+          <p:nvPr/>
+        </p:nvSpPr>
+        <p:spPr>
+          <a:xfrm>
+            <a:off x="914400" y="2880360"/>
+            <a:ext cx="3017520" cy="457200"/>
+          </a:xfrm>
+          <a:prstGeom prst="rect">
+            <a:avLst/>
+          </a:prstGeom>
+          <a:noFill/>
+          <a:ln/>
+        </p:spPr>
+        <p:txBody>
+          <a:bodyPr wrap="square" rtlCol="0" anchor="ctr"/>
+          <a:lstStyle/>
+          <a:p>
+            <a:pPr marL="0" indent="0" algn="ctr">
+              <a:buNone/>
+            </a:pPr>
+            <a:r>
+              <a:rPr lang="en-US" sz="1500" b="1" dirty="0">
+                <a:solidFill>
+                  <a:srgbClr val="1B1F23"/>
+                </a:solidFill>
+                <a:latin typeface="Calibri" pitchFamily="34" charset="0"/>
+                <a:ea typeface="Calibri" pitchFamily="34" charset="-122"/>
+                <a:cs typeface="Calibri" pitchFamily="34" charset="-120"/>
+              </a:rPr>
+              <a:t>English + Hindi</a:t>
+            </a:r>
+            <a:endParaRPr lang="en-US" sz="1500" dirty="0"/>
+          </a:p>
+        </p:txBody>
+      </p:sp>
+      <p:sp>
+        <p:nvSpPr>
+          <p:cNvPr id="9" name="Text 5"/>
+          <p:cNvSpPr/>
+          <p:nvPr/>
+        </p:nvSpPr>
+        <p:spPr>
+          <a:xfrm>
+            <a:off x="1005840" y="3383280"/>
+            <a:ext cx="2834640" cy="1005840"/>
+          </a:xfrm>
+          <a:prstGeom prst="rect">
+            <a:avLst/>
+          </a:prstGeom>
+          <a:noFill/>
+          <a:ln/>
+        </p:spPr>
+        <p:txBody>
+          <a:bodyPr wrap="square" rtlCol="0" anchor="ctr"/>
+          <a:lstStyle/>
+          <a:p>
+            <a:pPr marL="0" indent="0" algn="ctr">
+              <a:buNone/>
+            </a:pPr>
+            <a:r>
+              <a:rPr lang="en-US" sz="1200" dirty="0">
+                <a:solidFill>
+                  <a:srgbClr val="667085"/>
+                </a:solidFill>
+                <a:latin typeface="Calibri" pitchFamily="34" charset="0"/>
+                <a:ea typeface="Calibri" pitchFamily="34" charset="-122"/>
+                <a:cs typeface="Calibri" pitchFamily="34" charset="-120"/>
+              </a:rPr>
+              <a:t>Every label, action, and AI briefing switches language instantly — including zone names</a:t>
+            </a:r>
+            <a:endParaRPr lang="en-US" sz="1200" dirty="0"/>
+          </a:p>
+        </p:txBody>
+      </p:sp>
+      <p:sp>
+        <p:nvSpPr>
+          <p:cNvPr id="10" name="Shape 6"/>
+          <p:cNvSpPr/>
+          <p:nvPr/>
+        </p:nvSpPr>
+        <p:spPr>
+          <a:xfrm>
+            <a:off x="4434840" y="1554480"/>
+            <a:ext cx="3383280" cy="2926080"/>
+          </a:xfrm>
+          <a:prstGeom prst="roundRect">
+            <a:avLst>
+              <a:gd name="adj" fmla="val 3125"/>
+            </a:avLst>
+          </a:prstGeom>
+          <a:solidFill>
+            <a:srgbClr val="F7F7F8"/>
+          </a:solidFill>
+          <a:ln/>
+          <a:effectLst>
+            <a:outerShdw blurRad="101600" dist="38100" dir="2700000" algn="bl" rotWithShape="0">
+              <a:srgbClr val="000000">
+                <a:alpha val="12000"/>
+              </a:srgbClr>
+            </a:outerShdw>
+          </a:effectLst>
+        </p:spPr>
+      </p:sp>
+      <p:sp>
+        <p:nvSpPr>
+          <p:cNvPr id="11" name="Shape 7"/>
+          <p:cNvSpPr/>
+          <p:nvPr/>
+        </p:nvSpPr>
+        <p:spPr>
+          <a:xfrm>
+            <a:off x="5715000" y="1874520"/>
+            <a:ext cx="822960" cy="822960"/>
+          </a:xfrm>
+          <a:prstGeom prst="ellipse">
+            <a:avLst/>
+          </a:prstGeom>
+          <a:solidFill>
+            <a:srgbClr val="E6F4EA"/>
+          </a:solidFill>
+          <a:ln/>
+        </p:spPr>
+      </p:sp>
+      <p:pic>
+        <p:nvPicPr>
+          <p:cNvPr id="12" name="Image 2" descr="preencoded.png"/>
           <p:cNvPicPr>
             <a:picLocks noChangeAspect="1"/>
           </p:cNvPicPr>
@@ -8649,7 +8209,7 @@
         </p:blipFill>
         <p:spPr>
           <a:xfrm>
-            <a:off x="9603486" y="2059686"/>
+            <a:off x="5900166" y="2059686"/>
             <a:ext cx="452628" cy="452628"/>
           </a:xfrm>
           <a:prstGeom prst="rect">
@@ -8659,13 +8219,13 @@
       </p:pic>
       <p:sp>
         <p:nvSpPr>
-          <p:cNvPr id="18" name="Text 12"/>
-          <p:cNvSpPr/>
-          <p:nvPr/>
-        </p:nvSpPr>
-        <p:spPr>
-          <a:xfrm>
-            <a:off x="8321040" y="2880360"/>
+          <p:cNvPr id="13" name="Text 8"/>
+          <p:cNvSpPr/>
+          <p:nvPr/>
+        </p:nvSpPr>
+        <p:spPr>
+          <a:xfrm>
+            <a:off x="4617720" y="2880360"/>
             <a:ext cx="3017520" cy="457200"/>
           </a:xfrm>
           <a:prstGeom prst="rect">
@@ -8678,7 +8238,7 @@
           <a:bodyPr wrap="square" rtlCol="0" anchor="ctr"/>
           <a:lstStyle/>
           <a:p>
-            <a:pPr algn="ctr" indent="0" marL="0">
+            <a:pPr marL="0" indent="0" algn="ctr">
               <a:buNone/>
             </a:pPr>
             <a:r>
@@ -8690,7 +8250,7 @@
                 <a:ea typeface="Calibri" pitchFamily="34" charset="-122"/>
                 <a:cs typeface="Calibri" pitchFamily="34" charset="-120"/>
               </a:rPr>
-              <a:t>Mobile-Responsive</a:t>
+              <a:t>Voice Playback</a:t>
             </a:r>
             <a:endParaRPr lang="en-US" sz="1500" dirty="0"/>
           </a:p>
@@ -8698,13 +8258,13 @@
       </p:sp>
       <p:sp>
         <p:nvSpPr>
-          <p:cNvPr id="19" name="Text 13"/>
-          <p:cNvSpPr/>
-          <p:nvPr/>
-        </p:nvSpPr>
-        <p:spPr>
-          <a:xfrm>
-            <a:off x="8412480" y="3383280"/>
+          <p:cNvPr id="14" name="Text 9"/>
+          <p:cNvSpPr/>
+          <p:nvPr/>
+        </p:nvSpPr>
+        <p:spPr>
+          <a:xfrm>
+            <a:off x="4709160" y="3383280"/>
             <a:ext cx="2834640" cy="1005840"/>
           </a:xfrm>
           <a:prstGeom prst="rect">
@@ -8717,7 +8277,7 @@
           <a:bodyPr wrap="square" rtlCol="0" anchor="ctr"/>
           <a:lstStyle/>
           <a:p>
-            <a:pPr algn="ctr" indent="0" marL="0">
+            <a:pPr marL="0" indent="0" algn="ctr">
               <a:buNone/>
             </a:pPr>
             <a:r>
@@ -8729,6 +8289,157 @@
                 <a:ea typeface="Calibri" pitchFamily="34" charset="-122"/>
                 <a:cs typeface="Calibri" pitchFamily="34" charset="-120"/>
               </a:rPr>
+              <a:t>Browser text-to-speech reads any briefing aloud, for low-literacy users, in either language</a:t>
+            </a:r>
+            <a:endParaRPr lang="en-US" sz="1200" dirty="0"/>
+          </a:p>
+        </p:txBody>
+      </p:sp>
+      <p:sp>
+        <p:nvSpPr>
+          <p:cNvPr id="15" name="Shape 10"/>
+          <p:cNvSpPr/>
+          <p:nvPr/>
+        </p:nvSpPr>
+        <p:spPr>
+          <a:xfrm>
+            <a:off x="8138160" y="1554480"/>
+            <a:ext cx="3383280" cy="2926080"/>
+          </a:xfrm>
+          <a:prstGeom prst="roundRect">
+            <a:avLst>
+              <a:gd name="adj" fmla="val 3125"/>
+            </a:avLst>
+          </a:prstGeom>
+          <a:solidFill>
+            <a:srgbClr val="F7F7F8"/>
+          </a:solidFill>
+          <a:ln/>
+          <a:effectLst>
+            <a:outerShdw blurRad="101600" dist="38100" dir="2700000" algn="bl" rotWithShape="0">
+              <a:srgbClr val="000000">
+                <a:alpha val="12000"/>
+              </a:srgbClr>
+            </a:outerShdw>
+          </a:effectLst>
+        </p:spPr>
+      </p:sp>
+      <p:sp>
+        <p:nvSpPr>
+          <p:cNvPr id="16" name="Shape 11"/>
+          <p:cNvSpPr/>
+          <p:nvPr/>
+        </p:nvSpPr>
+        <p:spPr>
+          <a:xfrm>
+            <a:off x="9418320" y="1874520"/>
+            <a:ext cx="822960" cy="822960"/>
+          </a:xfrm>
+          <a:prstGeom prst="ellipse">
+            <a:avLst/>
+          </a:prstGeom>
+          <a:solidFill>
+            <a:srgbClr val="E6F4EA"/>
+          </a:solidFill>
+          <a:ln/>
+        </p:spPr>
+      </p:sp>
+      <p:pic>
+        <p:nvPicPr>
+          <p:cNvPr id="17" name="Image 3" descr="preencoded.png"/>
+          <p:cNvPicPr>
+            <a:picLocks noChangeAspect="1"/>
+          </p:cNvPicPr>
+          <p:nvPr/>
+        </p:nvPicPr>
+        <p:blipFill>
+          <a:blip r:embed="rId5"/>
+          <a:stretch>
+            <a:fillRect/>
+          </a:stretch>
+        </p:blipFill>
+        <p:spPr>
+          <a:xfrm>
+            <a:off x="9603486" y="2059686"/>
+            <a:ext cx="452628" cy="452628"/>
+          </a:xfrm>
+          <a:prstGeom prst="rect">
+            <a:avLst/>
+          </a:prstGeom>
+        </p:spPr>
+      </p:pic>
+      <p:sp>
+        <p:nvSpPr>
+          <p:cNvPr id="18" name="Text 12"/>
+          <p:cNvSpPr/>
+          <p:nvPr/>
+        </p:nvSpPr>
+        <p:spPr>
+          <a:xfrm>
+            <a:off x="8321040" y="2880360"/>
+            <a:ext cx="3017520" cy="457200"/>
+          </a:xfrm>
+          <a:prstGeom prst="rect">
+            <a:avLst/>
+          </a:prstGeom>
+          <a:noFill/>
+          <a:ln/>
+        </p:spPr>
+        <p:txBody>
+          <a:bodyPr wrap="square" rtlCol="0" anchor="ctr"/>
+          <a:lstStyle/>
+          <a:p>
+            <a:pPr marL="0" indent="0" algn="ctr">
+              <a:buNone/>
+            </a:pPr>
+            <a:r>
+              <a:rPr lang="en-US" sz="1500" b="1" dirty="0">
+                <a:solidFill>
+                  <a:srgbClr val="1B1F23"/>
+                </a:solidFill>
+                <a:latin typeface="Calibri" pitchFamily="34" charset="0"/>
+                <a:ea typeface="Calibri" pitchFamily="34" charset="-122"/>
+                <a:cs typeface="Calibri" pitchFamily="34" charset="-120"/>
+              </a:rPr>
+              <a:t>Mobile-Responsive</a:t>
+            </a:r>
+            <a:endParaRPr lang="en-US" sz="1500" dirty="0"/>
+          </a:p>
+        </p:txBody>
+      </p:sp>
+      <p:sp>
+        <p:nvSpPr>
+          <p:cNvPr id="19" name="Text 13"/>
+          <p:cNvSpPr/>
+          <p:nvPr/>
+        </p:nvSpPr>
+        <p:spPr>
+          <a:xfrm>
+            <a:off x="8412480" y="3383280"/>
+            <a:ext cx="2834640" cy="1005840"/>
+          </a:xfrm>
+          <a:prstGeom prst="rect">
+            <a:avLst/>
+          </a:prstGeom>
+          <a:noFill/>
+          <a:ln/>
+        </p:spPr>
+        <p:txBody>
+          <a:bodyPr wrap="square" rtlCol="0" anchor="ctr"/>
+          <a:lstStyle/>
+          <a:p>
+            <a:pPr marL="0" indent="0" algn="ctr">
+              <a:buNone/>
+            </a:pPr>
+            <a:r>
+              <a:rPr lang="en-US" sz="1200" dirty="0">
+                <a:solidFill>
+                  <a:srgbClr val="667085"/>
+                </a:solidFill>
+                <a:latin typeface="Calibri" pitchFamily="34" charset="0"/>
+                <a:ea typeface="Calibri" pitchFamily="34" charset="-122"/>
+                <a:cs typeface="Calibri" pitchFamily="34" charset="-120"/>
+              </a:rPr>
               <a:t>Full layout reflows for phones — the device most citizens will actually use</a:t>
             </a:r>
             <a:endParaRPr lang="en-US" sz="1200" dirty="0"/>
@@ -8756,7 +8467,7 @@
           <a:bodyPr wrap="square" rtlCol="0" anchor="ctr"/>
           <a:lstStyle/>
           <a:p>
-            <a:pPr algn="ctr" indent="0" marL="0">
+            <a:pPr marL="0" indent="0" algn="ctr">
               <a:buNone/>
             </a:pPr>
             <a:r>
@@ -8790,6 +8501,7 @@
         <a:solidFill>
           <a:srgbClr val="FFFFFF"/>
         </a:solidFill>
+        <a:effectLst/>
       </p:bgPr>
     </p:bg>
     <p:spTree>
@@ -8828,212 +8540,7 @@
       </p:sp>
       <p:pic>
         <p:nvPicPr>
-          <p:cNvPr id="3" name="Image 0" descr="preencoded.png">    </p:cNvPr>
-          <p:cNvPicPr>
-            <a:picLocks noChangeAspect="1"/>
-          </p:cNvPicPr>
-          <p:nvPr/>
-        </p:nvPicPr>
-        <p:blipFill>
-          <a:blip r:embed="rId1"/>
-          <a:stretch>
-            <a:fillRect/>
-          </a:stretch>
-        </p:blipFill>
-        <p:spPr>
-          <a:xfrm>
-            <a:off x="875538" y="601218"/>
-            <a:ext cx="352044" cy="352044"/>
-          </a:xfrm>
-          <a:prstGeom prst="rect">
-            <a:avLst/>
-          </a:prstGeom>
-        </p:spPr>
-      </p:pic>
-      <p:sp>
-        <p:nvSpPr>
-          <p:cNvPr id="4" name="Text 1"/>
-          <p:cNvSpPr/>
-          <p:nvPr/>
-        </p:nvSpPr>
-        <p:spPr>
-          <a:xfrm>
-            <a:off x="1554480" y="457200"/>
-            <a:ext cx="8229600" cy="640080"/>
-          </a:xfrm>
-          <a:prstGeom prst="rect">
-            <a:avLst/>
-          </a:prstGeom>
-          <a:noFill/>
-          <a:ln/>
-        </p:spPr>
-        <p:txBody>
-          <a:bodyPr wrap="square" rtlCol="0" anchor="ctr"/>
-          <a:lstStyle/>
-          <a:p>
-            <a:pPr indent="0" marL="0">
-              <a:buNone/>
-            </a:pPr>
-            <a:r>
-              <a:rPr lang="en-US" sz="3000" b="1" dirty="0">
-                <a:solidFill>
-                  <a:srgbClr val="1B1F23"/>
-                </a:solidFill>
-                <a:latin typeface="Cambria" pitchFamily="34" charset="0"/>
-                <a:ea typeface="Cambria" pitchFamily="34" charset="-122"/>
-                <a:cs typeface="Cambria" pitchFamily="34" charset="-120"/>
-              </a:rPr>
-              <a:t>Why It's Deployable Today</a:t>
-            </a:r>
-            <a:endParaRPr lang="en-US" sz="3000" dirty="0"/>
-          </a:p>
-        </p:txBody>
-      </p:sp>
-      <p:sp>
-        <p:nvSpPr>
-          <p:cNvPr id="5" name="Shape 2"/>
-          <p:cNvSpPr/>
-          <p:nvPr/>
-        </p:nvSpPr>
-        <p:spPr>
-          <a:xfrm>
-            <a:off x="822960" y="1554480"/>
-            <a:ext cx="640080" cy="640080"/>
-          </a:xfrm>
-          <a:prstGeom prst="ellipse">
-            <a:avLst/>
-          </a:prstGeom>
-          <a:solidFill>
-            <a:srgbClr val="E8F0FE"/>
-          </a:solidFill>
-          <a:ln/>
-        </p:spPr>
-      </p:sp>
-      <p:pic>
-        <p:nvPicPr>
-          <p:cNvPr id="6" name="Image 1" descr="preencoded.png">    </p:cNvPr>
-          <p:cNvPicPr>
-            <a:picLocks noChangeAspect="1"/>
-          </p:cNvPicPr>
-          <p:nvPr/>
-        </p:nvPicPr>
-        <p:blipFill>
-          <a:blip r:embed="rId2"/>
-          <a:stretch>
-            <a:fillRect/>
-          </a:stretch>
-        </p:blipFill>
-        <p:spPr>
-          <a:xfrm>
-            <a:off x="966978" y="1698498"/>
-            <a:ext cx="352044" cy="352044"/>
-          </a:xfrm>
-          <a:prstGeom prst="rect">
-            <a:avLst/>
-          </a:prstGeom>
-        </p:spPr>
-      </p:pic>
-      <p:sp>
-        <p:nvSpPr>
-          <p:cNvPr id="7" name="Text 3"/>
-          <p:cNvSpPr/>
-          <p:nvPr/>
-        </p:nvSpPr>
-        <p:spPr>
-          <a:xfrm>
-            <a:off x="1691640" y="1508760"/>
-            <a:ext cx="3017520" cy="731520"/>
-          </a:xfrm>
-          <a:prstGeom prst="rect">
-            <a:avLst/>
-          </a:prstGeom>
-          <a:noFill/>
-          <a:ln/>
-        </p:spPr>
-        <p:txBody>
-          <a:bodyPr wrap="square" rtlCol="0" anchor="ctr"/>
-          <a:lstStyle/>
-          <a:p>
-            <a:pPr indent="0" marL="0">
-              <a:buNone/>
-            </a:pPr>
-            <a:r>
-              <a:rPr lang="en-US" sz="1450" b="1" dirty="0">
-                <a:solidFill>
-                  <a:srgbClr val="1B1F23"/>
-                </a:solidFill>
-                <a:latin typeface="Calibri" pitchFamily="34" charset="0"/>
-                <a:ea typeface="Calibri" pitchFamily="34" charset="-122"/>
-                <a:cs typeface="Calibri" pitchFamily="34" charset="-120"/>
-              </a:rPr>
-              <a:t>Zero infrastructure cost</a:t>
-            </a:r>
-            <a:endParaRPr lang="en-US" sz="1450" dirty="0"/>
-          </a:p>
-        </p:txBody>
-      </p:sp>
-      <p:sp>
-        <p:nvSpPr>
-          <p:cNvPr id="8" name="Text 4"/>
-          <p:cNvSpPr/>
-          <p:nvPr/>
-        </p:nvSpPr>
-        <p:spPr>
-          <a:xfrm>
-            <a:off x="4754880" y="1508760"/>
-            <a:ext cx="6675120" cy="731520"/>
-          </a:xfrm>
-          <a:prstGeom prst="rect">
-            <a:avLst/>
-          </a:prstGeom>
-          <a:noFill/>
-          <a:ln/>
-        </p:spPr>
-        <p:txBody>
-          <a:bodyPr wrap="square" rtlCol="0" anchor="ctr"/>
-          <a:lstStyle/>
-          <a:p>
-            <a:pPr indent="0" marL="0">
-              <a:buNone/>
-            </a:pPr>
-            <a:r>
-              <a:rPr lang="en-US" sz="1250" dirty="0">
-                <a:solidFill>
-                  <a:srgbClr val="667085"/>
-                </a:solidFill>
-                <a:latin typeface="Calibri" pitchFamily="34" charset="0"/>
-                <a:ea typeface="Calibri" pitchFamily="34" charset="-122"/>
-                <a:cs typeface="Calibri" pitchFamily="34" charset="-120"/>
-              </a:rPr>
-              <a:t>Firebase free Spark plan + GitHub Actions + free-tier APIs — no billing account anywhere in the stack</a:t>
-            </a:r>
-            <a:endParaRPr lang="en-US" sz="1250" dirty="0"/>
-          </a:p>
-        </p:txBody>
-      </p:sp>
-      <p:sp>
-        <p:nvSpPr>
-          <p:cNvPr id="9" name="Shape 5"/>
-          <p:cNvSpPr/>
-          <p:nvPr/>
-        </p:nvSpPr>
-        <p:spPr>
-          <a:xfrm>
-            <a:off x="822960" y="2514600"/>
-            <a:ext cx="640080" cy="640080"/>
-          </a:xfrm>
-          <a:prstGeom prst="ellipse">
-            <a:avLst/>
-          </a:prstGeom>
-          <a:solidFill>
-            <a:srgbClr val="E8F0FE"/>
-          </a:solidFill>
-          <a:ln/>
-        </p:spPr>
-      </p:sp>
-      <p:pic>
-        <p:nvPicPr>
-          <p:cNvPr id="10" name="Image 2" descr="preencoded.png">    </p:cNvPr>
+          <p:cNvPr id="3" name="Image 0" descr="preencoded.png"/>
           <p:cNvPicPr>
             <a:picLocks noChangeAspect="1"/>
           </p:cNvPicPr>
@@ -9047,7 +8554,7 @@
         </p:blipFill>
         <p:spPr>
           <a:xfrm>
-            <a:off x="966978" y="2658618"/>
+            <a:off x="875538" y="601218"/>
             <a:ext cx="352044" cy="352044"/>
           </a:xfrm>
           <a:prstGeom prst="rect">
@@ -9057,14 +8564,14 @@
       </p:pic>
       <p:sp>
         <p:nvSpPr>
-          <p:cNvPr id="11" name="Text 6"/>
-          <p:cNvSpPr/>
-          <p:nvPr/>
-        </p:nvSpPr>
-        <p:spPr>
-          <a:xfrm>
-            <a:off x="1691640" y="2468880"/>
-            <a:ext cx="3017520" cy="731520"/>
+          <p:cNvPr id="4" name="Text 1"/>
+          <p:cNvSpPr/>
+          <p:nvPr/>
+        </p:nvSpPr>
+        <p:spPr>
+          <a:xfrm>
+            <a:off x="1554480" y="457200"/>
+            <a:ext cx="8229600" cy="640080"/>
           </a:xfrm>
           <a:prstGeom prst="rect">
             <a:avLst/>
@@ -9076,72 +8583,33 @@
           <a:bodyPr wrap="square" rtlCol="0" anchor="ctr"/>
           <a:lstStyle/>
           <a:p>
-            <a:pPr indent="0" marL="0">
-              <a:buNone/>
-            </a:pPr>
-            <a:r>
-              <a:rPr lang="en-US" sz="1450" b="1" dirty="0">
+            <a:pPr marL="0" indent="0">
+              <a:buNone/>
+            </a:pPr>
+            <a:r>
+              <a:rPr lang="en-US" sz="3000" b="1" dirty="0">
                 <a:solidFill>
                   <a:srgbClr val="1B1F23"/>
                 </a:solidFill>
-                <a:latin typeface="Calibri" pitchFamily="34" charset="0"/>
-                <a:ea typeface="Calibri" pitchFamily="34" charset="-122"/>
-                <a:cs typeface="Calibri" pitchFamily="34" charset="-120"/>
-              </a:rPr>
-              <a:t>Fully automated pipeline</a:t>
-            </a:r>
-            <a:endParaRPr lang="en-US" sz="1450" dirty="0"/>
-          </a:p>
-        </p:txBody>
-      </p:sp>
-      <p:sp>
-        <p:nvSpPr>
-          <p:cNvPr id="12" name="Text 7"/>
-          <p:cNvSpPr/>
-          <p:nvPr/>
-        </p:nvSpPr>
-        <p:spPr>
-          <a:xfrm>
-            <a:off x="4754880" y="2468880"/>
-            <a:ext cx="6675120" cy="731520"/>
-          </a:xfrm>
-          <a:prstGeom prst="rect">
-            <a:avLst/>
-          </a:prstGeom>
-          <a:noFill/>
-          <a:ln/>
-        </p:spPr>
-        <p:txBody>
-          <a:bodyPr wrap="square" rtlCol="0" anchor="ctr"/>
-          <a:lstStyle/>
-          <a:p>
-            <a:pPr indent="0" marL="0">
-              <a:buNone/>
-            </a:pPr>
-            <a:r>
-              <a:rPr lang="en-US" sz="1250" dirty="0">
-                <a:solidFill>
-                  <a:srgbClr val="667085"/>
-                </a:solidFill>
-                <a:latin typeface="Calibri" pitchFamily="34" charset="0"/>
-                <a:ea typeface="Calibri" pitchFamily="34" charset="-122"/>
-                <a:cs typeface="Calibri" pitchFamily="34" charset="-120"/>
-              </a:rPr>
-              <a:t>No manual steps — three independent GitHub Actions schedules keep it running</a:t>
-            </a:r>
-            <a:endParaRPr lang="en-US" sz="1250" dirty="0"/>
-          </a:p>
-        </p:txBody>
-      </p:sp>
-      <p:sp>
-        <p:nvSpPr>
-          <p:cNvPr id="13" name="Shape 8"/>
-          <p:cNvSpPr/>
-          <p:nvPr/>
-        </p:nvSpPr>
-        <p:spPr>
-          <a:xfrm>
-            <a:off x="822960" y="3474720"/>
+                <a:latin typeface="Cambria" pitchFamily="34" charset="0"/>
+                <a:ea typeface="Cambria" pitchFamily="34" charset="-122"/>
+                <a:cs typeface="Cambria" pitchFamily="34" charset="-120"/>
+              </a:rPr>
+              <a:t>Why It's Deployable Today</a:t>
+            </a:r>
+            <a:endParaRPr lang="en-US" sz="3000" dirty="0"/>
+          </a:p>
+        </p:txBody>
+      </p:sp>
+      <p:sp>
+        <p:nvSpPr>
+          <p:cNvPr id="5" name="Shape 2"/>
+          <p:cNvSpPr/>
+          <p:nvPr/>
+        </p:nvSpPr>
+        <p:spPr>
+          <a:xfrm>
+            <a:off x="822960" y="1554480"/>
             <a:ext cx="640080" cy="640080"/>
           </a:xfrm>
           <a:prstGeom prst="ellipse">
@@ -9155,7 +8623,7 @@
       </p:sp>
       <p:pic>
         <p:nvPicPr>
-          <p:cNvPr id="14" name="Image 3" descr="preencoded.png">    </p:cNvPr>
+          <p:cNvPr id="6" name="Image 1" descr="preencoded.png"/>
           <p:cNvPicPr>
             <a:picLocks noChangeAspect="1"/>
           </p:cNvPicPr>
@@ -9169,7 +8637,7 @@
         </p:blipFill>
         <p:spPr>
           <a:xfrm>
-            <a:off x="966978" y="3618738"/>
+            <a:off x="966978" y="1698498"/>
             <a:ext cx="352044" cy="352044"/>
           </a:xfrm>
           <a:prstGeom prst="rect">
@@ -9179,13 +8647,13 @@
       </p:pic>
       <p:sp>
         <p:nvSpPr>
-          <p:cNvPr id="15" name="Text 9"/>
-          <p:cNvSpPr/>
-          <p:nvPr/>
-        </p:nvSpPr>
-        <p:spPr>
-          <a:xfrm>
-            <a:off x="1691640" y="3429000"/>
+          <p:cNvPr id="7" name="Text 3"/>
+          <p:cNvSpPr/>
+          <p:nvPr/>
+        </p:nvSpPr>
+        <p:spPr>
+          <a:xfrm>
+            <a:off x="1691640" y="1508760"/>
             <a:ext cx="3017520" cy="731520"/>
           </a:xfrm>
           <a:prstGeom prst="rect">
@@ -9198,7 +8666,7 @@
           <a:bodyPr wrap="square" rtlCol="0" anchor="ctr"/>
           <a:lstStyle/>
           <a:p>
-            <a:pPr indent="0" marL="0">
+            <a:pPr marL="0" indent="0">
               <a:buNone/>
             </a:pPr>
             <a:r>
@@ -9210,6 +8678,250 @@
                 <a:ea typeface="Calibri" pitchFamily="34" charset="-122"/>
                 <a:cs typeface="Calibri" pitchFamily="34" charset="-120"/>
               </a:rPr>
+              <a:t>Zero infrastructure cost</a:t>
+            </a:r>
+            <a:endParaRPr lang="en-US" sz="1450" dirty="0"/>
+          </a:p>
+        </p:txBody>
+      </p:sp>
+      <p:sp>
+        <p:nvSpPr>
+          <p:cNvPr id="8" name="Text 4"/>
+          <p:cNvSpPr/>
+          <p:nvPr/>
+        </p:nvSpPr>
+        <p:spPr>
+          <a:xfrm>
+            <a:off x="4754880" y="1508760"/>
+            <a:ext cx="6675120" cy="731520"/>
+          </a:xfrm>
+          <a:prstGeom prst="rect">
+            <a:avLst/>
+          </a:prstGeom>
+          <a:noFill/>
+          <a:ln/>
+        </p:spPr>
+        <p:txBody>
+          <a:bodyPr wrap="square" rtlCol="0" anchor="ctr"/>
+          <a:lstStyle/>
+          <a:p>
+            <a:pPr marL="0" indent="0">
+              <a:buNone/>
+            </a:pPr>
+            <a:r>
+              <a:rPr lang="en-US" sz="1250" dirty="0">
+                <a:solidFill>
+                  <a:srgbClr val="667085"/>
+                </a:solidFill>
+                <a:latin typeface="Calibri" pitchFamily="34" charset="0"/>
+                <a:ea typeface="Calibri" pitchFamily="34" charset="-122"/>
+                <a:cs typeface="Calibri" pitchFamily="34" charset="-120"/>
+              </a:rPr>
+              <a:t>Firebase free Spark plan + GitHub Actions + free-tier APIs — no billing account anywhere in the stack</a:t>
+            </a:r>
+            <a:endParaRPr lang="en-US" sz="1250" dirty="0"/>
+          </a:p>
+        </p:txBody>
+      </p:sp>
+      <p:sp>
+        <p:nvSpPr>
+          <p:cNvPr id="9" name="Shape 5"/>
+          <p:cNvSpPr/>
+          <p:nvPr/>
+        </p:nvSpPr>
+        <p:spPr>
+          <a:xfrm>
+            <a:off x="822960" y="2514600"/>
+            <a:ext cx="640080" cy="640080"/>
+          </a:xfrm>
+          <a:prstGeom prst="ellipse">
+            <a:avLst/>
+          </a:prstGeom>
+          <a:solidFill>
+            <a:srgbClr val="E8F0FE"/>
+          </a:solidFill>
+          <a:ln/>
+        </p:spPr>
+      </p:sp>
+      <p:pic>
+        <p:nvPicPr>
+          <p:cNvPr id="10" name="Image 2" descr="preencoded.png"/>
+          <p:cNvPicPr>
+            <a:picLocks noChangeAspect="1"/>
+          </p:cNvPicPr>
+          <p:nvPr/>
+        </p:nvPicPr>
+        <p:blipFill>
+          <a:blip r:embed="rId5"/>
+          <a:stretch>
+            <a:fillRect/>
+          </a:stretch>
+        </p:blipFill>
+        <p:spPr>
+          <a:xfrm>
+            <a:off x="966978" y="2658618"/>
+            <a:ext cx="352044" cy="352044"/>
+          </a:xfrm>
+          <a:prstGeom prst="rect">
+            <a:avLst/>
+          </a:prstGeom>
+        </p:spPr>
+      </p:pic>
+      <p:sp>
+        <p:nvSpPr>
+          <p:cNvPr id="11" name="Text 6"/>
+          <p:cNvSpPr/>
+          <p:nvPr/>
+        </p:nvSpPr>
+        <p:spPr>
+          <a:xfrm>
+            <a:off x="1691640" y="2468880"/>
+            <a:ext cx="3017520" cy="731520"/>
+          </a:xfrm>
+          <a:prstGeom prst="rect">
+            <a:avLst/>
+          </a:prstGeom>
+          <a:noFill/>
+          <a:ln/>
+        </p:spPr>
+        <p:txBody>
+          <a:bodyPr wrap="square" rtlCol="0" anchor="ctr"/>
+          <a:lstStyle/>
+          <a:p>
+            <a:pPr marL="0" indent="0">
+              <a:buNone/>
+            </a:pPr>
+            <a:r>
+              <a:rPr lang="en-US" sz="1450" b="1" dirty="0">
+                <a:solidFill>
+                  <a:srgbClr val="1B1F23"/>
+                </a:solidFill>
+                <a:latin typeface="Calibri" pitchFamily="34" charset="0"/>
+                <a:ea typeface="Calibri" pitchFamily="34" charset="-122"/>
+                <a:cs typeface="Calibri" pitchFamily="34" charset="-120"/>
+              </a:rPr>
+              <a:t>Fully automated pipeline</a:t>
+            </a:r>
+            <a:endParaRPr lang="en-US" sz="1450" dirty="0"/>
+          </a:p>
+        </p:txBody>
+      </p:sp>
+      <p:sp>
+        <p:nvSpPr>
+          <p:cNvPr id="12" name="Text 7"/>
+          <p:cNvSpPr/>
+          <p:nvPr/>
+        </p:nvSpPr>
+        <p:spPr>
+          <a:xfrm>
+            <a:off x="4754880" y="2468880"/>
+            <a:ext cx="6675120" cy="731520"/>
+          </a:xfrm>
+          <a:prstGeom prst="rect">
+            <a:avLst/>
+          </a:prstGeom>
+          <a:noFill/>
+          <a:ln/>
+        </p:spPr>
+        <p:txBody>
+          <a:bodyPr wrap="square" rtlCol="0" anchor="ctr"/>
+          <a:lstStyle/>
+          <a:p>
+            <a:pPr marL="0" indent="0">
+              <a:buNone/>
+            </a:pPr>
+            <a:r>
+              <a:rPr lang="en-US" sz="1250" dirty="0">
+                <a:solidFill>
+                  <a:srgbClr val="667085"/>
+                </a:solidFill>
+                <a:latin typeface="Calibri" pitchFamily="34" charset="0"/>
+                <a:ea typeface="Calibri" pitchFamily="34" charset="-122"/>
+                <a:cs typeface="Calibri" pitchFamily="34" charset="-120"/>
+              </a:rPr>
+              <a:t>No manual steps — three independent GitHub Actions schedules keep it running</a:t>
+            </a:r>
+            <a:endParaRPr lang="en-US" sz="1250" dirty="0"/>
+          </a:p>
+        </p:txBody>
+      </p:sp>
+      <p:sp>
+        <p:nvSpPr>
+          <p:cNvPr id="13" name="Shape 8"/>
+          <p:cNvSpPr/>
+          <p:nvPr/>
+        </p:nvSpPr>
+        <p:spPr>
+          <a:xfrm>
+            <a:off x="822960" y="3474720"/>
+            <a:ext cx="640080" cy="640080"/>
+          </a:xfrm>
+          <a:prstGeom prst="ellipse">
+            <a:avLst/>
+          </a:prstGeom>
+          <a:solidFill>
+            <a:srgbClr val="E8F0FE"/>
+          </a:solidFill>
+          <a:ln/>
+        </p:spPr>
+      </p:sp>
+      <p:pic>
+        <p:nvPicPr>
+          <p:cNvPr id="14" name="Image 3" descr="preencoded.png"/>
+          <p:cNvPicPr>
+            <a:picLocks noChangeAspect="1"/>
+          </p:cNvPicPr>
+          <p:nvPr/>
+        </p:nvPicPr>
+        <p:blipFill>
+          <a:blip r:embed="rId6"/>
+          <a:stretch>
+            <a:fillRect/>
+          </a:stretch>
+        </p:blipFill>
+        <p:spPr>
+          <a:xfrm>
+            <a:off x="966978" y="3618738"/>
+            <a:ext cx="352044" cy="352044"/>
+          </a:xfrm>
+          <a:prstGeom prst="rect">
+            <a:avLst/>
+          </a:prstGeom>
+        </p:spPr>
+      </p:pic>
+      <p:sp>
+        <p:nvSpPr>
+          <p:cNvPr id="15" name="Text 9"/>
+          <p:cNvSpPr/>
+          <p:nvPr/>
+        </p:nvSpPr>
+        <p:spPr>
+          <a:xfrm>
+            <a:off x="1691640" y="3429000"/>
+            <a:ext cx="3017520" cy="731520"/>
+          </a:xfrm>
+          <a:prstGeom prst="rect">
+            <a:avLst/>
+          </a:prstGeom>
+          <a:noFill/>
+          <a:ln/>
+        </p:spPr>
+        <p:txBody>
+          <a:bodyPr wrap="square" rtlCol="0" anchor="ctr"/>
+          <a:lstStyle/>
+          <a:p>
+            <a:pPr marL="0" indent="0">
+              <a:buNone/>
+            </a:pPr>
+            <a:r>
+              <a:rPr lang="en-US" sz="1450" b="1" dirty="0">
+                <a:solidFill>
+                  <a:srgbClr val="1B1F23"/>
+                </a:solidFill>
+                <a:latin typeface="Calibri" pitchFamily="34" charset="0"/>
+                <a:ea typeface="Calibri" pitchFamily="34" charset="-122"/>
+                <a:cs typeface="Calibri" pitchFamily="34" charset="-120"/>
+              </a:rPr>
               <a:t>Already live in production</a:t>
             </a:r>
             <a:endParaRPr lang="en-US" sz="1450" dirty="0"/>
@@ -9237,7 +8949,7 @@
           <a:bodyPr wrap="square" rtlCol="0" anchor="ctr"/>
           <a:lstStyle/>
           <a:p>
-            <a:pPr indent="0" marL="0">
+            <a:pPr marL="0" indent="0">
               <a:buNone/>
             </a:pPr>
             <a:r>
@@ -9276,7 +8988,7 @@
           </a:solidFill>
           <a:ln/>
           <a:effectLst>
-            <a:outerShdw sx="100000" sy="100000" kx="0" ky="0" algn="bl" rotWithShape="0" blurRad="101600" dist="38100" dir="2700000">
+            <a:outerShdw blurRad="101600" dist="38100" dir="2700000" algn="bl" rotWithShape="0">
               <a:srgbClr val="000000">
                 <a:alpha val="12000"/>
               </a:srgbClr>
@@ -9305,7 +9017,7 @@
           <a:bodyPr wrap="square" rtlCol="0" anchor="ctr"/>
           <a:lstStyle/>
           <a:p>
-            <a:pPr algn="l" indent="0" marL="0">
+            <a:pPr marL="0" indent="0" algn="l">
               <a:buNone/>
             </a:pPr>
             <a:r>
@@ -9344,7 +9056,7 @@
           <a:bodyPr wrap="square" rtlCol="0" anchor="ctr"/>
           <a:lstStyle/>
           <a:p>
-            <a:pPr algn="l" indent="0" marL="0">
+            <a:pPr marL="0" indent="0" algn="l">
               <a:buNone/>
             </a:pPr>
             <a:r>
@@ -9383,7 +9095,7 @@
           <a:bodyPr wrap="square" rtlCol="0" anchor="ctr"/>
           <a:lstStyle/>
           <a:p>
-            <a:pPr algn="l" indent="0" marL="0">
+            <a:pPr marL="0" indent="0" algn="l">
               <a:buNone/>
             </a:pPr>
             <a:r>
@@ -9422,7 +9134,7 @@
           <a:bodyPr wrap="square" rtlCol="0" anchor="ctr"/>
           <a:lstStyle/>
           <a:p>
-            <a:pPr algn="l" indent="0" marL="0">
+            <a:pPr marL="0" indent="0" algn="l">
               <a:buNone/>
             </a:pPr>
             <a:r>
@@ -9461,7 +9173,7 @@
           <a:bodyPr wrap="square" rtlCol="0" anchor="ctr"/>
           <a:lstStyle/>
           <a:p>
-            <a:pPr algn="l" indent="0" marL="0">
+            <a:pPr marL="0" indent="0" algn="l">
               <a:buNone/>
             </a:pPr>
             <a:r>
@@ -9500,7 +9212,7 @@
           <a:bodyPr wrap="square" rtlCol="0" anchor="ctr"/>
           <a:lstStyle/>
           <a:p>
-            <a:pPr algn="l" indent="0" marL="0">
+            <a:pPr marL="0" indent="0" algn="l">
               <a:buNone/>
             </a:pPr>
             <a:r>
@@ -9819,4 +9531,299 @@
     </a:ext>
   </a:extLst>
 </a:theme>
+</file>
+
+<file path=ppt/theme/theme2.xml><?xml version="1.0" encoding="utf-8"?>
+<a:theme xmlns:a="http://schemas.openxmlformats.org/drawingml/2006/main" name="Office Theme">
+  <a:themeElements>
+    <a:clrScheme name="Office">
+      <a:dk1>
+        <a:sysClr val="windowText" lastClr="000000"/>
+      </a:dk1>
+      <a:lt1>
+        <a:sysClr val="window" lastClr="FFFFFF"/>
+      </a:lt1>
+      <a:dk2>
+        <a:srgbClr val="44546A"/>
+      </a:dk2>
+      <a:lt2>
+        <a:srgbClr val="E7E6E6"/>
+      </a:lt2>
+      <a:accent1>
+        <a:srgbClr val="4472C4"/>
+      </a:accent1>
+      <a:accent2>
+        <a:srgbClr val="ED7D31"/>
+      </a:accent2>
+      <a:accent3>
+        <a:srgbClr val="A5A5A5"/>
+      </a:accent3>
+      <a:accent4>
+        <a:srgbClr val="FFC000"/>
+      </a:accent4>
+      <a:accent5>
+        <a:srgbClr val="5B9BD5"/>
+      </a:accent5>
+      <a:accent6>
+        <a:srgbClr val="70AD47"/>
+      </a:accent6>
+      <a:hlink>
+        <a:srgbClr val="0563C1"/>
+      </a:hlink>
+      <a:folHlink>
+        <a:srgbClr val="954F72"/>
+      </a:folHlink>
+    </a:clrScheme>
+    <a:fontScheme name="Office">
+      <a:majorFont>
+        <a:latin typeface="Calibri Light" panose="020F0302020204030204"/>
+        <a:ea typeface=""/>
+        <a:cs typeface=""/>
+        <a:font script="Jpan" typeface="游ゴシック Light"/>
+        <a:font script="Hang" typeface="맑은 고딕"/>
+        <a:font script="Hans" typeface="等线 Light"/>
+        <a:font script="Hant" typeface="新細明體"/>
+        <a:font script="Arab" typeface="Times New Roman"/>
+        <a:font script="Hebr" typeface="Times New Roman"/>
+        <a:font script="Thai" typeface="Angsana New"/>
+        <a:font script="Ethi" typeface="Nyala"/>
+        <a:font script="Beng" typeface="Vrinda"/>
+        <a:font script="Gujr" typeface="Shruti"/>
+        <a:font script="Khmr" typeface="MoolBoran"/>
+        <a:font script="Knda" typeface="Tunga"/>
+        <a:font script="Guru" typeface="Raavi"/>
+        <a:font script="Cans" typeface="Euphemia"/>
+        <a:font script="Cher" typeface="Plantagenet Cherokee"/>
+        <a:font script="Yiii" typeface="Microsoft Yi Baiti"/>
+        <a:font script="Tibt" typeface="Microsoft Himalaya"/>
+        <a:font script="Thaa" typeface="MV Boli"/>
+        <a:font script="Deva" typeface="Mangal"/>
+        <a:font script="Telu" typeface="Gautami"/>
+        <a:font script="Taml" typeface="Latha"/>
+        <a:font script="Syrc" typeface="Estrangelo Edessa"/>
+        <a:font script="Orya" typeface="Kalinga"/>
+        <a:font script="Mlym" typeface="Kartika"/>
+        <a:font script="Laoo" typeface="DokChampa"/>
+        <a:font script="Sinh" typeface="Iskoola Pota"/>
+        <a:font script="Mong" typeface="Mongolian Baiti"/>
+        <a:font script="Viet" typeface="Times New Roman"/>
+        <a:font script="Uigh" typeface="Microsoft Uighur"/>
+        <a:font script="Geor" typeface="Sylfaen"/>
+        <a:font script="Armn" typeface="Arial"/>
+        <a:font script="Bugi" typeface="Leelawadee UI"/>
+        <a:font script="Bopo" typeface="Microsoft JhengHei"/>
+        <a:font script="Java" typeface="Javanese Text"/>
+        <a:font script="Lisu" typeface="Segoe UI"/>
+        <a:font script="Mymr" typeface="Myanmar Text"/>
+        <a:font script="Nkoo" typeface="Ebrima"/>
+        <a:font script="Olck" typeface="Nirmala UI"/>
+        <a:font script="Osma" typeface="Ebrima"/>
+        <a:font script="Phag" typeface="Phagspa"/>
+        <a:font script="Syrn" typeface="Estrangelo Edessa"/>
+        <a:font script="Syrj" typeface="Estrangelo Edessa"/>
+        <a:font script="Syre" typeface="Estrangelo Edessa"/>
+        <a:font script="Sora" typeface="Nirmala UI"/>
+        <a:font script="Tale" typeface="Microsoft Tai Le"/>
+        <a:font script="Talu" typeface="Microsoft New Tai Lue"/>
+        <a:font script="Tfng" typeface="Ebrima"/>
+      </a:majorFont>
+      <a:minorFont>
+        <a:latin typeface="Calibri" panose="020F0502020204030204"/>
+        <a:ea typeface=""/>
+        <a:cs typeface=""/>
+        <a:font script="Jpan" typeface="游ゴシック"/>
+        <a:font script="Hang" typeface="맑은 고딕"/>
+        <a:font script="Hans" typeface="等线"/>
+        <a:font script="Hant" typeface="新細明體"/>
+        <a:font script="Arab" typeface="Arial"/>
+        <a:font script="Hebr" typeface="Arial"/>
+        <a:font script="Thai" typeface="Cordia New"/>
+        <a:font script="Ethi" typeface="Nyala"/>
+        <a:font script="Beng" typeface="Vrinda"/>
+        <a:font script="Gujr" typeface="Shruti"/>
+        <a:font script="Khmr" typeface="DaunPenh"/>
+        <a:font script="Knda" typeface="Tunga"/>
+        <a:font script="Guru" typeface="Raavi"/>
+        <a:font script="Cans" typeface="Euphemia"/>
+        <a:font script="Cher" typeface="Plantagenet Cherokee"/>
+        <a:font script="Yiii" typeface="Microsoft Yi Baiti"/>
+        <a:font script="Tibt" typeface="Microsoft Himalaya"/>
+        <a:font script="Thaa" typeface="MV Boli"/>
+        <a:font script="Deva" typeface="Mangal"/>
+        <a:font script="Telu" typeface="Gautami"/>
+        <a:font script="Taml" typeface="Latha"/>
+        <a:font script="Syrc" typeface="Estrangelo Edessa"/>
+        <a:font script="Orya" typeface="Kalinga"/>
+        <a:font script="Mlym" typeface="Kartika"/>
+        <a:font script="Laoo" typeface="DokChampa"/>
+        <a:font script="Sinh" typeface="Iskoola Pota"/>
+        <a:font script="Mong" typeface="Mongolian Baiti"/>
+        <a:font script="Viet" typeface="Arial"/>
+        <a:font script="Uigh" typeface="Microsoft Uighur"/>
+        <a:font script="Geor" typeface="Sylfaen"/>
+        <a:font script="Armn" typeface="Arial"/>
+        <a:font script="Bugi" typeface="Leelawadee UI"/>
+        <a:font script="Bopo" typeface="Microsoft JhengHei"/>
+        <a:font script="Java" typeface="Javanese Text"/>
+        <a:font script="Lisu" typeface="Segoe UI"/>
+        <a:font script="Mymr" typeface="Myanmar Text"/>
+        <a:font script="Nkoo" typeface="Ebrima"/>
+        <a:font script="Olck" typeface="Nirmala UI"/>
+        <a:font script="Osma" typeface="Ebrima"/>
+        <a:font script="Phag" typeface="Phagspa"/>
+        <a:font script="Syrn" typeface="Estrangelo Edessa"/>
+        <a:font script="Syrj" typeface="Estrangelo Edessa"/>
+        <a:font script="Syre" typeface="Estrangelo Edessa"/>
+        <a:font script="Sora" typeface="Nirmala UI"/>
+        <a:font script="Tale" typeface="Microsoft Tai Le"/>
+        <a:font script="Talu" typeface="Microsoft New Tai Lue"/>
+        <a:font script="Tfng" typeface="Ebrima"/>
+      </a:minorFont>
+    </a:fontScheme>
+    <a:fmtScheme name="Office">
+      <a:fillStyleLst>
+        <a:solidFill>
+          <a:schemeClr val="phClr"/>
+        </a:solidFill>
+        <a:gradFill rotWithShape="1">
+          <a:gsLst>
+            <a:gs pos="0">
+              <a:schemeClr val="phClr">
+                <a:lumMod val="110000"/>
+                <a:satMod val="105000"/>
+                <a:tint val="67000"/>
+              </a:schemeClr>
+            </a:gs>
+            <a:gs pos="50000">
+              <a:schemeClr val="phClr">
+                <a:lumMod val="105000"/>
+                <a:satMod val="103000"/>
+                <a:tint val="73000"/>
+              </a:schemeClr>
+            </a:gs>
+            <a:gs pos="100000">
+              <a:schemeClr val="phClr">
+                <a:lumMod val="105000"/>
+                <a:satMod val="109000"/>
+                <a:tint val="81000"/>
+              </a:schemeClr>
+            </a:gs>
+          </a:gsLst>
+          <a:lin ang="5400000" scaled="0"/>
+        </a:gradFill>
+        <a:gradFill rotWithShape="1">
+          <a:gsLst>
+            <a:gs pos="0">
+              <a:schemeClr val="phClr">
+                <a:satMod val="103000"/>
+                <a:lumMod val="102000"/>
+                <a:tint val="94000"/>
+              </a:schemeClr>
+            </a:gs>
+            <a:gs pos="50000">
+              <a:schemeClr val="phClr">
+                <a:satMod val="110000"/>
+                <a:lumMod val="100000"/>
+                <a:shade val="100000"/>
+              </a:schemeClr>
+            </a:gs>
+            <a:gs pos="100000">
+              <a:schemeClr val="phClr">
+                <a:lumMod val="99000"/>
+                <a:satMod val="120000"/>
+                <a:shade val="78000"/>
+              </a:schemeClr>
+            </a:gs>
+          </a:gsLst>
+          <a:lin ang="5400000" scaled="0"/>
+        </a:gradFill>
+      </a:fillStyleLst>
+      <a:lnStyleLst>
+        <a:ln w="6350" cap="flat" cmpd="sng" algn="ctr">
+          <a:solidFill>
+            <a:schemeClr val="phClr"/>
+          </a:solidFill>
+          <a:prstDash val="solid"/>
+          <a:miter lim="800000"/>
+        </a:ln>
+        <a:ln w="12700" cap="flat" cmpd="sng" algn="ctr">
+          <a:solidFill>
+            <a:schemeClr val="phClr"/>
+          </a:solidFill>
+          <a:prstDash val="solid"/>
+          <a:miter lim="800000"/>
+        </a:ln>
+        <a:ln w="19050" cap="flat" cmpd="sng" algn="ctr">
+          <a:solidFill>
+            <a:schemeClr val="phClr"/>
+          </a:solidFill>
+          <a:prstDash val="solid"/>
+          <a:miter lim="800000"/>
+        </a:ln>
+      </a:lnStyleLst>
+      <a:effectStyleLst>
+        <a:effectStyle>
+          <a:effectLst/>
+        </a:effectStyle>
+        <a:effectStyle>
+          <a:effectLst/>
+        </a:effectStyle>
+        <a:effectStyle>
+          <a:effectLst>
+            <a:outerShdw blurRad="57150" dist="19050" dir="5400000" algn="ctr" rotWithShape="0">
+              <a:srgbClr val="000000">
+                <a:alpha val="63000"/>
+              </a:srgbClr>
+            </a:outerShdw>
+          </a:effectLst>
+        </a:effectStyle>
+      </a:effectStyleLst>
+      <a:bgFillStyleLst>
+        <a:solidFill>
+          <a:schemeClr val="phClr"/>
+        </a:solidFill>
+        <a:solidFill>
+          <a:schemeClr val="phClr">
+            <a:tint val="95000"/>
+            <a:satMod val="170000"/>
+          </a:schemeClr>
+        </a:solidFill>
+        <a:gradFill rotWithShape="1">
+          <a:gsLst>
+            <a:gs pos="0">
+              <a:schemeClr val="phClr">
+                <a:tint val="93000"/>
+                <a:satMod val="150000"/>
+                <a:shade val="98000"/>
+                <a:lumMod val="102000"/>
+              </a:schemeClr>
+            </a:gs>
+            <a:gs pos="50000">
+              <a:schemeClr val="phClr">
+                <a:tint val="98000"/>
+                <a:satMod val="130000"/>
+                <a:shade val="90000"/>
+                <a:lumMod val="103000"/>
+              </a:schemeClr>
+            </a:gs>
+            <a:gs pos="100000">
+              <a:schemeClr val="phClr">
+                <a:shade val="63000"/>
+                <a:satMod val="120000"/>
+              </a:schemeClr>
+            </a:gs>
+          </a:gsLst>
+          <a:lin ang="5400000" scaled="0"/>
+        </a:gradFill>
+      </a:bgFillStyleLst>
+    </a:fmtScheme>
+  </a:themeElements>
+  <a:objectDefaults/>
+  <a:extraClrSchemeLst/>
+  <a:extLst>
+    <a:ext uri="{05A4C25C-085E-4340-85A3-A5531E510DB2}">
+      <thm15:themeFamily xmlns:thm15="http://schemas.microsoft.com/office/thememl/2012/main" name="Office Theme" id="{62F939B6-93AF-4DB8-9C6B-D6C7DFDC589F}" vid="{4A3C46E8-61CC-4603-A589-7422A47A8E4A}"/>
+    </a:ext>
+  </a:extLst>
+</a:theme>
 </file>